--- a/ch04/Django4-ch04-1015.pptx
+++ b/ch04/Django4-ch04-1015.pptx
@@ -42,11 +42,11 @@
     <p:sldId id="279" r:id="rId33"/>
     <p:sldId id="280" r:id="rId34"/>
     <p:sldId id="281" r:id="rId35"/>
-    <p:sldId id="282" r:id="rId36"/>
-    <p:sldId id="283" r:id="rId37"/>
-    <p:sldId id="284" r:id="rId38"/>
-    <p:sldId id="285" r:id="rId39"/>
-    <p:sldId id="319" r:id="rId40"/>
+    <p:sldId id="319" r:id="rId36"/>
+    <p:sldId id="282" r:id="rId37"/>
+    <p:sldId id="283" r:id="rId38"/>
+    <p:sldId id="284" r:id="rId39"/>
+    <p:sldId id="285" r:id="rId40"/>
     <p:sldId id="309" r:id="rId41"/>
     <p:sldId id="320" r:id="rId42"/>
     <p:sldId id="310" r:id="rId43"/>
@@ -182,7 +182,7 @@
   </p:defaultTextStyle>
   <p:extLst>
     <p:ext uri="{EFAFB233-063F-42B5-8137-9DF3F51BA10A}">
-      <p15:sldGuideLst xmlns:p15="http://schemas.microsoft.com/office/powerpoint/2012/main">
+      <p15:sldGuideLst xmlns:p15="http://schemas.microsoft.com/office/powerpoint/2012/main" xmlns="">
         <p15:guide id="1" orient="horz" pos="2160">
           <p15:clr>
             <a:srgbClr val="A4A3A4"/>
@@ -282,7 +282,7 @@
             <a:fld id="{FBFE2433-649F-42E5-AECB-94990831C40A}" type="datetimeFigureOut">
               <a:rPr lang="zh-TW" altLang="en-US" smtClean="0"/>
               <a:pPr/>
-              <a:t>2026/10/15</a:t>
+              <a:t>2026/10/16</a:t>
             </a:fld>
             <a:endParaRPr lang="zh-TW" altLang="en-US"/>
           </a:p>
@@ -855,29 +855,67 @@
           <a:lstStyle/>
           <a:p>
             <a:r>
+              <a:rPr lang="en-US" altLang="zh-TW" dirty="0" err="1"/>
+              <a:t>allproduct</a:t>
+            </a:r>
+            <a:r>
+              <a:rPr lang="en-US" altLang="zh-TW" dirty="0"/>
+              <a:t> = </a:t>
+            </a:r>
+            <a:r>
+              <a:rPr lang="en-US" altLang="zh-TW" dirty="0" err="1"/>
+              <a:t>Product.objects.all</a:t>
+            </a:r>
+            <a:r>
+              <a:rPr lang="en-US" altLang="zh-TW" dirty="0"/>
+              <a:t>().</a:t>
+            </a:r>
+            <a:r>
+              <a:rPr lang="en-US" altLang="zh-TW" dirty="0" err="1"/>
+              <a:t>order_by</a:t>
+            </a:r>
+            <a:r>
+              <a:rPr lang="en-US" altLang="zh-TW" dirty="0"/>
+              <a:t>('price’)</a:t>
+            </a:r>
+          </a:p>
+          <a:p>
+            <a:r>
               <a:rPr lang="zh-TW" altLang="en-US" dirty="0"/>
-              <a:t>注意：</a:t>
-            </a:r>
-            <a:r>
-              <a:rPr lang="zh-TW" altLang="en-US" b="1" dirty="0"/>
-              <a:t>要離開</a:t>
-            </a:r>
-            <a:r>
-              <a:rPr lang="en-US" altLang="zh-TW" b="1" dirty="0"/>
+              <a:t>或是在</a:t>
+            </a:r>
+            <a:r>
+              <a:rPr lang="en-US" altLang="zh-TW" dirty="0"/>
               <a:t>shell</a:t>
             </a:r>
             <a:r>
               <a:rPr lang="zh-TW" altLang="en-US" dirty="0"/>
-              <a:t>再重新進入，新</a:t>
-            </a:r>
-            <a:r>
-              <a:rPr lang="en-US" altLang="zh-TW" dirty="0"/>
-              <a:t>def</a:t>
-            </a:r>
-            <a:r>
-              <a:rPr lang="zh-TW" altLang="en-US" dirty="0"/>
-              <a:t>才會生效</a:t>
-            </a:r>
+              <a:t>直接打，不用指定變數</a:t>
+            </a:r>
+            <a:endParaRPr lang="en-US" altLang="zh-TW" dirty="0"/>
+          </a:p>
+          <a:p>
+            <a:r>
+              <a:rPr lang="en-US" altLang="zh-TW" dirty="0"/>
+              <a:t>&gt;&gt;&gt; </a:t>
+            </a:r>
+            <a:r>
+              <a:rPr lang="en-US" altLang="zh-TW" dirty="0" err="1"/>
+              <a:t>Product.objects.all</a:t>
+            </a:r>
+            <a:r>
+              <a:rPr lang="en-US" altLang="zh-TW" dirty="0"/>
+              <a:t>().</a:t>
+            </a:r>
+            <a:r>
+              <a:rPr lang="en-US" altLang="zh-TW" dirty="0" err="1"/>
+              <a:t>order_by</a:t>
+            </a:r>
+            <a:r>
+              <a:rPr lang="en-US" altLang="zh-TW" dirty="0"/>
+              <a:t>('price’)</a:t>
+            </a:r>
+            <a:endParaRPr lang="zh-TW" altLang="en-US" dirty="0"/>
           </a:p>
         </p:txBody>
       </p:sp>
@@ -908,7 +946,7 @@
     </p:spTree>
     <p:extLst>
       <p:ext uri="{BB962C8B-B14F-4D97-AF65-F5344CB8AC3E}">
-        <p14:creationId xmlns:p14="http://schemas.microsoft.com/office/powerpoint/2010/main" val="3248825395"/>
+        <p14:creationId xmlns:p14="http://schemas.microsoft.com/office/powerpoint/2010/main" val="3173976069"/>
       </p:ext>
     </p:extLst>
   </p:cSld>
@@ -963,10 +1001,29 @@
           <a:lstStyle/>
           <a:p>
             <a:r>
-              <a:rPr lang="en-US" altLang="zh-TW" dirty="0"/>
-              <a:t>Gt=greater than </a:t>
-            </a:r>
-            <a:endParaRPr lang="zh-TW" altLang="en-US" dirty="0"/>
+              <a:rPr lang="zh-TW" altLang="en-US" dirty="0"/>
+              <a:t>注意：</a:t>
+            </a:r>
+            <a:r>
+              <a:rPr lang="zh-TW" altLang="en-US" b="1" dirty="0"/>
+              <a:t>要離開</a:t>
+            </a:r>
+            <a:r>
+              <a:rPr lang="en-US" altLang="zh-TW" b="1" dirty="0"/>
+              <a:t>shell</a:t>
+            </a:r>
+            <a:r>
+              <a:rPr lang="zh-TW" altLang="en-US" dirty="0"/>
+              <a:t>再重新進入，新</a:t>
+            </a:r>
+            <a:r>
+              <a:rPr lang="en-US" altLang="zh-TW" dirty="0"/>
+              <a:t>def</a:t>
+            </a:r>
+            <a:r>
+              <a:rPr lang="zh-TW" altLang="en-US" dirty="0"/>
+              <a:t>才會生效</a:t>
+            </a:r>
           </a:p>
         </p:txBody>
       </p:sp>
@@ -988,7 +1045,7 @@
             <a:fld id="{027FE99C-3BAC-4305-ABBB-3890AB1B4510}" type="slidenum">
               <a:rPr lang="zh-TW" altLang="en-US" smtClean="0"/>
               <a:pPr/>
-              <a:t>37</a:t>
+              <a:t>36</a:t>
             </a:fld>
             <a:endParaRPr lang="zh-TW" altLang="en-US"/>
           </a:p>
@@ -997,7 +1054,7 @@
     </p:spTree>
     <p:extLst>
       <p:ext uri="{BB962C8B-B14F-4D97-AF65-F5344CB8AC3E}">
-        <p14:creationId xmlns:p14="http://schemas.microsoft.com/office/powerpoint/2010/main" val="3899880234"/>
+        <p14:creationId xmlns:p14="http://schemas.microsoft.com/office/powerpoint/2010/main" val="3248825395"/>
       </p:ext>
     </p:extLst>
   </p:cSld>
@@ -1052,65 +1109,8 @@
           <a:lstStyle/>
           <a:p>
             <a:r>
-              <a:rPr lang="en-US" altLang="zh-TW" dirty="0" err="1"/>
-              <a:t>allproduct</a:t>
-            </a:r>
-            <a:r>
-              <a:rPr lang="en-US" altLang="zh-TW" dirty="0"/>
-              <a:t> = </a:t>
-            </a:r>
-            <a:r>
-              <a:rPr lang="en-US" altLang="zh-TW" dirty="0" err="1"/>
-              <a:t>Product.objects.all</a:t>
-            </a:r>
-            <a:r>
-              <a:rPr lang="en-US" altLang="zh-TW" dirty="0"/>
-              <a:t>().</a:t>
-            </a:r>
-            <a:r>
-              <a:rPr lang="en-US" altLang="zh-TW" dirty="0" err="1"/>
-              <a:t>order_by</a:t>
-            </a:r>
-            <a:r>
-              <a:rPr lang="en-US" altLang="zh-TW" dirty="0"/>
-              <a:t>('price’)</a:t>
-            </a:r>
-          </a:p>
-          <a:p>
-            <a:r>
-              <a:rPr lang="zh-TW" altLang="en-US" dirty="0"/>
-              <a:t>或是在</a:t>
-            </a:r>
-            <a:r>
-              <a:rPr lang="en-US" altLang="zh-TW" dirty="0"/>
-              <a:t>shell</a:t>
-            </a:r>
-            <a:r>
-              <a:rPr lang="zh-TW" altLang="en-US" dirty="0"/>
-              <a:t>直接打，不用指定變數</a:t>
-            </a:r>
-            <a:endParaRPr lang="en-US" altLang="zh-TW" dirty="0"/>
-          </a:p>
-          <a:p>
-            <a:r>
-              <a:rPr lang="en-US" altLang="zh-TW" dirty="0"/>
-              <a:t>&gt;&gt;&gt; </a:t>
-            </a:r>
-            <a:r>
-              <a:rPr lang="en-US" altLang="zh-TW" dirty="0" err="1"/>
-              <a:t>Product.objects.all</a:t>
-            </a:r>
-            <a:r>
-              <a:rPr lang="en-US" altLang="zh-TW" dirty="0"/>
-              <a:t>().</a:t>
-            </a:r>
-            <a:r>
-              <a:rPr lang="en-US" altLang="zh-TW" dirty="0" err="1"/>
-              <a:t>order_by</a:t>
-            </a:r>
-            <a:r>
-              <a:rPr lang="en-US" altLang="zh-TW" dirty="0"/>
-              <a:t>('price’)</a:t>
+              <a:rPr lang="en-US" altLang="zh-TW" dirty="0"/>
+              <a:t>Gt=greater than </a:t>
             </a:r>
             <a:endParaRPr lang="zh-TW" altLang="en-US" dirty="0"/>
           </a:p>
@@ -1134,7 +1134,7 @@
             <a:fld id="{027FE99C-3BAC-4305-ABBB-3890AB1B4510}" type="slidenum">
               <a:rPr lang="zh-TW" altLang="en-US" smtClean="0"/>
               <a:pPr/>
-              <a:t>39</a:t>
+              <a:t>38</a:t>
             </a:fld>
             <a:endParaRPr lang="zh-TW" altLang="en-US"/>
           </a:p>
@@ -1143,7 +1143,7 @@
     </p:spTree>
     <p:extLst>
       <p:ext uri="{BB962C8B-B14F-4D97-AF65-F5344CB8AC3E}">
-        <p14:creationId xmlns:p14="http://schemas.microsoft.com/office/powerpoint/2010/main" val="3173976069"/>
+        <p14:creationId xmlns:p14="http://schemas.microsoft.com/office/powerpoint/2010/main" val="3899880234"/>
       </p:ext>
     </p:extLst>
   </p:cSld>
@@ -1413,7 +1413,7 @@
         <p:cNvPr id="1" name="">
           <a:extLst>
             <a:ext uri="{FF2B5EF4-FFF2-40B4-BE49-F238E27FC236}">
-              <a16:creationId xmlns:a16="http://schemas.microsoft.com/office/drawing/2014/main" id="{AC7481FF-C449-9E34-C58F-13B2D02BC7B6}"/>
+              <a16:creationId xmlns:a16="http://schemas.microsoft.com/office/drawing/2014/main" xmlns="" id="{AC7481FF-C449-9E34-C58F-13B2D02BC7B6}"/>
             </a:ext>
           </a:extLst>
         </p:cNvPr>
@@ -1433,7 +1433,7 @@
           <p:cNvPr id="2" name="投影片影像版面配置區 1">
             <a:extLst>
               <a:ext uri="{FF2B5EF4-FFF2-40B4-BE49-F238E27FC236}">
-                <a16:creationId xmlns:a16="http://schemas.microsoft.com/office/drawing/2014/main" id="{29B407DF-0AD2-FC5D-1DF2-46BD130AF769}"/>
+                <a16:creationId xmlns:a16="http://schemas.microsoft.com/office/drawing/2014/main" xmlns="" id="{29B407DF-0AD2-FC5D-1DF2-46BD130AF769}"/>
               </a:ext>
             </a:extLst>
           </p:cNvPr>
@@ -1451,7 +1451,7 @@
           <p:cNvPr id="3" name="備忘稿版面配置區 2">
             <a:extLst>
               <a:ext uri="{FF2B5EF4-FFF2-40B4-BE49-F238E27FC236}">
-                <a16:creationId xmlns:a16="http://schemas.microsoft.com/office/drawing/2014/main" id="{52C2FBBD-7047-E591-6F29-E166F867B36A}"/>
+                <a16:creationId xmlns:a16="http://schemas.microsoft.com/office/drawing/2014/main" xmlns="" id="{52C2FBBD-7047-E591-6F29-E166F867B36A}"/>
               </a:ext>
             </a:extLst>
           </p:cNvPr>
@@ -1643,7 +1643,7 @@
           <p:cNvPr id="4" name="投影片編號版面配置區 3">
             <a:extLst>
               <a:ext uri="{FF2B5EF4-FFF2-40B4-BE49-F238E27FC236}">
-                <a16:creationId xmlns:a16="http://schemas.microsoft.com/office/drawing/2014/main" id="{B1C89356-F3CF-BD92-A812-E2E29AEECCDC}"/>
+                <a16:creationId xmlns:a16="http://schemas.microsoft.com/office/drawing/2014/main" xmlns="" id="{B1C89356-F3CF-BD92-A812-E2E29AEECCDC}"/>
               </a:ext>
             </a:extLst>
           </p:cNvPr>
@@ -1954,7 +1954,7 @@
         <p:cNvPr id="1" name="">
           <a:extLst>
             <a:ext uri="{FF2B5EF4-FFF2-40B4-BE49-F238E27FC236}">
-              <a16:creationId xmlns:a16="http://schemas.microsoft.com/office/drawing/2014/main" id="{364385AA-4A4E-8EAB-7FC7-9EAE0F9DD9CA}"/>
+              <a16:creationId xmlns:a16="http://schemas.microsoft.com/office/drawing/2014/main" xmlns="" id="{364385AA-4A4E-8EAB-7FC7-9EAE0F9DD9CA}"/>
             </a:ext>
           </a:extLst>
         </p:cNvPr>
@@ -1974,7 +1974,7 @@
           <p:cNvPr id="2" name="投影片影像版面配置區 1">
             <a:extLst>
               <a:ext uri="{FF2B5EF4-FFF2-40B4-BE49-F238E27FC236}">
-                <a16:creationId xmlns:a16="http://schemas.microsoft.com/office/drawing/2014/main" id="{2E924B6B-8F72-ADFF-A582-703A9AE47937}"/>
+                <a16:creationId xmlns:a16="http://schemas.microsoft.com/office/drawing/2014/main" xmlns="" id="{2E924B6B-8F72-ADFF-A582-703A9AE47937}"/>
               </a:ext>
             </a:extLst>
           </p:cNvPr>
@@ -1992,7 +1992,7 @@
           <p:cNvPr id="3" name="備忘稿版面配置區 2">
             <a:extLst>
               <a:ext uri="{FF2B5EF4-FFF2-40B4-BE49-F238E27FC236}">
-                <a16:creationId xmlns:a16="http://schemas.microsoft.com/office/drawing/2014/main" id="{63D24CEB-18A9-6E8B-C671-480742FDC9B6}"/>
+                <a16:creationId xmlns:a16="http://schemas.microsoft.com/office/drawing/2014/main" xmlns="" id="{63D24CEB-18A9-6E8B-C671-480742FDC9B6}"/>
               </a:ext>
             </a:extLst>
           </p:cNvPr>
@@ -2062,7 +2062,7 @@
           <p:cNvPr id="4" name="投影片編號版面配置區 3">
             <a:extLst>
               <a:ext uri="{FF2B5EF4-FFF2-40B4-BE49-F238E27FC236}">
-                <a16:creationId xmlns:a16="http://schemas.microsoft.com/office/drawing/2014/main" id="{7A7AD665-404D-1AD1-BF39-89C7CB54D2C5}"/>
+                <a16:creationId xmlns:a16="http://schemas.microsoft.com/office/drawing/2014/main" xmlns="" id="{7A7AD665-404D-1AD1-BF39-89C7CB54D2C5}"/>
               </a:ext>
             </a:extLst>
           </p:cNvPr>
@@ -2217,7 +2217,7 @@
         <p:cNvPr id="1" name="">
           <a:extLst>
             <a:ext uri="{FF2B5EF4-FFF2-40B4-BE49-F238E27FC236}">
-              <a16:creationId xmlns:a16="http://schemas.microsoft.com/office/drawing/2014/main" id="{9B712BAF-0D3C-A445-23DB-6EA7525AD1AC}"/>
+              <a16:creationId xmlns:a16="http://schemas.microsoft.com/office/drawing/2014/main" xmlns="" id="{9B712BAF-0D3C-A445-23DB-6EA7525AD1AC}"/>
             </a:ext>
           </a:extLst>
         </p:cNvPr>
@@ -2237,7 +2237,7 @@
           <p:cNvPr id="2" name="投影片影像版面配置區 1">
             <a:extLst>
               <a:ext uri="{FF2B5EF4-FFF2-40B4-BE49-F238E27FC236}">
-                <a16:creationId xmlns:a16="http://schemas.microsoft.com/office/drawing/2014/main" id="{1FF0243D-B4FF-C647-0463-BF03661844B9}"/>
+                <a16:creationId xmlns:a16="http://schemas.microsoft.com/office/drawing/2014/main" xmlns="" id="{1FF0243D-B4FF-C647-0463-BF03661844B9}"/>
               </a:ext>
             </a:extLst>
           </p:cNvPr>
@@ -2255,7 +2255,7 @@
           <p:cNvPr id="3" name="備忘稿版面配置區 2">
             <a:extLst>
               <a:ext uri="{FF2B5EF4-FFF2-40B4-BE49-F238E27FC236}">
-                <a16:creationId xmlns:a16="http://schemas.microsoft.com/office/drawing/2014/main" id="{C6DC3579-6E6F-01F1-E402-D84EF5F03707}"/>
+                <a16:creationId xmlns:a16="http://schemas.microsoft.com/office/drawing/2014/main" xmlns="" id="{C6DC3579-6E6F-01F1-E402-D84EF5F03707}"/>
               </a:ext>
             </a:extLst>
           </p:cNvPr>
@@ -2302,7 +2302,7 @@
           <p:cNvPr id="4" name="投影片編號版面配置區 3">
             <a:extLst>
               <a:ext uri="{FF2B5EF4-FFF2-40B4-BE49-F238E27FC236}">
-                <a16:creationId xmlns:a16="http://schemas.microsoft.com/office/drawing/2014/main" id="{E7AE943B-B9BC-F2DE-6C68-8206DDB25C85}"/>
+                <a16:creationId xmlns:a16="http://schemas.microsoft.com/office/drawing/2014/main" xmlns="" id="{E7AE943B-B9BC-F2DE-6C68-8206DDB25C85}"/>
               </a:ext>
             </a:extLst>
           </p:cNvPr>
@@ -5503,7 +5503,7 @@
             <a:fld id="{DF19C816-D38B-498E-804E-00D02760FC7A}" type="datetime1">
               <a:rPr lang="zh-TW" altLang="en-US" smtClean="0"/>
               <a:pPr/>
-              <a:t>2026/10/15</a:t>
+              <a:t>2026/10/16</a:t>
             </a:fld>
             <a:endParaRPr lang="zh-TW" altLang="en-US"/>
           </a:p>
@@ -5893,7 +5893,7 @@
             <a:fld id="{BFF116A9-7278-4674-BCA0-66C5F066EB15}" type="datetime1">
               <a:rPr lang="zh-TW" altLang="en-US" smtClean="0"/>
               <a:pPr/>
-              <a:t>2026/10/15</a:t>
+              <a:t>2026/10/16</a:t>
             </a:fld>
             <a:endParaRPr lang="zh-TW" altLang="en-US"/>
           </a:p>
@@ -6423,7 +6423,7 @@
             <a:fld id="{97D0AF00-ACBD-4185-8358-D82955DAF0D3}" type="datetime1">
               <a:rPr lang="zh-TW" altLang="en-US" smtClean="0"/>
               <a:pPr/>
-              <a:t>2026/10/15</a:t>
+              <a:t>2026/10/16</a:t>
             </a:fld>
             <a:endParaRPr lang="zh-TW" altLang="en-US"/>
           </a:p>
@@ -6552,7 +6552,7 @@
             <a:fld id="{E16BAABA-C288-41C0-9D8E-87773CE9488B}" type="datetime1">
               <a:rPr lang="zh-TW" altLang="en-US" smtClean="0"/>
               <a:pPr/>
-              <a:t>2026/10/15</a:t>
+              <a:t>2026/10/16</a:t>
             </a:fld>
             <a:endParaRPr lang="zh-TW" altLang="en-US"/>
           </a:p>
@@ -7092,7 +7092,7 @@
             <a:fld id="{E6F79EFE-5102-4BAD-A377-702F02C2814E}" type="datetime1">
               <a:rPr lang="zh-TW" altLang="en-US" smtClean="0"/>
               <a:pPr/>
-              <a:t>2026/10/15</a:t>
+              <a:t>2026/10/16</a:t>
             </a:fld>
             <a:endParaRPr lang="zh-TW" altLang="en-US"/>
           </a:p>
@@ -7384,7 +7384,7 @@
             <a:fld id="{240F5BD8-68CC-49A6-B769-229D3FACB86C}" type="datetime1">
               <a:rPr lang="zh-TW" altLang="en-US" smtClean="0"/>
               <a:pPr/>
-              <a:t>2026/10/15</a:t>
+              <a:t>2026/10/16</a:t>
             </a:fld>
             <a:endParaRPr lang="zh-TW" altLang="en-US"/>
           </a:p>
@@ -8040,7 +8040,7 @@
             <a:fld id="{C95C3C99-9A5D-4B12-8519-BF3493FEA3BD}" type="datetime1">
               <a:rPr lang="zh-TW" altLang="en-US" smtClean="0"/>
               <a:pPr/>
-              <a:t>2026/10/15</a:t>
+              <a:t>2026/10/16</a:t>
             </a:fld>
             <a:endParaRPr lang="zh-TW" altLang="en-US"/>
           </a:p>
@@ -8478,7 +8478,7 @@
             <a:fld id="{C0C1B973-9C4C-43B9-BBC9-7D038B5E66BB}" type="datetime1">
               <a:rPr lang="zh-TW" altLang="en-US" smtClean="0"/>
               <a:pPr/>
-              <a:t>2026/10/15</a:t>
+              <a:t>2026/10/16</a:t>
             </a:fld>
             <a:endParaRPr lang="zh-TW" altLang="en-US"/>
           </a:p>
@@ -8793,7 +8793,7 @@
             <a:fld id="{E3A2E384-56FB-46D9-B267-C20E836A8212}" type="datetime1">
               <a:rPr lang="zh-TW" altLang="en-US" smtClean="0"/>
               <a:pPr/>
-              <a:t>2026/10/15</a:t>
+              <a:t>2026/10/16</a:t>
             </a:fld>
             <a:endParaRPr lang="zh-TW" altLang="en-US"/>
           </a:p>
@@ -9523,7 +9523,7 @@
             <a:fld id="{33A25C06-3635-48B4-9326-561BB1229EEB}" type="datetime1">
               <a:rPr lang="zh-TW" altLang="en-US" smtClean="0"/>
               <a:pPr/>
-              <a:t>2026/10/15</a:t>
+              <a:t>2026/10/16</a:t>
             </a:fld>
             <a:endParaRPr lang="zh-TW" altLang="en-US"/>
           </a:p>
@@ -10189,7 +10189,7 @@
             <a:fld id="{BA9F43BE-0941-4E88-B57D-D38DECBCB997}" type="datetime1">
               <a:rPr lang="zh-TW" altLang="en-US" smtClean="0"/>
               <a:pPr/>
-              <a:t>2026/10/15</a:t>
+              <a:t>2026/10/16</a:t>
             </a:fld>
             <a:endParaRPr lang="zh-TW" altLang="en-US"/>
           </a:p>
@@ -10466,7 +10466,7 @@
             <a:fld id="{73E7C058-3467-44CD-AC53-31F205DF3CA0}" type="datetime1">
               <a:rPr lang="zh-TW" altLang="en-US" smtClean="0"/>
               <a:pPr/>
-              <a:t>2026/10/15</a:t>
+              <a:t>2026/10/16</a:t>
             </a:fld>
             <a:endParaRPr lang="zh-TW" altLang="en-US"/>
           </a:p>
@@ -11217,6 +11217,10 @@
               <a:rPr lang="zh-TW" altLang="en-US" dirty="0"/>
               <a:t>第四堂</a:t>
             </a:r>
+            <a:r>
+              <a:rPr lang="en-US" altLang="zh-TW" dirty="0"/>
+              <a:t/>
+            </a:r>
             <a:br>
               <a:rPr lang="en-US" altLang="zh-TW" dirty="0"/>
             </a:br>
@@ -11529,6 +11533,10 @@
           </a:bodyPr>
           <a:lstStyle/>
           <a:p>
+            <a:r>
+              <a:rPr lang="en-US" altLang="zh-TW"/>
+              <a:t/>
+            </a:r>
             <a:br>
               <a:rPr lang="en-US" altLang="zh-TW"/>
             </a:br>
@@ -11543,6 +11551,10 @@
             <a:r>
               <a:rPr lang="zh-TW" altLang="zh-TW"/>
               <a:t>網站框架</a:t>
+            </a:r>
+            <a:r>
+              <a:rPr lang="en-US" altLang="zh-TW"/>
+              <a:t/>
             </a:r>
             <a:br>
               <a:rPr lang="en-US" altLang="zh-TW"/>
@@ -13020,21 +13032,21 @@
                 <a:gridCol w="1942289">
                   <a:extLst>
                     <a:ext uri="{9D8B030D-6E8A-4147-A177-3AD203B41FA5}">
-                      <a16:colId xmlns:a16="http://schemas.microsoft.com/office/drawing/2014/main" val="20000"/>
+                      <a16:colId xmlns:a16="http://schemas.microsoft.com/office/drawing/2014/main" xmlns="" val="20000"/>
                     </a:ext>
                   </a:extLst>
                 </a:gridCol>
                 <a:gridCol w="3829360">
                   <a:extLst>
                     <a:ext uri="{9D8B030D-6E8A-4147-A177-3AD203B41FA5}">
-                      <a16:colId xmlns:a16="http://schemas.microsoft.com/office/drawing/2014/main" val="20001"/>
+                      <a16:colId xmlns:a16="http://schemas.microsoft.com/office/drawing/2014/main" xmlns="" val="20001"/>
                     </a:ext>
                   </a:extLst>
                 </a:gridCol>
                 <a:gridCol w="2832798">
                   <a:extLst>
                     <a:ext uri="{9D8B030D-6E8A-4147-A177-3AD203B41FA5}">
-                      <a16:colId xmlns:a16="http://schemas.microsoft.com/office/drawing/2014/main" val="20002"/>
+                      <a16:colId xmlns:a16="http://schemas.microsoft.com/office/drawing/2014/main" xmlns="" val="20002"/>
                     </a:ext>
                   </a:extLst>
                 </a:gridCol>
@@ -13129,7 +13141,7 @@
                 </a:tc>
                 <a:extLst>
                   <a:ext uri="{0D108BD9-81ED-4DB2-BD59-A6C34878D82A}">
-                    <a16:rowId xmlns:a16="http://schemas.microsoft.com/office/drawing/2014/main" val="10000"/>
+                    <a16:rowId xmlns:a16="http://schemas.microsoft.com/office/drawing/2014/main" xmlns="" val="10000"/>
                   </a:ext>
                 </a:extLst>
               </a:tr>
@@ -13229,7 +13241,7 @@
                 </a:tc>
                 <a:extLst>
                   <a:ext uri="{0D108BD9-81ED-4DB2-BD59-A6C34878D82A}">
-                    <a16:rowId xmlns:a16="http://schemas.microsoft.com/office/drawing/2014/main" val="10001"/>
+                    <a16:rowId xmlns:a16="http://schemas.microsoft.com/office/drawing/2014/main" xmlns="" val="10001"/>
                   </a:ext>
                 </a:extLst>
               </a:tr>
@@ -13335,7 +13347,7 @@
                 </a:tc>
                 <a:extLst>
                   <a:ext uri="{0D108BD9-81ED-4DB2-BD59-A6C34878D82A}">
-                    <a16:rowId xmlns:a16="http://schemas.microsoft.com/office/drawing/2014/main" val="10002"/>
+                    <a16:rowId xmlns:a16="http://schemas.microsoft.com/office/drawing/2014/main" xmlns="" val="10002"/>
                   </a:ext>
                 </a:extLst>
               </a:tr>
@@ -13435,7 +13447,7 @@
                 </a:tc>
                 <a:extLst>
                   <a:ext uri="{0D108BD9-81ED-4DB2-BD59-A6C34878D82A}">
-                    <a16:rowId xmlns:a16="http://schemas.microsoft.com/office/drawing/2014/main" val="10003"/>
+                    <a16:rowId xmlns:a16="http://schemas.microsoft.com/office/drawing/2014/main" xmlns="" val="10003"/>
                   </a:ext>
                 </a:extLst>
               </a:tr>
@@ -13563,7 +13575,7 @@
                 </a:tc>
                 <a:extLst>
                   <a:ext uri="{0D108BD9-81ED-4DB2-BD59-A6C34878D82A}">
-                    <a16:rowId xmlns:a16="http://schemas.microsoft.com/office/drawing/2014/main" val="10004"/>
+                    <a16:rowId xmlns:a16="http://schemas.microsoft.com/office/drawing/2014/main" xmlns="" val="10004"/>
                   </a:ext>
                 </a:extLst>
               </a:tr>
@@ -13663,7 +13675,7 @@
                 </a:tc>
                 <a:extLst>
                   <a:ext uri="{0D108BD9-81ED-4DB2-BD59-A6C34878D82A}">
-                    <a16:rowId xmlns:a16="http://schemas.microsoft.com/office/drawing/2014/main" val="10005"/>
+                    <a16:rowId xmlns:a16="http://schemas.microsoft.com/office/drawing/2014/main" xmlns="" val="10005"/>
                   </a:ext>
                 </a:extLst>
               </a:tr>
@@ -13809,7 +13821,7 @@
                 </a:tc>
                 <a:extLst>
                   <a:ext uri="{0D108BD9-81ED-4DB2-BD59-A6C34878D82A}">
-                    <a16:rowId xmlns:a16="http://schemas.microsoft.com/office/drawing/2014/main" val="10006"/>
+                    <a16:rowId xmlns:a16="http://schemas.microsoft.com/office/drawing/2014/main" xmlns="" val="10006"/>
                   </a:ext>
                 </a:extLst>
               </a:tr>
@@ -13927,21 +13939,21 @@
                 <a:gridCol w="1905308">
                   <a:extLst>
                     <a:ext uri="{9D8B030D-6E8A-4147-A177-3AD203B41FA5}">
-                      <a16:colId xmlns:a16="http://schemas.microsoft.com/office/drawing/2014/main" val="20000"/>
+                      <a16:colId xmlns:a16="http://schemas.microsoft.com/office/drawing/2014/main" xmlns="" val="20000"/>
                     </a:ext>
                   </a:extLst>
                 </a:gridCol>
                 <a:gridCol w="3135252">
                   <a:extLst>
                     <a:ext uri="{9D8B030D-6E8A-4147-A177-3AD203B41FA5}">
-                      <a16:colId xmlns:a16="http://schemas.microsoft.com/office/drawing/2014/main" val="20001"/>
+                      <a16:colId xmlns:a16="http://schemas.microsoft.com/office/drawing/2014/main" xmlns="" val="20001"/>
                     </a:ext>
                   </a:extLst>
                 </a:gridCol>
                 <a:gridCol w="3400056">
                   <a:extLst>
                     <a:ext uri="{9D8B030D-6E8A-4147-A177-3AD203B41FA5}">
-                      <a16:colId xmlns:a16="http://schemas.microsoft.com/office/drawing/2014/main" val="20002"/>
+                      <a16:colId xmlns:a16="http://schemas.microsoft.com/office/drawing/2014/main" xmlns="" val="20002"/>
                     </a:ext>
                   </a:extLst>
                 </a:gridCol>
@@ -14071,7 +14083,7 @@
                 </a:tc>
                 <a:extLst>
                   <a:ext uri="{0D108BD9-81ED-4DB2-BD59-A6C34878D82A}">
-                    <a16:rowId xmlns:a16="http://schemas.microsoft.com/office/drawing/2014/main" val="10000"/>
+                    <a16:rowId xmlns:a16="http://schemas.microsoft.com/office/drawing/2014/main" xmlns="" val="10000"/>
                   </a:ext>
                 </a:extLst>
               </a:tr>
@@ -14165,7 +14177,7 @@
                 </a:tc>
                 <a:extLst>
                   <a:ext uri="{0D108BD9-81ED-4DB2-BD59-A6C34878D82A}">
-                    <a16:rowId xmlns:a16="http://schemas.microsoft.com/office/drawing/2014/main" val="10001"/>
+                    <a16:rowId xmlns:a16="http://schemas.microsoft.com/office/drawing/2014/main" xmlns="" val="10001"/>
                   </a:ext>
                 </a:extLst>
               </a:tr>
@@ -14268,7 +14280,7 @@
                 </a:tc>
                 <a:extLst>
                   <a:ext uri="{0D108BD9-81ED-4DB2-BD59-A6C34878D82A}">
-                    <a16:rowId xmlns:a16="http://schemas.microsoft.com/office/drawing/2014/main" val="10002"/>
+                    <a16:rowId xmlns:a16="http://schemas.microsoft.com/office/drawing/2014/main" xmlns="" val="10002"/>
                   </a:ext>
                 </a:extLst>
               </a:tr>
@@ -14362,7 +14374,7 @@
                 </a:tc>
                 <a:extLst>
                   <a:ext uri="{0D108BD9-81ED-4DB2-BD59-A6C34878D82A}">
-                    <a16:rowId xmlns:a16="http://schemas.microsoft.com/office/drawing/2014/main" val="10003"/>
+                    <a16:rowId xmlns:a16="http://schemas.microsoft.com/office/drawing/2014/main" xmlns="" val="10003"/>
                   </a:ext>
                 </a:extLst>
               </a:tr>
@@ -14486,7 +14498,7 @@
                 </a:tc>
                 <a:extLst>
                   <a:ext uri="{0D108BD9-81ED-4DB2-BD59-A6C34878D82A}">
-                    <a16:rowId xmlns:a16="http://schemas.microsoft.com/office/drawing/2014/main" val="10004"/>
+                    <a16:rowId xmlns:a16="http://schemas.microsoft.com/office/drawing/2014/main" xmlns="" val="10004"/>
                   </a:ext>
                 </a:extLst>
               </a:tr>
@@ -14613,7 +14625,7 @@
                 </a:tc>
                 <a:extLst>
                   <a:ext uri="{0D108BD9-81ED-4DB2-BD59-A6C34878D82A}">
-                    <a16:rowId xmlns:a16="http://schemas.microsoft.com/office/drawing/2014/main" val="10005"/>
+                    <a16:rowId xmlns:a16="http://schemas.microsoft.com/office/drawing/2014/main" xmlns="" val="10005"/>
                   </a:ext>
                 </a:extLst>
               </a:tr>
@@ -14737,7 +14749,7 @@
                 </a:tc>
                 <a:extLst>
                   <a:ext uri="{0D108BD9-81ED-4DB2-BD59-A6C34878D82A}">
-                    <a16:rowId xmlns:a16="http://schemas.microsoft.com/office/drawing/2014/main" val="10006"/>
+                    <a16:rowId xmlns:a16="http://schemas.microsoft.com/office/drawing/2014/main" xmlns="" val="10006"/>
                   </a:ext>
                 </a:extLst>
               </a:tr>
@@ -14869,14 +14881,14 @@
                 <a:gridCol w="1961333">
                   <a:extLst>
                     <a:ext uri="{9D8B030D-6E8A-4147-A177-3AD203B41FA5}">
-                      <a16:colId xmlns:a16="http://schemas.microsoft.com/office/drawing/2014/main" val="20000"/>
+                      <a16:colId xmlns:a16="http://schemas.microsoft.com/office/drawing/2014/main" xmlns="" val="20000"/>
                     </a:ext>
                   </a:extLst>
                 </a:gridCol>
                 <a:gridCol w="6665523">
                   <a:extLst>
                     <a:ext uri="{9D8B030D-6E8A-4147-A177-3AD203B41FA5}">
-                      <a16:colId xmlns:a16="http://schemas.microsoft.com/office/drawing/2014/main" val="20001"/>
+                      <a16:colId xmlns:a16="http://schemas.microsoft.com/office/drawing/2014/main" xmlns="" val="20001"/>
                     </a:ext>
                   </a:extLst>
                 </a:gridCol>
@@ -14960,7 +14972,7 @@
                 </a:tc>
                 <a:extLst>
                   <a:ext uri="{0D108BD9-81ED-4DB2-BD59-A6C34878D82A}">
-                    <a16:rowId xmlns:a16="http://schemas.microsoft.com/office/drawing/2014/main" val="10000"/>
+                    <a16:rowId xmlns:a16="http://schemas.microsoft.com/office/drawing/2014/main" xmlns="" val="10000"/>
                   </a:ext>
                 </a:extLst>
               </a:tr>
@@ -15055,7 +15067,7 @@
                 </a:tc>
                 <a:extLst>
                   <a:ext uri="{0D108BD9-81ED-4DB2-BD59-A6C34878D82A}">
-                    <a16:rowId xmlns:a16="http://schemas.microsoft.com/office/drawing/2014/main" val="10001"/>
+                    <a16:rowId xmlns:a16="http://schemas.microsoft.com/office/drawing/2014/main" xmlns="" val="10001"/>
                   </a:ext>
                 </a:extLst>
               </a:tr>
@@ -15141,7 +15153,7 @@
                 </a:tc>
                 <a:extLst>
                   <a:ext uri="{0D108BD9-81ED-4DB2-BD59-A6C34878D82A}">
-                    <a16:rowId xmlns:a16="http://schemas.microsoft.com/office/drawing/2014/main" val="10002"/>
+                    <a16:rowId xmlns:a16="http://schemas.microsoft.com/office/drawing/2014/main" xmlns="" val="10002"/>
                   </a:ext>
                 </a:extLst>
               </a:tr>
@@ -15221,7 +15233,7 @@
                 </a:tc>
                 <a:extLst>
                   <a:ext uri="{0D108BD9-81ED-4DB2-BD59-A6C34878D82A}">
-                    <a16:rowId xmlns:a16="http://schemas.microsoft.com/office/drawing/2014/main" val="10003"/>
+                    <a16:rowId xmlns:a16="http://schemas.microsoft.com/office/drawing/2014/main" xmlns="" val="10003"/>
                   </a:ext>
                 </a:extLst>
               </a:tr>
@@ -15298,7 +15310,7 @@
                 </a:tc>
                 <a:extLst>
                   <a:ext uri="{0D108BD9-81ED-4DB2-BD59-A6C34878D82A}">
-                    <a16:rowId xmlns:a16="http://schemas.microsoft.com/office/drawing/2014/main" val="10004"/>
+                    <a16:rowId xmlns:a16="http://schemas.microsoft.com/office/drawing/2014/main" xmlns="" val="10004"/>
                   </a:ext>
                 </a:extLst>
               </a:tr>
@@ -15363,7 +15375,7 @@
                 </a:tc>
                 <a:extLst>
                   <a:ext uri="{0D108BD9-81ED-4DB2-BD59-A6C34878D82A}">
-                    <a16:rowId xmlns:a16="http://schemas.microsoft.com/office/drawing/2014/main" val="10005"/>
+                    <a16:rowId xmlns:a16="http://schemas.microsoft.com/office/drawing/2014/main" xmlns="" val="10005"/>
                   </a:ext>
                 </a:extLst>
               </a:tr>
@@ -15446,7 +15458,7 @@
                 </a:tc>
                 <a:extLst>
                   <a:ext uri="{0D108BD9-81ED-4DB2-BD59-A6C34878D82A}">
-                    <a16:rowId xmlns:a16="http://schemas.microsoft.com/office/drawing/2014/main" val="10006"/>
+                    <a16:rowId xmlns:a16="http://schemas.microsoft.com/office/drawing/2014/main" xmlns="" val="10006"/>
                   </a:ext>
                 </a:extLst>
               </a:tr>
@@ -15517,7 +15529,7 @@
                 </a:tc>
                 <a:extLst>
                   <a:ext uri="{0D108BD9-81ED-4DB2-BD59-A6C34878D82A}">
-                    <a16:rowId xmlns:a16="http://schemas.microsoft.com/office/drawing/2014/main" val="10007"/>
+                    <a16:rowId xmlns:a16="http://schemas.microsoft.com/office/drawing/2014/main" xmlns="" val="10007"/>
                   </a:ext>
                 </a:extLst>
               </a:tr>
@@ -15786,7 +15798,7 @@
           <p:cNvPr id="2" name="標題 1">
             <a:extLst>
               <a:ext uri="{FF2B5EF4-FFF2-40B4-BE49-F238E27FC236}">
-                <a16:creationId xmlns:a16="http://schemas.microsoft.com/office/drawing/2014/main" id="{DD58B7EA-3EE9-01C4-6213-5C7E19439967}"/>
+                <a16:creationId xmlns:a16="http://schemas.microsoft.com/office/drawing/2014/main" xmlns="" id="{DD58B7EA-3EE9-01C4-6213-5C7E19439967}"/>
               </a:ext>
             </a:extLst>
           </p:cNvPr>
@@ -15833,7 +15845,7 @@
           <p:cNvPr id="3" name="投影片編號版面配置區 2">
             <a:extLst>
               <a:ext uri="{FF2B5EF4-FFF2-40B4-BE49-F238E27FC236}">
-                <a16:creationId xmlns:a16="http://schemas.microsoft.com/office/drawing/2014/main" id="{E2BFAD2F-185D-FA0B-54C7-B8A6441EF50E}"/>
+                <a16:creationId xmlns:a16="http://schemas.microsoft.com/office/drawing/2014/main" xmlns="" id="{E2BFAD2F-185D-FA0B-54C7-B8A6441EF50E}"/>
               </a:ext>
             </a:extLst>
           </p:cNvPr>
@@ -15863,7 +15875,7 @@
           <p:cNvPr id="5" name="圖片 4">
             <a:extLst>
               <a:ext uri="{FF2B5EF4-FFF2-40B4-BE49-F238E27FC236}">
-                <a16:creationId xmlns:a16="http://schemas.microsoft.com/office/drawing/2014/main" id="{71826FB1-2783-60F6-297A-2D7C4ABDF1A5}"/>
+                <a16:creationId xmlns:a16="http://schemas.microsoft.com/office/drawing/2014/main" xmlns="" id="{71826FB1-2783-60F6-297A-2D7C4ABDF1A5}"/>
               </a:ext>
             </a:extLst>
           </p:cNvPr>
@@ -15924,7 +15936,7 @@
           <p:cNvPr id="2" name="標題 1">
             <a:extLst>
               <a:ext uri="{FF2B5EF4-FFF2-40B4-BE49-F238E27FC236}">
-                <a16:creationId xmlns:a16="http://schemas.microsoft.com/office/drawing/2014/main" id="{82D3C4ED-FDF1-5083-F1A4-59036842F13F}"/>
+                <a16:creationId xmlns:a16="http://schemas.microsoft.com/office/drawing/2014/main" xmlns="" id="{82D3C4ED-FDF1-5083-F1A4-59036842F13F}"/>
               </a:ext>
             </a:extLst>
           </p:cNvPr>
@@ -16017,7 +16029,7 @@
           <p:cNvPr id="3" name="投影片編號版面配置區 2">
             <a:extLst>
               <a:ext uri="{FF2B5EF4-FFF2-40B4-BE49-F238E27FC236}">
-                <a16:creationId xmlns:a16="http://schemas.microsoft.com/office/drawing/2014/main" id="{C311116E-CF5A-CD94-9883-01A575548246}"/>
+                <a16:creationId xmlns:a16="http://schemas.microsoft.com/office/drawing/2014/main" xmlns="" id="{C311116E-CF5A-CD94-9883-01A575548246}"/>
               </a:ext>
             </a:extLst>
           </p:cNvPr>
@@ -16047,7 +16059,7 @@
           <p:cNvPr id="4" name="內容版面配置區 3">
             <a:extLst>
               <a:ext uri="{FF2B5EF4-FFF2-40B4-BE49-F238E27FC236}">
-                <a16:creationId xmlns:a16="http://schemas.microsoft.com/office/drawing/2014/main" id="{B548315E-D882-0E77-0A55-CAEE55D3BF1B}"/>
+                <a16:creationId xmlns:a16="http://schemas.microsoft.com/office/drawing/2014/main" xmlns="" id="{B548315E-D882-0E77-0A55-CAEE55D3BF1B}"/>
               </a:ext>
             </a:extLst>
           </p:cNvPr>
@@ -16937,7 +16949,7 @@
           <p:cNvPr id="2" name="標題 1">
             <a:extLst>
               <a:ext uri="{FF2B5EF4-FFF2-40B4-BE49-F238E27FC236}">
-                <a16:creationId xmlns:a16="http://schemas.microsoft.com/office/drawing/2014/main" id="{91E78D83-1FC3-50CA-B403-84DD3B523F4B}"/>
+                <a16:creationId xmlns:a16="http://schemas.microsoft.com/office/drawing/2014/main" xmlns="" id="{91E78D83-1FC3-50CA-B403-84DD3B523F4B}"/>
               </a:ext>
             </a:extLst>
           </p:cNvPr>
@@ -16973,7 +16985,7 @@
           <p:cNvPr id="3" name="投影片編號版面配置區 2">
             <a:extLst>
               <a:ext uri="{FF2B5EF4-FFF2-40B4-BE49-F238E27FC236}">
-                <a16:creationId xmlns:a16="http://schemas.microsoft.com/office/drawing/2014/main" id="{232EAAFE-B0BE-5E22-506D-93DDFCCA83E6}"/>
+                <a16:creationId xmlns:a16="http://schemas.microsoft.com/office/drawing/2014/main" xmlns="" id="{232EAAFE-B0BE-5E22-506D-93DDFCCA83E6}"/>
               </a:ext>
             </a:extLst>
           </p:cNvPr>
@@ -17003,7 +17015,7 @@
           <p:cNvPr id="4" name="內容版面配置區 3">
             <a:extLst>
               <a:ext uri="{FF2B5EF4-FFF2-40B4-BE49-F238E27FC236}">
-                <a16:creationId xmlns:a16="http://schemas.microsoft.com/office/drawing/2014/main" id="{D99DA9A0-0A35-4E53-5866-9131ABC7E086}"/>
+                <a16:creationId xmlns:a16="http://schemas.microsoft.com/office/drawing/2014/main" xmlns="" id="{D99DA9A0-0A35-4E53-5866-9131ABC7E086}"/>
               </a:ext>
             </a:extLst>
           </p:cNvPr>
@@ -17639,7 +17651,7 @@
           <p:cNvPr id="6" name="圖片 5">
             <a:extLst>
               <a:ext uri="{FF2B5EF4-FFF2-40B4-BE49-F238E27FC236}">
-                <a16:creationId xmlns:a16="http://schemas.microsoft.com/office/drawing/2014/main" id="{71BFB975-7FDF-70B3-4C10-60D3C3C77CE6}"/>
+                <a16:creationId xmlns:a16="http://schemas.microsoft.com/office/drawing/2014/main" xmlns="" id="{71BFB975-7FDF-70B3-4C10-60D3C3C77CE6}"/>
               </a:ext>
             </a:extLst>
           </p:cNvPr>
@@ -18106,7 +18118,15 @@
           <a:p>
             <a:r>
               <a:rPr lang="zh-TW" altLang="zh-TW" dirty="0"/>
-              <a:t>欄位提供候選資料</a:t>
+              <a:t>欄位提供候選</a:t>
+            </a:r>
+            <a:r>
+              <a:rPr lang="zh-TW" altLang="zh-TW" dirty="0" smtClean="0"/>
+              <a:t>資料</a:t>
+            </a:r>
+            <a:r>
+              <a:rPr lang="en-US" altLang="zh-TW" dirty="0"/>
+              <a:t>- admin.py</a:t>
             </a:r>
             <a:endParaRPr lang="zh-TW" altLang="en-US" dirty="0"/>
           </a:p>
@@ -18380,7 +18400,7 @@
           <p:cNvPr id="7" name="內容版面配置區 6">
             <a:extLst>
               <a:ext uri="{FF2B5EF4-FFF2-40B4-BE49-F238E27FC236}">
-                <a16:creationId xmlns:a16="http://schemas.microsoft.com/office/drawing/2014/main" id="{C0088B86-959C-D904-7E32-EA43576BFE05}"/>
+                <a16:creationId xmlns:a16="http://schemas.microsoft.com/office/drawing/2014/main" xmlns="" id="{C0088B86-959C-D904-7E32-EA43576BFE05}"/>
               </a:ext>
             </a:extLst>
           </p:cNvPr>
@@ -18489,7 +18509,7 @@
           <p:cNvPr id="6" name="內容版面配置區 5">
             <a:extLst>
               <a:ext uri="{FF2B5EF4-FFF2-40B4-BE49-F238E27FC236}">
-                <a16:creationId xmlns:a16="http://schemas.microsoft.com/office/drawing/2014/main" id="{227E6570-466F-7AC2-55F2-A57A9F48CD3C}"/>
+                <a16:creationId xmlns:a16="http://schemas.microsoft.com/office/drawing/2014/main" xmlns="" id="{227E6570-466F-7AC2-55F2-A57A9F48CD3C}"/>
               </a:ext>
             </a:extLst>
           </p:cNvPr>
@@ -18551,7 +18571,7 @@
           <p:cNvPr id="2" name="標題 1">
             <a:extLst>
               <a:ext uri="{FF2B5EF4-FFF2-40B4-BE49-F238E27FC236}">
-                <a16:creationId xmlns:a16="http://schemas.microsoft.com/office/drawing/2014/main" id="{E7BF1EC3-E8CB-B4B1-2041-C340F6EA3A7F}"/>
+                <a16:creationId xmlns:a16="http://schemas.microsoft.com/office/drawing/2014/main" xmlns="" id="{E7BF1EC3-E8CB-B4B1-2041-C340F6EA3A7F}"/>
               </a:ext>
             </a:extLst>
           </p:cNvPr>
@@ -18579,7 +18599,7 @@
           <p:cNvPr id="3" name="投影片編號版面配置區 2">
             <a:extLst>
               <a:ext uri="{FF2B5EF4-FFF2-40B4-BE49-F238E27FC236}">
-                <a16:creationId xmlns:a16="http://schemas.microsoft.com/office/drawing/2014/main" id="{9B195B77-21D9-27B3-E0E6-C24D8998C1EC}"/>
+                <a16:creationId xmlns:a16="http://schemas.microsoft.com/office/drawing/2014/main" xmlns="" id="{9B195B77-21D9-27B3-E0E6-C24D8998C1EC}"/>
               </a:ext>
             </a:extLst>
           </p:cNvPr>
@@ -18609,7 +18629,7 @@
           <p:cNvPr id="4" name="內容版面配置區 3">
             <a:extLst>
               <a:ext uri="{FF2B5EF4-FFF2-40B4-BE49-F238E27FC236}">
-                <a16:creationId xmlns:a16="http://schemas.microsoft.com/office/drawing/2014/main" id="{739E7D18-2A35-0EC3-B09E-5CAEA3C8418A}"/>
+                <a16:creationId xmlns:a16="http://schemas.microsoft.com/office/drawing/2014/main" xmlns="" id="{739E7D18-2A35-0EC3-B09E-5CAEA3C8418A}"/>
               </a:ext>
             </a:extLst>
           </p:cNvPr>
@@ -19136,7 +19156,7 @@
           <p:cNvPr id="5" name="圖片 4">
             <a:extLst>
               <a:ext uri="{FF2B5EF4-FFF2-40B4-BE49-F238E27FC236}">
-                <a16:creationId xmlns:a16="http://schemas.microsoft.com/office/drawing/2014/main" id="{44DD8AF3-A93D-8A5E-4511-B801C64CC687}"/>
+                <a16:creationId xmlns:a16="http://schemas.microsoft.com/office/drawing/2014/main" xmlns="" id="{44DD8AF3-A93D-8A5E-4511-B801C64CC687}"/>
               </a:ext>
             </a:extLst>
           </p:cNvPr>
@@ -19196,7 +19216,7 @@
           <p:cNvPr id="2" name="標題 1">
             <a:extLst>
               <a:ext uri="{FF2B5EF4-FFF2-40B4-BE49-F238E27FC236}">
-                <a16:creationId xmlns:a16="http://schemas.microsoft.com/office/drawing/2014/main" id="{1959CC47-937A-93EF-21CD-D4A508E49B0E}"/>
+                <a16:creationId xmlns:a16="http://schemas.microsoft.com/office/drawing/2014/main" xmlns="" id="{1959CC47-937A-93EF-21CD-D4A508E49B0E}"/>
               </a:ext>
             </a:extLst>
           </p:cNvPr>
@@ -19224,7 +19244,7 @@
           <p:cNvPr id="3" name="投影片編號版面配置區 2">
             <a:extLst>
               <a:ext uri="{FF2B5EF4-FFF2-40B4-BE49-F238E27FC236}">
-                <a16:creationId xmlns:a16="http://schemas.microsoft.com/office/drawing/2014/main" id="{C44FF20D-18BF-5776-6226-B1D174B22072}"/>
+                <a16:creationId xmlns:a16="http://schemas.microsoft.com/office/drawing/2014/main" xmlns="" id="{C44FF20D-18BF-5776-6226-B1D174B22072}"/>
               </a:ext>
             </a:extLst>
           </p:cNvPr>
@@ -19254,7 +19274,7 @@
           <p:cNvPr id="4" name="內容版面配置區 3">
             <a:extLst>
               <a:ext uri="{FF2B5EF4-FFF2-40B4-BE49-F238E27FC236}">
-                <a16:creationId xmlns:a16="http://schemas.microsoft.com/office/drawing/2014/main" id="{0969FF6B-052B-2318-35E4-4EAE98384B7F}"/>
+                <a16:creationId xmlns:a16="http://schemas.microsoft.com/office/drawing/2014/main" xmlns="" id="{0969FF6B-052B-2318-35E4-4EAE98384B7F}"/>
               </a:ext>
             </a:extLst>
           </p:cNvPr>
@@ -20032,7 +20052,7 @@
           <p:cNvPr id="6" name="圖片 5" descr="一張含有 文字 的圖片&#10;&#10;自動產生的描述">
             <a:extLst>
               <a:ext uri="{FF2B5EF4-FFF2-40B4-BE49-F238E27FC236}">
-                <a16:creationId xmlns:a16="http://schemas.microsoft.com/office/drawing/2014/main" id="{C325CDF1-BDF0-847A-6B0C-1A9C16C65FF8}"/>
+                <a16:creationId xmlns:a16="http://schemas.microsoft.com/office/drawing/2014/main" xmlns="" id="{C325CDF1-BDF0-847A-6B0C-1A9C16C65FF8}"/>
               </a:ext>
             </a:extLst>
           </p:cNvPr>
@@ -20147,7 +20167,7 @@
           <p:cNvPr id="6" name="內容版面配置區 5">
             <a:extLst>
               <a:ext uri="{FF2B5EF4-FFF2-40B4-BE49-F238E27FC236}">
-                <a16:creationId xmlns:a16="http://schemas.microsoft.com/office/drawing/2014/main" id="{4B72DA11-C6F1-151A-A948-108EC790765E}"/>
+                <a16:creationId xmlns:a16="http://schemas.microsoft.com/office/drawing/2014/main" xmlns="" id="{4B72DA11-C6F1-151A-A948-108EC790765E}"/>
               </a:ext>
             </a:extLst>
           </p:cNvPr>
@@ -20709,38 +20729,13 @@
       </p:grpSpPr>
       <p:sp>
         <p:nvSpPr>
-          <p:cNvPr id="2" name="標題 1"/>
-          <p:cNvSpPr>
-            <a:spLocks noGrp="1"/>
-          </p:cNvSpPr>
-          <p:nvPr>
-            <p:ph type="title"/>
-          </p:nvPr>
-        </p:nvSpPr>
-        <p:spPr/>
-        <p:txBody>
-          <a:bodyPr/>
-          <a:lstStyle/>
-          <a:p>
-            <a:r>
-              <a:rPr lang="zh-TW" altLang="zh-TW" dirty="0"/>
-              <a:t>在</a:t>
-            </a:r>
-            <a:r>
-              <a:rPr lang="en-US" altLang="zh-TW" dirty="0"/>
-              <a:t>Python Shell</a:t>
-            </a:r>
-            <a:r>
-              <a:rPr lang="zh-TW" altLang="zh-TW" dirty="0"/>
-              <a:t>中操作資料表</a:t>
-            </a:r>
-            <a:endParaRPr lang="zh-TW" altLang="en-US" dirty="0"/>
-          </a:p>
-        </p:txBody>
-      </p:sp>
-      <p:sp>
-        <p:nvSpPr>
-          <p:cNvPr id="3" name="投影片編號版面配置區 2"/>
+          <p:cNvPr id="3" name="投影片編號版面配置區 2">
+            <a:extLst>
+              <a:ext uri="{FF2B5EF4-FFF2-40B4-BE49-F238E27FC236}">
+                <a16:creationId xmlns:a16="http://schemas.microsoft.com/office/drawing/2014/main" xmlns="" id="{1EA69477-3B0F-34E1-945A-821C62F57810}"/>
+              </a:ext>
+            </a:extLst>
+          </p:cNvPr>
           <p:cNvSpPr>
             <a:spLocks noGrp="1"/>
           </p:cNvSpPr>
@@ -20764,109 +20759,10 @@
       </p:sp>
       <p:sp>
         <p:nvSpPr>
-          <p:cNvPr id="4" name="內容版面配置區 3"/>
-          <p:cNvSpPr>
-            <a:spLocks noGrp="1"/>
-          </p:cNvSpPr>
-          <p:nvPr>
-            <p:ph sz="quarter" idx="1"/>
-          </p:nvPr>
-        </p:nvSpPr>
-        <p:spPr/>
-        <p:txBody>
-          <a:bodyPr/>
-          <a:lstStyle/>
-          <a:p>
-            <a:r>
-              <a:rPr lang="en-US" altLang="zh-TW" dirty="0"/>
-              <a:t>__</a:t>
-            </a:r>
-            <a:r>
-              <a:rPr lang="en-US" altLang="zh-TW" dirty="0" err="1"/>
-              <a:t>str</a:t>
-            </a:r>
-            <a:r>
-              <a:rPr lang="en-US" altLang="zh-TW" dirty="0"/>
-              <a:t>__</a:t>
-            </a:r>
-            <a:r>
-              <a:rPr lang="zh-TW" altLang="en-US" dirty="0"/>
-              <a:t>函數是當這個類別的</a:t>
-            </a:r>
-            <a:r>
-              <a:rPr lang="zh-TW" altLang="en-US" dirty="0">
-                <a:solidFill>
-                  <a:srgbClr val="FF0000"/>
-                </a:solidFill>
-              </a:rPr>
-              <a:t>實例被列印出來</a:t>
-            </a:r>
-            <a:r>
-              <a:rPr lang="zh-TW" altLang="en-US" dirty="0"/>
-              <a:t>的時候會呼叫的函數，我們直接把它覆寫成顯示其中的</a:t>
-            </a:r>
-            <a:r>
-              <a:rPr lang="en-US" altLang="zh-TW" dirty="0"/>
-              <a:t>name</a:t>
-            </a:r>
-            <a:r>
-              <a:rPr lang="zh-TW" altLang="en-US" dirty="0"/>
-              <a:t>這個欄位</a:t>
-            </a:r>
-            <a:endParaRPr lang="en-US" altLang="zh-TW" dirty="0"/>
-          </a:p>
-          <a:p>
-            <a:pPr marL="548640" lvl="2" indent="0">
-              <a:buNone/>
-            </a:pPr>
-            <a:r>
-              <a:rPr lang="en-US" altLang="zh-TW" dirty="0"/>
-              <a:t> </a:t>
-            </a:r>
-            <a:r>
-              <a:rPr lang="en-US" altLang="zh-TW" sz="2400" kern="100" dirty="0">
-                <a:effectLst/>
-                <a:latin typeface="Courier New" panose="02070309020205020404" pitchFamily="49" charset="0"/>
-                <a:ea typeface="標楷體" panose="03000509000000000000" pitchFamily="65" charset="-120"/>
-              </a:rPr>
-              <a:t>def __str__(self):</a:t>
-            </a:r>
-            <a:endParaRPr lang="zh-TW" altLang="zh-TW" sz="2400" kern="100" dirty="0">
-              <a:effectLst/>
-              <a:latin typeface="Courier New" panose="02070309020205020404" pitchFamily="49" charset="0"/>
-              <a:ea typeface="標楷體" panose="03000509000000000000" pitchFamily="65" charset="-120"/>
-            </a:endParaRPr>
-          </a:p>
-          <a:p>
-            <a:pPr marL="548640" lvl="2" indent="0">
-              <a:buNone/>
-            </a:pPr>
-            <a:r>
-              <a:rPr lang="en-US" altLang="zh-TW" sz="2400" kern="100" dirty="0">
-                <a:effectLst/>
-                <a:latin typeface="Courier New" panose="02070309020205020404" pitchFamily="49" charset="0"/>
-                <a:ea typeface="標楷體" panose="03000509000000000000" pitchFamily="65" charset="-120"/>
-              </a:rPr>
-              <a:t>     return self.name</a:t>
-            </a:r>
-            <a:endParaRPr lang="zh-TW" altLang="zh-TW" sz="2400" kern="100" dirty="0">
-              <a:effectLst/>
-              <a:latin typeface="Courier New" panose="02070309020205020404" pitchFamily="49" charset="0"/>
-              <a:ea typeface="標楷體" panose="03000509000000000000" pitchFamily="65" charset="-120"/>
-            </a:endParaRPr>
-          </a:p>
-          <a:p>
-            <a:pPr lvl="1"/>
-            <a:endParaRPr lang="zh-TW" altLang="en-US" dirty="0"/>
-          </a:p>
-        </p:txBody>
-      </p:sp>
-      <p:sp>
-        <p:nvSpPr>
-          <p:cNvPr id="6" name="文字方塊 5">
+          <p:cNvPr id="5" name="文字方塊 4">
             <a:extLst>
               <a:ext uri="{FF2B5EF4-FFF2-40B4-BE49-F238E27FC236}">
-                <a16:creationId xmlns:a16="http://schemas.microsoft.com/office/drawing/2014/main" id="{30D8B43D-3D58-A8BC-085F-59BA347B5495}"/>
+                <a16:creationId xmlns:a16="http://schemas.microsoft.com/office/drawing/2014/main" xmlns="" id="{46FC7ED5-EE27-F1F5-114A-A875E1339038}"/>
               </a:ext>
             </a:extLst>
           </p:cNvPr>
@@ -20875,8 +20771,8 @@
         </p:nvSpPr>
         <p:spPr>
           <a:xfrm>
-            <a:off x="683568" y="5330952"/>
-            <a:ext cx="4572000" cy="646331"/>
+            <a:off x="-36512" y="188640"/>
+            <a:ext cx="9144000" cy="5078313"/>
           </a:xfrm>
           <a:prstGeom prst="rect">
             <a:avLst/>
@@ -20890,22 +20786,312 @@
           <a:lstStyle/>
           <a:p>
             <a:r>
-              <a:rPr lang="sv-SE" altLang="zh-TW" dirty="0"/>
-              <a:t>&gt;&gt;&gt; print(allp[1])</a:t>
-            </a:r>
-          </a:p>
-          <a:p>
-            <a:r>
-              <a:rPr lang="sv-SE" altLang="zh-TW" dirty="0"/>
-              <a:t>SONY Xperia Z3</a:t>
-            </a:r>
-          </a:p>
-        </p:txBody>
-      </p:sp>
+              <a:rPr lang="en-US" altLang="zh-TW" dirty="0"/>
+              <a:t>from </a:t>
+            </a:r>
+            <a:r>
+              <a:rPr lang="en-US" altLang="zh-TW" dirty="0" err="1"/>
+              <a:t>mysite.models</a:t>
+            </a:r>
+            <a:r>
+              <a:rPr lang="en-US" altLang="zh-TW" dirty="0"/>
+              <a:t> import Product    (ch04 products.py)</a:t>
+            </a:r>
+          </a:p>
+          <a:p>
+            <a:r>
+              <a:rPr lang="en-US" altLang="zh-TW" dirty="0"/>
+              <a:t>p = </a:t>
+            </a:r>
+            <a:r>
+              <a:rPr lang="en-US" altLang="zh-TW" dirty="0" err="1"/>
+              <a:t>Product.objects.create</a:t>
+            </a:r>
+            <a:r>
+              <a:rPr lang="en-US" altLang="zh-TW" dirty="0"/>
+              <a:t>(name=' HTC Magic', price=100, qty=0)</a:t>
+            </a:r>
+          </a:p>
+          <a:p>
+            <a:r>
+              <a:rPr lang="en-US" altLang="zh-TW" dirty="0"/>
+              <a:t>p = </a:t>
+            </a:r>
+            <a:r>
+              <a:rPr lang="en-US" altLang="zh-TW" dirty="0" err="1"/>
+              <a:t>Product.objects.create</a:t>
+            </a:r>
+            <a:r>
+              <a:rPr lang="en-US" altLang="zh-TW" dirty="0"/>
+              <a:t>(name=' SONY Xperia Z3', price= 15000, qty=1)</a:t>
+            </a:r>
+          </a:p>
+          <a:p>
+            <a:r>
+              <a:rPr lang="en-US" altLang="zh-TW" dirty="0"/>
+              <a:t>p = </a:t>
+            </a:r>
+            <a:r>
+              <a:rPr lang="en-US" altLang="zh-TW" dirty="0" err="1"/>
+              <a:t>Product.objects.create</a:t>
+            </a:r>
+            <a:r>
+              <a:rPr lang="en-US" altLang="zh-TW" dirty="0"/>
+              <a:t>(name=' Samsung DUOS', price=800, qty=2)</a:t>
+            </a:r>
+          </a:p>
+          <a:p>
+            <a:r>
+              <a:rPr lang="en-US" altLang="zh-TW" dirty="0"/>
+              <a:t>p = </a:t>
+            </a:r>
+            <a:r>
+              <a:rPr lang="en-US" altLang="zh-TW" dirty="0" err="1"/>
+              <a:t>Product.objects.create</a:t>
+            </a:r>
+            <a:r>
+              <a:rPr lang="en-US" altLang="zh-TW" dirty="0"/>
+              <a:t>(name=' Nokia Xpress 5800', price=500, qty=1)</a:t>
+            </a:r>
+          </a:p>
+          <a:p>
+            <a:r>
+              <a:rPr lang="en-US" altLang="zh-TW" dirty="0"/>
+              <a:t>p = </a:t>
+            </a:r>
+            <a:r>
+              <a:rPr lang="en-US" altLang="zh-TW" dirty="0" err="1"/>
+              <a:t>Product.objects.create</a:t>
+            </a:r>
+            <a:r>
+              <a:rPr lang="en-US" altLang="zh-TW" dirty="0"/>
+              <a:t>(name=' </a:t>
+            </a:r>
+            <a:r>
+              <a:rPr lang="en-US" altLang="zh-TW" dirty="0" err="1"/>
+              <a:t>Infocus</a:t>
+            </a:r>
+            <a:r>
+              <a:rPr lang="en-US" altLang="zh-TW" dirty="0"/>
+              <a:t> M370', price=1500, qty=2)</a:t>
+            </a:r>
+          </a:p>
+          <a:p>
+            <a:r>
+              <a:rPr lang="en-US" altLang="zh-TW" dirty="0" err="1"/>
+              <a:t>p.save</a:t>
+            </a:r>
+            <a:r>
+              <a:rPr lang="en-US" altLang="zh-TW" dirty="0"/>
+              <a:t>()</a:t>
+            </a:r>
+          </a:p>
+          <a:p>
+            <a:r>
+              <a:rPr lang="en-US" altLang="zh-TW" dirty="0"/>
+              <a:t>#exit()</a:t>
+            </a:r>
+          </a:p>
+          <a:p>
+            <a:endParaRPr lang="en-US" altLang="zh-TW" dirty="0"/>
+          </a:p>
+          <a:p>
+            <a:r>
+              <a:rPr lang="en-US" altLang="zh-TW" dirty="0" err="1"/>
+              <a:t>allprod</a:t>
+            </a:r>
+            <a:r>
+              <a:rPr lang="en-US" altLang="zh-TW" dirty="0"/>
+              <a:t> = </a:t>
+            </a:r>
+            <a:r>
+              <a:rPr lang="en-US" altLang="zh-TW" dirty="0" err="1"/>
+              <a:t>Product.objects.all</a:t>
+            </a:r>
+            <a:r>
+              <a:rPr lang="en-US" altLang="zh-TW" dirty="0"/>
+              <a:t>()</a:t>
+            </a:r>
+          </a:p>
+          <a:p>
+            <a:r>
+              <a:rPr lang="en-US" altLang="zh-TW" dirty="0"/>
+              <a:t>for p in </a:t>
+            </a:r>
+            <a:r>
+              <a:rPr lang="en-US" altLang="zh-TW" dirty="0" err="1"/>
+              <a:t>allprod</a:t>
+            </a:r>
+            <a:r>
+              <a:rPr lang="en-US" altLang="zh-TW" dirty="0"/>
+              <a:t>:</a:t>
+            </a:r>
+          </a:p>
+          <a:p>
+            <a:r>
+              <a:rPr lang="en-US" altLang="zh-TW" dirty="0"/>
+              <a:t>    print(p.name, ‘, ’, </a:t>
+            </a:r>
+            <a:r>
+              <a:rPr lang="en-US" altLang="zh-TW" dirty="0" err="1"/>
+              <a:t>p.price</a:t>
+            </a:r>
+            <a:r>
+              <a:rPr lang="en-US" altLang="zh-TW" dirty="0"/>
+              <a:t>, ‘, ’, </a:t>
+            </a:r>
+            <a:r>
+              <a:rPr lang="en-US" altLang="zh-TW" dirty="0" err="1"/>
+              <a:t>p.qty</a:t>
+            </a:r>
+            <a:r>
+              <a:rPr lang="en-US" altLang="zh-TW" dirty="0"/>
+              <a:t>)  </a:t>
+            </a:r>
+            <a:r>
+              <a:rPr lang="en-US" altLang="zh-TW" dirty="0">
+                <a:solidFill>
+                  <a:srgbClr val="FF0000"/>
+                </a:solidFill>
+              </a:rPr>
+              <a:t>(</a:t>
+            </a:r>
+            <a:r>
+              <a:rPr lang="zh-TW" altLang="en-US" dirty="0">
+                <a:solidFill>
+                  <a:srgbClr val="FF0000"/>
+                </a:solidFill>
+              </a:rPr>
+              <a:t>打字到這邊要再按一下</a:t>
+            </a:r>
+            <a:r>
+              <a:rPr lang="en-US" altLang="zh-TW" dirty="0">
+                <a:solidFill>
+                  <a:srgbClr val="FF0000"/>
+                </a:solidFill>
+              </a:rPr>
+              <a:t>enter</a:t>
+            </a:r>
+            <a:r>
+              <a:rPr lang="zh-TW" altLang="en-US" dirty="0">
+                <a:solidFill>
+                  <a:srgbClr val="FF0000"/>
+                </a:solidFill>
+              </a:rPr>
+              <a:t>才會有結果</a:t>
+            </a:r>
+            <a:r>
+              <a:rPr lang="en-US" altLang="zh-TW" dirty="0">
+                <a:solidFill>
+                  <a:srgbClr val="FF0000"/>
+                </a:solidFill>
+              </a:rPr>
+              <a:t>)</a:t>
+            </a:r>
+          </a:p>
+          <a:p>
+            <a:endParaRPr lang="en-US" altLang="zh-TW" dirty="0"/>
+          </a:p>
+          <a:p>
+            <a:r>
+              <a:rPr lang="en-US" altLang="zh-TW" dirty="0"/>
+              <a:t>HTC Magic ,  100 ,  0</a:t>
+            </a:r>
+          </a:p>
+          <a:p>
+            <a:r>
+              <a:rPr lang="en-US" altLang="zh-TW" dirty="0"/>
+              <a:t>SONY Xperia Z3 , 15000 , 1</a:t>
+            </a:r>
+          </a:p>
+          <a:p>
+            <a:r>
+              <a:rPr lang="en-US" altLang="zh-TW" dirty="0"/>
+              <a:t>Samsung DUOS , 800 , 2</a:t>
+            </a:r>
+          </a:p>
+          <a:p>
+            <a:r>
+              <a:rPr lang="en-US" altLang="zh-TW" dirty="0"/>
+              <a:t>Nokia Xpress 5800, 500, 1</a:t>
+            </a:r>
+          </a:p>
+          <a:p>
+            <a:r>
+              <a:rPr lang="en-US" altLang="zh-TW" dirty="0" err="1"/>
+              <a:t>Infocus</a:t>
+            </a:r>
+            <a:r>
+              <a:rPr lang="en-US" altLang="zh-TW" dirty="0"/>
+              <a:t> M370 , 1500 , 2</a:t>
+            </a:r>
+          </a:p>
+        </p:txBody>
+      </p:sp>
+      <p:pic>
+        <p:nvPicPr>
+          <p:cNvPr id="7" name="圖片 6">
+            <a:extLst>
+              <a:ext uri="{FF2B5EF4-FFF2-40B4-BE49-F238E27FC236}">
+                <a16:creationId xmlns:a16="http://schemas.microsoft.com/office/drawing/2014/main" xmlns="" id="{B68F56B5-230E-172F-05BE-14152ECD6F0F}"/>
+              </a:ext>
+            </a:extLst>
+          </p:cNvPr>
+          <p:cNvPicPr>
+            <a:picLocks noChangeAspect="1"/>
+          </p:cNvPicPr>
+          <p:nvPr/>
+        </p:nvPicPr>
+        <p:blipFill>
+          <a:blip r:embed="rId3"/>
+          <a:stretch>
+            <a:fillRect/>
+          </a:stretch>
+        </p:blipFill>
+        <p:spPr>
+          <a:xfrm>
+            <a:off x="3347864" y="4369312"/>
+            <a:ext cx="5849166" cy="2372056"/>
+          </a:xfrm>
+          <a:prstGeom prst="rect">
+            <a:avLst/>
+          </a:prstGeom>
+        </p:spPr>
+      </p:pic>
+      <p:pic>
+        <p:nvPicPr>
+          <p:cNvPr id="4" name="圖片 3">
+            <a:extLst>
+              <a:ext uri="{FF2B5EF4-FFF2-40B4-BE49-F238E27FC236}">
+                <a16:creationId xmlns:a16="http://schemas.microsoft.com/office/drawing/2014/main" xmlns="" id="{B0FAE2BC-E885-5B4A-0E4B-574296BD71A2}"/>
+              </a:ext>
+            </a:extLst>
+          </p:cNvPr>
+          <p:cNvPicPr>
+            <a:picLocks noChangeAspect="1"/>
+          </p:cNvPicPr>
+          <p:nvPr/>
+        </p:nvPicPr>
+        <p:blipFill>
+          <a:blip r:embed="rId4"/>
+          <a:stretch>
+            <a:fillRect/>
+          </a:stretch>
+        </p:blipFill>
+        <p:spPr>
+          <a:xfrm>
+            <a:off x="3491880" y="3717032"/>
+            <a:ext cx="5315692" cy="762106"/>
+          </a:xfrm>
+          <a:prstGeom prst="rect">
+            <a:avLst/>
+          </a:prstGeom>
+        </p:spPr>
+      </p:pic>
     </p:spTree>
     <p:extLst>
       <p:ext uri="{BB962C8B-B14F-4D97-AF65-F5344CB8AC3E}">
-        <p14:creationId xmlns:p14="http://schemas.microsoft.com/office/powerpoint/2010/main" val="1947857464"/>
+        <p14:creationId xmlns:p14="http://schemas.microsoft.com/office/powerpoint/2010/main" val="1836525547"/>
       </p:ext>
     </p:extLst>
   </p:cSld>
@@ -20942,6 +21128,238 @@
             <p:ph type="title"/>
           </p:nvPr>
         </p:nvSpPr>
+        <p:spPr/>
+        <p:txBody>
+          <a:bodyPr/>
+          <a:lstStyle/>
+          <a:p>
+            <a:r>
+              <a:rPr lang="zh-TW" altLang="zh-TW" dirty="0"/>
+              <a:t>在</a:t>
+            </a:r>
+            <a:r>
+              <a:rPr lang="en-US" altLang="zh-TW" dirty="0"/>
+              <a:t>Python Shell</a:t>
+            </a:r>
+            <a:r>
+              <a:rPr lang="zh-TW" altLang="zh-TW" dirty="0"/>
+              <a:t>中操作資料表</a:t>
+            </a:r>
+            <a:endParaRPr lang="zh-TW" altLang="en-US" dirty="0"/>
+          </a:p>
+        </p:txBody>
+      </p:sp>
+      <p:sp>
+        <p:nvSpPr>
+          <p:cNvPr id="3" name="投影片編號版面配置區 2"/>
+          <p:cNvSpPr>
+            <a:spLocks noGrp="1"/>
+          </p:cNvSpPr>
+          <p:nvPr>
+            <p:ph type="sldNum" sz="quarter" idx="12"/>
+          </p:nvPr>
+        </p:nvSpPr>
+        <p:spPr/>
+        <p:txBody>
+          <a:bodyPr/>
+          <a:lstStyle/>
+          <a:p>
+            <a:fld id="{369E457D-EE12-4164-8E32-9DDD40A95892}" type="slidenum">
+              <a:rPr lang="zh-TW" altLang="en-US" smtClean="0"/>
+              <a:pPr/>
+              <a:t>36</a:t>
+            </a:fld>
+            <a:endParaRPr lang="zh-TW" altLang="en-US"/>
+          </a:p>
+        </p:txBody>
+      </p:sp>
+      <p:sp>
+        <p:nvSpPr>
+          <p:cNvPr id="4" name="內容版面配置區 3"/>
+          <p:cNvSpPr>
+            <a:spLocks noGrp="1"/>
+          </p:cNvSpPr>
+          <p:nvPr>
+            <p:ph sz="quarter" idx="1"/>
+          </p:nvPr>
+        </p:nvSpPr>
+        <p:spPr/>
+        <p:txBody>
+          <a:bodyPr/>
+          <a:lstStyle/>
+          <a:p>
+            <a:r>
+              <a:rPr lang="en-US" altLang="zh-TW" dirty="0"/>
+              <a:t>__</a:t>
+            </a:r>
+            <a:r>
+              <a:rPr lang="en-US" altLang="zh-TW" dirty="0" err="1"/>
+              <a:t>str</a:t>
+            </a:r>
+            <a:r>
+              <a:rPr lang="en-US" altLang="zh-TW" dirty="0"/>
+              <a:t>__</a:t>
+            </a:r>
+            <a:r>
+              <a:rPr lang="zh-TW" altLang="en-US" dirty="0"/>
+              <a:t>函數是當這個類別的</a:t>
+            </a:r>
+            <a:r>
+              <a:rPr lang="zh-TW" altLang="en-US" dirty="0">
+                <a:solidFill>
+                  <a:srgbClr val="FF0000"/>
+                </a:solidFill>
+              </a:rPr>
+              <a:t>實例被列印出來</a:t>
+            </a:r>
+            <a:r>
+              <a:rPr lang="zh-TW" altLang="en-US" dirty="0"/>
+              <a:t>的時候會呼叫的函數，我們直接把它覆寫成顯示其中的</a:t>
+            </a:r>
+            <a:r>
+              <a:rPr lang="en-US" altLang="zh-TW" dirty="0"/>
+              <a:t>name</a:t>
+            </a:r>
+            <a:r>
+              <a:rPr lang="zh-TW" altLang="en-US" dirty="0"/>
+              <a:t>這個欄位</a:t>
+            </a:r>
+            <a:endParaRPr lang="en-US" altLang="zh-TW" dirty="0"/>
+          </a:p>
+          <a:p>
+            <a:pPr marL="548640" lvl="2" indent="0">
+              <a:buNone/>
+            </a:pPr>
+            <a:r>
+              <a:rPr lang="en-US" altLang="zh-TW" dirty="0"/>
+              <a:t> </a:t>
+            </a:r>
+            <a:r>
+              <a:rPr lang="en-US" altLang="zh-TW" sz="2400" kern="100" dirty="0">
+                <a:effectLst/>
+                <a:latin typeface="Courier New" panose="02070309020205020404" pitchFamily="49" charset="0"/>
+                <a:ea typeface="標楷體" panose="03000509000000000000" pitchFamily="65" charset="-120"/>
+              </a:rPr>
+              <a:t>def __str__(self):</a:t>
+            </a:r>
+            <a:endParaRPr lang="zh-TW" altLang="zh-TW" sz="2400" kern="100" dirty="0">
+              <a:effectLst/>
+              <a:latin typeface="Courier New" panose="02070309020205020404" pitchFamily="49" charset="0"/>
+              <a:ea typeface="標楷體" panose="03000509000000000000" pitchFamily="65" charset="-120"/>
+            </a:endParaRPr>
+          </a:p>
+          <a:p>
+            <a:pPr marL="548640" lvl="2" indent="0">
+              <a:buNone/>
+            </a:pPr>
+            <a:r>
+              <a:rPr lang="en-US" altLang="zh-TW" sz="2400" kern="100" dirty="0">
+                <a:effectLst/>
+                <a:latin typeface="Courier New" panose="02070309020205020404" pitchFamily="49" charset="0"/>
+                <a:ea typeface="標楷體" panose="03000509000000000000" pitchFamily="65" charset="-120"/>
+              </a:rPr>
+              <a:t>     return self.name</a:t>
+            </a:r>
+            <a:endParaRPr lang="zh-TW" altLang="zh-TW" sz="2400" kern="100" dirty="0">
+              <a:effectLst/>
+              <a:latin typeface="Courier New" panose="02070309020205020404" pitchFamily="49" charset="0"/>
+              <a:ea typeface="標楷體" panose="03000509000000000000" pitchFamily="65" charset="-120"/>
+            </a:endParaRPr>
+          </a:p>
+          <a:p>
+            <a:pPr lvl="1"/>
+            <a:endParaRPr lang="zh-TW" altLang="en-US" dirty="0"/>
+          </a:p>
+        </p:txBody>
+      </p:sp>
+      <p:sp>
+        <p:nvSpPr>
+          <p:cNvPr id="6" name="文字方塊 5">
+            <a:extLst>
+              <a:ext uri="{FF2B5EF4-FFF2-40B4-BE49-F238E27FC236}">
+                <a16:creationId xmlns:a16="http://schemas.microsoft.com/office/drawing/2014/main" xmlns="" id="{30D8B43D-3D58-A8BC-085F-59BA347B5495}"/>
+              </a:ext>
+            </a:extLst>
+          </p:cNvPr>
+          <p:cNvSpPr txBox="1"/>
+          <p:nvPr/>
+        </p:nvSpPr>
+        <p:spPr>
+          <a:xfrm>
+            <a:off x="683568" y="5330952"/>
+            <a:ext cx="4572000" cy="646331"/>
+          </a:xfrm>
+          <a:prstGeom prst="rect">
+            <a:avLst/>
+          </a:prstGeom>
+          <a:noFill/>
+        </p:spPr>
+        <p:txBody>
+          <a:bodyPr wrap="square">
+            <a:spAutoFit/>
+          </a:bodyPr>
+          <a:lstStyle/>
+          <a:p>
+            <a:r>
+              <a:rPr lang="sv-SE" altLang="zh-TW" dirty="0"/>
+              <a:t>&gt;&gt;&gt; print(allp[1])</a:t>
+            </a:r>
+          </a:p>
+          <a:p>
+            <a:r>
+              <a:rPr lang="sv-SE" altLang="zh-TW" dirty="0"/>
+              <a:t>SONY Xperia Z3</a:t>
+            </a:r>
+          </a:p>
+        </p:txBody>
+      </p:sp>
+    </p:spTree>
+    <p:extLst>
+      <p:ext uri="{BB962C8B-B14F-4D97-AF65-F5344CB8AC3E}">
+        <p14:creationId xmlns:p14="http://schemas.microsoft.com/office/powerpoint/2010/main" val="1947857464"/>
+      </p:ext>
+    </p:extLst>
+  </p:cSld>
+  <p:clrMapOvr>
+    <a:masterClrMapping/>
+  </p:clrMapOvr>
+  <p:timing>
+    <p:tnLst>
+      <p:par>
+        <p:cTn id="1" dur="indefinite" restart="never" nodeType="tmRoot"/>
+      </p:par>
+    </p:tnLst>
+  </p:timing>
+</p:sld>
+</file>
+
+<file path=ppt/slides/slide37.xml><?xml version="1.0" encoding="utf-8"?>
+<p:sld xmlns:a="http://schemas.openxmlformats.org/drawingml/2006/main" xmlns:r="http://schemas.openxmlformats.org/officeDocument/2006/relationships" xmlns:p="http://schemas.openxmlformats.org/presentationml/2006/main" showMasterSp="0">
+  <p:cSld>
+    <p:spTree>
+      <p:nvGrpSpPr>
+        <p:cNvPr id="1" name=""/>
+        <p:cNvGrpSpPr/>
+        <p:nvPr/>
+      </p:nvGrpSpPr>
+      <p:grpSpPr>
+        <a:xfrm>
+          <a:off x="0" y="0"/>
+          <a:ext cx="0" cy="0"/>
+          <a:chOff x="0" y="0"/>
+          <a:chExt cx="0" cy="0"/>
+        </a:xfrm>
+      </p:grpSpPr>
+      <p:sp>
+        <p:nvSpPr>
+          <p:cNvPr id="2" name="標題 1"/>
+          <p:cNvSpPr>
+            <a:spLocks noGrp="1"/>
+          </p:cNvSpPr>
+          <p:nvPr>
+            <p:ph type="title"/>
+          </p:nvPr>
+        </p:nvSpPr>
         <p:spPr>
           <a:xfrm>
             <a:off x="229744" y="156592"/>
@@ -20983,7 +21401,7 @@
             <a:fld id="{369E457D-EE12-4164-8E32-9DDD40A95892}" type="slidenum">
               <a:rPr lang="zh-TW" altLang="en-US" smtClean="0"/>
               <a:pPr/>
-              <a:t>36</a:t>
+              <a:t>37</a:t>
             </a:fld>
             <a:endParaRPr lang="zh-TW" altLang="en-US"/>
           </a:p>
@@ -21076,14 +21494,14 @@
                 <a:gridCol w="2830839">
                   <a:extLst>
                     <a:ext uri="{9D8B030D-6E8A-4147-A177-3AD203B41FA5}">
-                      <a16:colId xmlns:a16="http://schemas.microsoft.com/office/drawing/2014/main" val="20000"/>
+                      <a16:colId xmlns:a16="http://schemas.microsoft.com/office/drawing/2014/main" xmlns="" val="20000"/>
                     </a:ext>
                   </a:extLst>
                 </a:gridCol>
                 <a:gridCol w="5673081">
                   <a:extLst>
                     <a:ext uri="{9D8B030D-6E8A-4147-A177-3AD203B41FA5}">
-                      <a16:colId xmlns:a16="http://schemas.microsoft.com/office/drawing/2014/main" val="20001"/>
+                      <a16:colId xmlns:a16="http://schemas.microsoft.com/office/drawing/2014/main" xmlns="" val="20001"/>
                     </a:ext>
                   </a:extLst>
                 </a:gridCol>
@@ -21149,7 +21567,7 @@
                 </a:tc>
                 <a:extLst>
                   <a:ext uri="{0D108BD9-81ED-4DB2-BD59-A6C34878D82A}">
-                    <a16:rowId xmlns:a16="http://schemas.microsoft.com/office/drawing/2014/main" val="10000"/>
+                    <a16:rowId xmlns:a16="http://schemas.microsoft.com/office/drawing/2014/main" xmlns="" val="10000"/>
                   </a:ext>
                 </a:extLst>
               </a:tr>
@@ -21220,7 +21638,7 @@
                 </a:tc>
                 <a:extLst>
                   <a:ext uri="{0D108BD9-81ED-4DB2-BD59-A6C34878D82A}">
-                    <a16:rowId xmlns:a16="http://schemas.microsoft.com/office/drawing/2014/main" val="10001"/>
+                    <a16:rowId xmlns:a16="http://schemas.microsoft.com/office/drawing/2014/main" xmlns="" val="10001"/>
                   </a:ext>
                 </a:extLst>
               </a:tr>
@@ -21291,7 +21709,7 @@
                 </a:tc>
                 <a:extLst>
                   <a:ext uri="{0D108BD9-81ED-4DB2-BD59-A6C34878D82A}">
-                    <a16:rowId xmlns:a16="http://schemas.microsoft.com/office/drawing/2014/main" val="10002"/>
+                    <a16:rowId xmlns:a16="http://schemas.microsoft.com/office/drawing/2014/main" xmlns="" val="10002"/>
                   </a:ext>
                 </a:extLst>
               </a:tr>
@@ -21374,7 +21792,7 @@
                 </a:tc>
                 <a:extLst>
                   <a:ext uri="{0D108BD9-81ED-4DB2-BD59-A6C34878D82A}">
-                    <a16:rowId xmlns:a16="http://schemas.microsoft.com/office/drawing/2014/main" val="10003"/>
+                    <a16:rowId xmlns:a16="http://schemas.microsoft.com/office/drawing/2014/main" xmlns="" val="10003"/>
                   </a:ext>
                 </a:extLst>
               </a:tr>
@@ -21445,7 +21863,7 @@
                 </a:tc>
                 <a:extLst>
                   <a:ext uri="{0D108BD9-81ED-4DB2-BD59-A6C34878D82A}">
-                    <a16:rowId xmlns:a16="http://schemas.microsoft.com/office/drawing/2014/main" val="10004"/>
+                    <a16:rowId xmlns:a16="http://schemas.microsoft.com/office/drawing/2014/main" xmlns="" val="10004"/>
                   </a:ext>
                 </a:extLst>
               </a:tr>
@@ -21546,7 +21964,7 @@
                 </a:tc>
                 <a:extLst>
                   <a:ext uri="{0D108BD9-81ED-4DB2-BD59-A6C34878D82A}">
-                    <a16:rowId xmlns:a16="http://schemas.microsoft.com/office/drawing/2014/main" val="10005"/>
+                    <a16:rowId xmlns:a16="http://schemas.microsoft.com/office/drawing/2014/main" xmlns="" val="10005"/>
                   </a:ext>
                 </a:extLst>
               </a:tr>
@@ -21635,7 +22053,7 @@
                 </a:tc>
                 <a:extLst>
                   <a:ext uri="{0D108BD9-81ED-4DB2-BD59-A6C34878D82A}">
-                    <a16:rowId xmlns:a16="http://schemas.microsoft.com/office/drawing/2014/main" val="10006"/>
+                    <a16:rowId xmlns:a16="http://schemas.microsoft.com/office/drawing/2014/main" xmlns="" val="10006"/>
                   </a:ext>
                 </a:extLst>
               </a:tr>
@@ -21700,7 +22118,7 @@
                 </a:tc>
                 <a:extLst>
                   <a:ext uri="{0D108BD9-81ED-4DB2-BD59-A6C34878D82A}">
-                    <a16:rowId xmlns:a16="http://schemas.microsoft.com/office/drawing/2014/main" val="10007"/>
+                    <a16:rowId xmlns:a16="http://schemas.microsoft.com/office/drawing/2014/main" xmlns="" val="10007"/>
                   </a:ext>
                 </a:extLst>
               </a:tr>
@@ -21783,7 +22201,7 @@
                 </a:tc>
                 <a:extLst>
                   <a:ext uri="{0D108BD9-81ED-4DB2-BD59-A6C34878D82A}">
-                    <a16:rowId xmlns:a16="http://schemas.microsoft.com/office/drawing/2014/main" val="10008"/>
+                    <a16:rowId xmlns:a16="http://schemas.microsoft.com/office/drawing/2014/main" xmlns="" val="10008"/>
                   </a:ext>
                 </a:extLst>
               </a:tr>
@@ -21801,10 +22219,17 @@
   <p:clrMapOvr>
     <a:masterClrMapping/>
   </p:clrMapOvr>
+  <p:timing>
+    <p:tnLst>
+      <p:par>
+        <p:cTn id="1" dur="indefinite" restart="never" nodeType="tmRoot"/>
+      </p:par>
+    </p:tnLst>
+  </p:timing>
 </p:sld>
 </file>
 
-<file path=ppt/slides/slide37.xml><?xml version="1.0" encoding="utf-8"?>
+<file path=ppt/slides/slide38.xml><?xml version="1.0" encoding="utf-8"?>
 <p:sld xmlns:a="http://schemas.openxmlformats.org/drawingml/2006/main" xmlns:r="http://schemas.openxmlformats.org/officeDocument/2006/relationships" xmlns:p="http://schemas.openxmlformats.org/presentationml/2006/main" showMasterSp="0">
   <p:cSld>
     <p:spTree>
@@ -21862,7 +22287,7 @@
             <a:fld id="{369E457D-EE12-4164-8E32-9DDD40A95892}" type="slidenum">
               <a:rPr lang="zh-TW" altLang="en-US" smtClean="0"/>
               <a:pPr/>
-              <a:t>37</a:t>
+              <a:t>38</a:t>
             </a:fld>
             <a:endParaRPr lang="zh-TW" altLang="en-US"/>
           </a:p>
@@ -21897,14 +22322,14 @@
                 <a:gridCol w="2665902">
                   <a:extLst>
                     <a:ext uri="{9D8B030D-6E8A-4147-A177-3AD203B41FA5}">
-                      <a16:colId xmlns:a16="http://schemas.microsoft.com/office/drawing/2014/main" val="20000"/>
+                      <a16:colId xmlns:a16="http://schemas.microsoft.com/office/drawing/2014/main" xmlns="" val="20000"/>
                     </a:ext>
                   </a:extLst>
                 </a:gridCol>
                 <a:gridCol w="5342544">
                   <a:extLst>
                     <a:ext uri="{9D8B030D-6E8A-4147-A177-3AD203B41FA5}">
-                      <a16:colId xmlns:a16="http://schemas.microsoft.com/office/drawing/2014/main" val="20001"/>
+                      <a16:colId xmlns:a16="http://schemas.microsoft.com/office/drawing/2014/main" xmlns="" val="20001"/>
                     </a:ext>
                   </a:extLst>
                 </a:gridCol>
@@ -21970,7 +22395,7 @@
                 </a:tc>
                 <a:extLst>
                   <a:ext uri="{0D108BD9-81ED-4DB2-BD59-A6C34878D82A}">
-                    <a16:rowId xmlns:a16="http://schemas.microsoft.com/office/drawing/2014/main" val="10000"/>
+                    <a16:rowId xmlns:a16="http://schemas.microsoft.com/office/drawing/2014/main" xmlns="" val="10000"/>
                   </a:ext>
                 </a:extLst>
               </a:tr>
@@ -22035,7 +22460,7 @@
                 </a:tc>
                 <a:extLst>
                   <a:ext uri="{0D108BD9-81ED-4DB2-BD59-A6C34878D82A}">
-                    <a16:rowId xmlns:a16="http://schemas.microsoft.com/office/drawing/2014/main" val="10001"/>
+                    <a16:rowId xmlns:a16="http://schemas.microsoft.com/office/drawing/2014/main" xmlns="" val="10001"/>
                   </a:ext>
                 </a:extLst>
               </a:tr>
@@ -22100,7 +22525,7 @@
                 </a:tc>
                 <a:extLst>
                   <a:ext uri="{0D108BD9-81ED-4DB2-BD59-A6C34878D82A}">
-                    <a16:rowId xmlns:a16="http://schemas.microsoft.com/office/drawing/2014/main" val="10002"/>
+                    <a16:rowId xmlns:a16="http://schemas.microsoft.com/office/drawing/2014/main" xmlns="" val="10002"/>
                   </a:ext>
                 </a:extLst>
               </a:tr>
@@ -22195,7 +22620,7 @@
                 </a:tc>
                 <a:extLst>
                   <a:ext uri="{0D108BD9-81ED-4DB2-BD59-A6C34878D82A}">
-                    <a16:rowId xmlns:a16="http://schemas.microsoft.com/office/drawing/2014/main" val="10003"/>
+                    <a16:rowId xmlns:a16="http://schemas.microsoft.com/office/drawing/2014/main" xmlns="" val="10003"/>
                   </a:ext>
                 </a:extLst>
               </a:tr>
@@ -22260,7 +22685,7 @@
                 </a:tc>
                 <a:extLst>
                   <a:ext uri="{0D108BD9-81ED-4DB2-BD59-A6C34878D82A}">
-                    <a16:rowId xmlns:a16="http://schemas.microsoft.com/office/drawing/2014/main" val="10004"/>
+                    <a16:rowId xmlns:a16="http://schemas.microsoft.com/office/drawing/2014/main" xmlns="" val="10004"/>
                   </a:ext>
                 </a:extLst>
               </a:tr>
@@ -22361,7 +22786,7 @@
                 </a:tc>
                 <a:extLst>
                   <a:ext uri="{0D108BD9-81ED-4DB2-BD59-A6C34878D82A}">
-                    <a16:rowId xmlns:a16="http://schemas.microsoft.com/office/drawing/2014/main" val="10005"/>
+                    <a16:rowId xmlns:a16="http://schemas.microsoft.com/office/drawing/2014/main" xmlns="" val="10005"/>
                   </a:ext>
                 </a:extLst>
               </a:tr>
@@ -22379,209 +22804,13 @@
   <p:clrMapOvr>
     <a:masterClrMapping/>
   </p:clrMapOvr>
-</p:sld>
-</file>
-
-<file path=ppt/slides/slide38.xml><?xml version="1.0" encoding="utf-8"?>
-<p:sld xmlns:a="http://schemas.openxmlformats.org/drawingml/2006/main" xmlns:r="http://schemas.openxmlformats.org/officeDocument/2006/relationships" xmlns:p="http://schemas.openxmlformats.org/presentationml/2006/main" showMasterSp="0">
-  <p:cSld>
-    <p:spTree>
-      <p:nvGrpSpPr>
-        <p:cNvPr id="1" name=""/>
-        <p:cNvGrpSpPr/>
-        <p:nvPr/>
-      </p:nvGrpSpPr>
-      <p:grpSpPr>
-        <a:xfrm>
-          <a:off x="0" y="0"/>
-          <a:ext cx="0" cy="0"/>
-          <a:chOff x="0" y="0"/>
-          <a:chExt cx="0" cy="0"/>
-        </a:xfrm>
-      </p:grpSpPr>
-      <p:sp>
-        <p:nvSpPr>
-          <p:cNvPr id="2" name="標題 1"/>
-          <p:cNvSpPr>
-            <a:spLocks noGrp="1"/>
-          </p:cNvSpPr>
-          <p:nvPr>
-            <p:ph type="title"/>
-          </p:nvPr>
-        </p:nvSpPr>
-        <p:spPr/>
-        <p:txBody>
-          <a:bodyPr/>
-          <a:lstStyle/>
-          <a:p>
-            <a:r>
-              <a:rPr lang="zh-TW" altLang="zh-TW" dirty="0"/>
-              <a:t>資料的查詢與編輯</a:t>
-            </a:r>
-            <a:endParaRPr lang="zh-TW" altLang="en-US" dirty="0"/>
-          </a:p>
-        </p:txBody>
-      </p:sp>
-      <p:sp>
-        <p:nvSpPr>
-          <p:cNvPr id="3" name="投影片編號版面配置區 2"/>
-          <p:cNvSpPr>
-            <a:spLocks noGrp="1"/>
-          </p:cNvSpPr>
-          <p:nvPr>
-            <p:ph type="sldNum" sz="quarter" idx="12"/>
-          </p:nvPr>
-        </p:nvSpPr>
-        <p:spPr/>
-        <p:txBody>
-          <a:bodyPr/>
-          <a:lstStyle/>
-          <a:p>
-            <a:fld id="{369E457D-EE12-4164-8E32-9DDD40A95892}" type="slidenum">
-              <a:rPr lang="zh-TW" altLang="en-US" smtClean="0"/>
-              <a:pPr/>
-              <a:t>38</a:t>
-            </a:fld>
-            <a:endParaRPr lang="zh-TW" altLang="en-US"/>
-          </a:p>
-        </p:txBody>
-      </p:sp>
-      <p:sp>
-        <p:nvSpPr>
-          <p:cNvPr id="4" name="內容版面配置區 3"/>
-          <p:cNvSpPr>
-            <a:spLocks noGrp="1"/>
-          </p:cNvSpPr>
-          <p:nvPr>
-            <p:ph sz="quarter" idx="1"/>
-          </p:nvPr>
-        </p:nvSpPr>
-        <p:spPr/>
-        <p:txBody>
-          <a:bodyPr/>
-          <a:lstStyle/>
-          <a:p>
-            <a:r>
-              <a:rPr lang="zh-TW" altLang="zh-TW" dirty="0"/>
-              <a:t>在上述的表格中，有一些函數如</a:t>
-            </a:r>
-            <a:r>
-              <a:rPr lang="en-US" altLang="zh-TW" dirty="0"/>
-              <a:t>reverse()</a:t>
-            </a:r>
-            <a:r>
-              <a:rPr lang="zh-TW" altLang="zh-TW" dirty="0"/>
-              <a:t>以及</a:t>
-            </a:r>
-            <a:r>
-              <a:rPr lang="en-US" altLang="zh-TW" dirty="0"/>
-              <a:t>exists()</a:t>
-            </a:r>
-            <a:r>
-              <a:rPr lang="zh-TW" altLang="zh-TW" dirty="0"/>
-              <a:t>等是可以串接在另外一些函數後面做進一步過濾資訊的，而修飾元則是放在參數中，把欄位名稱後面加上</a:t>
-            </a:r>
-            <a:r>
-              <a:rPr lang="en-US" altLang="zh-TW" sz="3200" dirty="0">
-                <a:solidFill>
-                  <a:srgbClr val="FF0000"/>
-                </a:solidFill>
-              </a:rPr>
-              <a:t>2</a:t>
-            </a:r>
-            <a:r>
-              <a:rPr lang="zh-TW" altLang="zh-TW" sz="3200" dirty="0">
-                <a:solidFill>
-                  <a:srgbClr val="FF0000"/>
-                </a:solidFill>
-              </a:rPr>
-              <a:t>個底線</a:t>
-            </a:r>
-            <a:r>
-              <a:rPr lang="zh-TW" altLang="zh-TW" dirty="0"/>
-              <a:t>之後再串接，可以為條件設定增加更多的彈性</a:t>
-            </a:r>
-            <a:endParaRPr lang="en-US" altLang="zh-TW" dirty="0"/>
-          </a:p>
-          <a:p>
-            <a:r>
-              <a:rPr lang="zh-TW" altLang="zh-TW" dirty="0"/>
-              <a:t>原本使用</a:t>
-            </a:r>
-            <a:r>
-              <a:rPr lang="en-US" altLang="zh-TW" dirty="0"/>
-              <a:t>filter</a:t>
-            </a:r>
-            <a:r>
-              <a:rPr lang="zh-TW" altLang="zh-TW" dirty="0"/>
-              <a:t>只能設定等號，如果要使用小於</a:t>
-            </a:r>
-            <a:r>
-              <a:rPr lang="en-US" altLang="zh-TW" dirty="0"/>
-              <a:t>2</a:t>
-            </a:r>
-            <a:r>
-              <a:rPr lang="zh-TW" altLang="zh-TW" dirty="0"/>
-              <a:t>的條件，則要改為如下：</a:t>
-            </a:r>
-            <a:endParaRPr lang="en-US" altLang="zh-TW" dirty="0"/>
-          </a:p>
-          <a:p>
-            <a:pPr lvl="1"/>
-            <a:r>
-              <a:rPr lang="en-US" altLang="zh-TW" dirty="0" err="1"/>
-              <a:t>less_than_two</a:t>
-            </a:r>
-            <a:r>
-              <a:rPr lang="en-US" altLang="zh-TW" dirty="0"/>
-              <a:t> = </a:t>
-            </a:r>
-            <a:r>
-              <a:rPr lang="en-US" altLang="zh-TW" dirty="0" err="1"/>
-              <a:t>Product.objects.filter</a:t>
-            </a:r>
-            <a:r>
-              <a:rPr lang="en-US" altLang="zh-TW" dirty="0"/>
-              <a:t>(</a:t>
-            </a:r>
-            <a:r>
-              <a:rPr lang="en-US" altLang="zh-TW" dirty="0" err="1"/>
-              <a:t>qty</a:t>
-            </a:r>
-            <a:r>
-              <a:rPr lang="en-US" altLang="zh-TW" dirty="0">
-                <a:solidFill>
-                  <a:srgbClr val="FF0000"/>
-                </a:solidFill>
-              </a:rPr>
-              <a:t>__</a:t>
-            </a:r>
-            <a:r>
-              <a:rPr lang="en-US" altLang="zh-TW" dirty="0" err="1">
-                <a:solidFill>
-                  <a:srgbClr val="FF0000"/>
-                </a:solidFill>
-              </a:rPr>
-              <a:t>lt</a:t>
-            </a:r>
-            <a:r>
-              <a:rPr lang="en-US" altLang="zh-TW" dirty="0"/>
-              <a:t>=2)</a:t>
-            </a:r>
-            <a:endParaRPr lang="zh-TW" altLang="en-US" dirty="0"/>
-          </a:p>
-        </p:txBody>
-      </p:sp>
-    </p:spTree>
-    <p:extLst>
-      <p:ext uri="{BB962C8B-B14F-4D97-AF65-F5344CB8AC3E}">
-        <p14:creationId xmlns:p14="http://schemas.microsoft.com/office/powerpoint/2010/main" val="426062958"/>
-      </p:ext>
-    </p:extLst>
-  </p:cSld>
-  <p:clrMapOvr>
-    <a:masterClrMapping/>
-  </p:clrMapOvr>
+  <p:timing>
+    <p:tnLst>
+      <p:par>
+        <p:cTn id="1" dur="indefinite" restart="never" nodeType="tmRoot"/>
+      </p:par>
+    </p:tnLst>
+  </p:timing>
 </p:sld>
 </file>
 
@@ -22604,13 +22833,30 @@
       </p:grpSpPr>
       <p:sp>
         <p:nvSpPr>
-          <p:cNvPr id="3" name="投影片編號版面配置區 2">
-            <a:extLst>
-              <a:ext uri="{FF2B5EF4-FFF2-40B4-BE49-F238E27FC236}">
-                <a16:creationId xmlns:a16="http://schemas.microsoft.com/office/drawing/2014/main" id="{1EA69477-3B0F-34E1-945A-821C62F57810}"/>
-              </a:ext>
-            </a:extLst>
-          </p:cNvPr>
+          <p:cNvPr id="2" name="標題 1"/>
+          <p:cNvSpPr>
+            <a:spLocks noGrp="1"/>
+          </p:cNvSpPr>
+          <p:nvPr>
+            <p:ph type="title"/>
+          </p:nvPr>
+        </p:nvSpPr>
+        <p:spPr/>
+        <p:txBody>
+          <a:bodyPr/>
+          <a:lstStyle/>
+          <a:p>
+            <a:r>
+              <a:rPr lang="zh-TW" altLang="zh-TW" dirty="0"/>
+              <a:t>資料的查詢與編輯</a:t>
+            </a:r>
+            <a:endParaRPr lang="zh-TW" altLang="en-US" dirty="0"/>
+          </a:p>
+        </p:txBody>
+      </p:sp>
+      <p:sp>
+        <p:nvSpPr>
+          <p:cNvPr id="3" name="投影片編號版面配置區 2"/>
           <p:cNvSpPr>
             <a:spLocks noGrp="1"/>
           </p:cNvSpPr>
@@ -22634,194 +22880,105 @@
       </p:sp>
       <p:sp>
         <p:nvSpPr>
-          <p:cNvPr id="5" name="文字方塊 4">
-            <a:extLst>
-              <a:ext uri="{FF2B5EF4-FFF2-40B4-BE49-F238E27FC236}">
-                <a16:creationId xmlns:a16="http://schemas.microsoft.com/office/drawing/2014/main" id="{46FC7ED5-EE27-F1F5-114A-A875E1339038}"/>
-              </a:ext>
-            </a:extLst>
-          </p:cNvPr>
-          <p:cNvSpPr txBox="1"/>
-          <p:nvPr/>
-        </p:nvSpPr>
-        <p:spPr>
-          <a:xfrm>
-            <a:off x="-36512" y="188640"/>
-            <a:ext cx="9144000" cy="5078313"/>
-          </a:xfrm>
-          <a:prstGeom prst="rect">
-            <a:avLst/>
-          </a:prstGeom>
-          <a:noFill/>
-        </p:spPr>
-        <p:txBody>
-          <a:bodyPr wrap="square">
-            <a:spAutoFit/>
-          </a:bodyPr>
+          <p:cNvPr id="4" name="內容版面配置區 3"/>
+          <p:cNvSpPr>
+            <a:spLocks noGrp="1"/>
+          </p:cNvSpPr>
+          <p:nvPr>
+            <p:ph sz="quarter" idx="1"/>
+          </p:nvPr>
+        </p:nvSpPr>
+        <p:spPr/>
+        <p:txBody>
+          <a:bodyPr/>
           <a:lstStyle/>
           <a:p>
             <a:r>
-              <a:rPr lang="en-US" altLang="zh-TW" dirty="0"/>
-              <a:t>from </a:t>
-            </a:r>
+              <a:rPr lang="zh-TW" altLang="zh-TW" dirty="0"/>
+              <a:t>在上述的表格中，有一些函數如</a:t>
+            </a:r>
+            <a:r>
+              <a:rPr lang="en-US" altLang="zh-TW" dirty="0"/>
+              <a:t>reverse()</a:t>
+            </a:r>
+            <a:r>
+              <a:rPr lang="zh-TW" altLang="zh-TW" dirty="0"/>
+              <a:t>以及</a:t>
+            </a:r>
+            <a:r>
+              <a:rPr lang="en-US" altLang="zh-TW" dirty="0"/>
+              <a:t>exists()</a:t>
+            </a:r>
+            <a:r>
+              <a:rPr lang="zh-TW" altLang="zh-TW" dirty="0"/>
+              <a:t>等是可以串接在另外一些函數後面做進一步過濾資訊的，而修飾元則是放在參數中，把欄位名稱後面加上</a:t>
+            </a:r>
+            <a:r>
+              <a:rPr lang="en-US" altLang="zh-TW" sz="3200" dirty="0">
+                <a:solidFill>
+                  <a:srgbClr val="FF0000"/>
+                </a:solidFill>
+              </a:rPr>
+              <a:t>2</a:t>
+            </a:r>
+            <a:r>
+              <a:rPr lang="zh-TW" altLang="zh-TW" sz="3200" dirty="0">
+                <a:solidFill>
+                  <a:srgbClr val="FF0000"/>
+                </a:solidFill>
+              </a:rPr>
+              <a:t>個底線</a:t>
+            </a:r>
+            <a:r>
+              <a:rPr lang="zh-TW" altLang="zh-TW" dirty="0"/>
+              <a:t>之後再串接，可以為條件設定增加更多的彈性</a:t>
+            </a:r>
+            <a:endParaRPr lang="en-US" altLang="zh-TW" dirty="0"/>
+          </a:p>
+          <a:p>
+            <a:r>
+              <a:rPr lang="zh-TW" altLang="zh-TW" dirty="0"/>
+              <a:t>原本使用</a:t>
+            </a:r>
+            <a:r>
+              <a:rPr lang="en-US" altLang="zh-TW" dirty="0"/>
+              <a:t>filter</a:t>
+            </a:r>
+            <a:r>
+              <a:rPr lang="zh-TW" altLang="zh-TW" dirty="0"/>
+              <a:t>只能設定等號，如果要使用小於</a:t>
+            </a:r>
+            <a:r>
+              <a:rPr lang="en-US" altLang="zh-TW" dirty="0"/>
+              <a:t>2</a:t>
+            </a:r>
+            <a:r>
+              <a:rPr lang="zh-TW" altLang="zh-TW" dirty="0"/>
+              <a:t>的條件，則要改為如下：</a:t>
+            </a:r>
+            <a:endParaRPr lang="en-US" altLang="zh-TW" dirty="0"/>
+          </a:p>
+          <a:p>
+            <a:pPr lvl="1"/>
             <a:r>
               <a:rPr lang="en-US" altLang="zh-TW" dirty="0" err="1"/>
-              <a:t>mysite.models</a:t>
-            </a:r>
-            <a:r>
-              <a:rPr lang="en-US" altLang="zh-TW" dirty="0"/>
-              <a:t> import Product    (ch04 products.py)</a:t>
-            </a:r>
-          </a:p>
-          <a:p>
-            <a:r>
-              <a:rPr lang="en-US" altLang="zh-TW" dirty="0"/>
-              <a:t>p = </a:t>
+              <a:t>less_than_two</a:t>
+            </a:r>
+            <a:r>
+              <a:rPr lang="en-US" altLang="zh-TW" dirty="0"/>
+              <a:t> = </a:t>
             </a:r>
             <a:r>
               <a:rPr lang="en-US" altLang="zh-TW" dirty="0" err="1"/>
-              <a:t>Product.objects.create</a:t>
-            </a:r>
-            <a:r>
-              <a:rPr lang="en-US" altLang="zh-TW" dirty="0"/>
-              <a:t>(name=' HTC Magic', price=100, qty=0)</a:t>
-            </a:r>
-          </a:p>
-          <a:p>
-            <a:r>
-              <a:rPr lang="en-US" altLang="zh-TW" dirty="0"/>
-              <a:t>p = </a:t>
+              <a:t>Product.objects.filter</a:t>
+            </a:r>
+            <a:r>
+              <a:rPr lang="en-US" altLang="zh-TW" dirty="0"/>
+              <a:t>(</a:t>
             </a:r>
             <a:r>
               <a:rPr lang="en-US" altLang="zh-TW" dirty="0" err="1"/>
-              <a:t>Product.objects.create</a:t>
-            </a:r>
-            <a:r>
-              <a:rPr lang="en-US" altLang="zh-TW" dirty="0"/>
-              <a:t>(name=' SONY Xperia Z3', price= 15000, qty=1)</a:t>
-            </a:r>
-          </a:p>
-          <a:p>
-            <a:r>
-              <a:rPr lang="en-US" altLang="zh-TW" dirty="0"/>
-              <a:t>p = </a:t>
-            </a:r>
-            <a:r>
-              <a:rPr lang="en-US" altLang="zh-TW" dirty="0" err="1"/>
-              <a:t>Product.objects.create</a:t>
-            </a:r>
-            <a:r>
-              <a:rPr lang="en-US" altLang="zh-TW" dirty="0"/>
-              <a:t>(name=' Samsung DUOS', price=800, qty=2)</a:t>
-            </a:r>
-          </a:p>
-          <a:p>
-            <a:r>
-              <a:rPr lang="en-US" altLang="zh-TW" dirty="0"/>
-              <a:t>p = </a:t>
-            </a:r>
-            <a:r>
-              <a:rPr lang="en-US" altLang="zh-TW" dirty="0" err="1"/>
-              <a:t>Product.objects.create</a:t>
-            </a:r>
-            <a:r>
-              <a:rPr lang="en-US" altLang="zh-TW" dirty="0"/>
-              <a:t>(name=' Nokia Xpress 5800', price=500, qty=1)</a:t>
-            </a:r>
-          </a:p>
-          <a:p>
-            <a:r>
-              <a:rPr lang="en-US" altLang="zh-TW" dirty="0"/>
-              <a:t>p = </a:t>
-            </a:r>
-            <a:r>
-              <a:rPr lang="en-US" altLang="zh-TW" dirty="0" err="1"/>
-              <a:t>Product.objects.create</a:t>
-            </a:r>
-            <a:r>
-              <a:rPr lang="en-US" altLang="zh-TW" dirty="0"/>
-              <a:t>(name=' </a:t>
-            </a:r>
-            <a:r>
-              <a:rPr lang="en-US" altLang="zh-TW" dirty="0" err="1"/>
-              <a:t>Infocus</a:t>
-            </a:r>
-            <a:r>
-              <a:rPr lang="en-US" altLang="zh-TW" dirty="0"/>
-              <a:t> M370', price=1500, qty=2)</a:t>
-            </a:r>
-          </a:p>
-          <a:p>
-            <a:r>
-              <a:rPr lang="en-US" altLang="zh-TW" dirty="0" err="1"/>
-              <a:t>p.save</a:t>
-            </a:r>
-            <a:r>
-              <a:rPr lang="en-US" altLang="zh-TW" dirty="0"/>
-              <a:t>()</a:t>
-            </a:r>
-          </a:p>
-          <a:p>
-            <a:r>
-              <a:rPr lang="en-US" altLang="zh-TW" dirty="0"/>
-              <a:t>#exit()</a:t>
-            </a:r>
-          </a:p>
-          <a:p>
-            <a:endParaRPr lang="en-US" altLang="zh-TW" dirty="0"/>
-          </a:p>
-          <a:p>
-            <a:r>
-              <a:rPr lang="en-US" altLang="zh-TW" dirty="0" err="1"/>
-              <a:t>allprod</a:t>
-            </a:r>
-            <a:r>
-              <a:rPr lang="en-US" altLang="zh-TW" dirty="0"/>
-              <a:t> = </a:t>
-            </a:r>
-            <a:r>
-              <a:rPr lang="en-US" altLang="zh-TW" dirty="0" err="1"/>
-              <a:t>Product.objects.all</a:t>
-            </a:r>
-            <a:r>
-              <a:rPr lang="en-US" altLang="zh-TW" dirty="0"/>
-              <a:t>()</a:t>
-            </a:r>
-          </a:p>
-          <a:p>
-            <a:r>
-              <a:rPr lang="en-US" altLang="zh-TW" dirty="0"/>
-              <a:t>for p in </a:t>
-            </a:r>
-            <a:r>
-              <a:rPr lang="en-US" altLang="zh-TW" dirty="0" err="1"/>
-              <a:t>allprod</a:t>
-            </a:r>
-            <a:r>
-              <a:rPr lang="en-US" altLang="zh-TW" dirty="0"/>
-              <a:t>:</a:t>
-            </a:r>
-          </a:p>
-          <a:p>
-            <a:r>
-              <a:rPr lang="en-US" altLang="zh-TW" dirty="0"/>
-              <a:t>    print(p.name, ‘, ’, </a:t>
-            </a:r>
-            <a:r>
-              <a:rPr lang="en-US" altLang="zh-TW" dirty="0" err="1"/>
-              <a:t>p.price</a:t>
-            </a:r>
-            <a:r>
-              <a:rPr lang="en-US" altLang="zh-TW" dirty="0"/>
-              <a:t>, ‘, ’, </a:t>
-            </a:r>
-            <a:r>
-              <a:rPr lang="en-US" altLang="zh-TW" dirty="0" err="1"/>
-              <a:t>p.qty</a:t>
-            </a:r>
-            <a:r>
-              <a:rPr lang="en-US" altLang="zh-TW" dirty="0"/>
-              <a:t>)  </a:t>
+              <a:t>qty</a:t>
             </a:r>
             <a:r>
               <a:rPr lang="en-US" altLang="zh-TW" dirty="0">
@@ -22829,150 +22986,41 @@
                   <a:srgbClr val="FF0000"/>
                 </a:solidFill>
               </a:rPr>
-              <a:t>(</a:t>
-            </a:r>
-            <a:r>
-              <a:rPr lang="zh-TW" altLang="en-US" dirty="0">
+              <a:t>__</a:t>
+            </a:r>
+            <a:r>
+              <a:rPr lang="en-US" altLang="zh-TW" dirty="0" err="1">
                 <a:solidFill>
                   <a:srgbClr val="FF0000"/>
                 </a:solidFill>
               </a:rPr>
-              <a:t>打字到這邊要再按一下</a:t>
-            </a:r>
-            <a:r>
-              <a:rPr lang="en-US" altLang="zh-TW" dirty="0">
-                <a:solidFill>
-                  <a:srgbClr val="FF0000"/>
-                </a:solidFill>
-              </a:rPr>
-              <a:t>enter</a:t>
-            </a:r>
-            <a:r>
-              <a:rPr lang="zh-TW" altLang="en-US" dirty="0">
-                <a:solidFill>
-                  <a:srgbClr val="FF0000"/>
-                </a:solidFill>
-              </a:rPr>
-              <a:t>才會有結果</a:t>
-            </a:r>
-            <a:r>
-              <a:rPr lang="en-US" altLang="zh-TW" dirty="0">
-                <a:solidFill>
-                  <a:srgbClr val="FF0000"/>
-                </a:solidFill>
-              </a:rPr>
-              <a:t>)</a:t>
-            </a:r>
-          </a:p>
-          <a:p>
-            <a:endParaRPr lang="en-US" altLang="zh-TW" dirty="0"/>
-          </a:p>
-          <a:p>
-            <a:r>
-              <a:rPr lang="en-US" altLang="zh-TW" dirty="0"/>
-              <a:t>HTC Magic ,  100 ,  0</a:t>
-            </a:r>
-          </a:p>
-          <a:p>
-            <a:r>
-              <a:rPr lang="en-US" altLang="zh-TW" dirty="0"/>
-              <a:t>SONY Xperia Z3 , 15000 , 1</a:t>
-            </a:r>
-          </a:p>
-          <a:p>
-            <a:r>
-              <a:rPr lang="en-US" altLang="zh-TW" dirty="0"/>
-              <a:t>Samsung DUOS , 800 , 2</a:t>
-            </a:r>
-          </a:p>
-          <a:p>
-            <a:r>
-              <a:rPr lang="en-US" altLang="zh-TW" dirty="0"/>
-              <a:t>Nokia Xpress 5800, 500, 1</a:t>
-            </a:r>
-          </a:p>
-          <a:p>
-            <a:r>
-              <a:rPr lang="en-US" altLang="zh-TW" dirty="0" err="1"/>
-              <a:t>Infocus</a:t>
-            </a:r>
-            <a:r>
-              <a:rPr lang="en-US" altLang="zh-TW" dirty="0"/>
-              <a:t> M370 , 1500 , 2</a:t>
-            </a:r>
-          </a:p>
-        </p:txBody>
-      </p:sp>
-      <p:pic>
-        <p:nvPicPr>
-          <p:cNvPr id="7" name="圖片 6">
-            <a:extLst>
-              <a:ext uri="{FF2B5EF4-FFF2-40B4-BE49-F238E27FC236}">
-                <a16:creationId xmlns:a16="http://schemas.microsoft.com/office/drawing/2014/main" id="{B68F56B5-230E-172F-05BE-14152ECD6F0F}"/>
-              </a:ext>
-            </a:extLst>
-          </p:cNvPr>
-          <p:cNvPicPr>
-            <a:picLocks noChangeAspect="1"/>
-          </p:cNvPicPr>
-          <p:nvPr/>
-        </p:nvPicPr>
-        <p:blipFill>
-          <a:blip r:embed="rId3"/>
-          <a:stretch>
-            <a:fillRect/>
-          </a:stretch>
-        </p:blipFill>
-        <p:spPr>
-          <a:xfrm>
-            <a:off x="3347864" y="4369312"/>
-            <a:ext cx="5849166" cy="2372056"/>
-          </a:xfrm>
-          <a:prstGeom prst="rect">
-            <a:avLst/>
-          </a:prstGeom>
-        </p:spPr>
-      </p:pic>
-      <p:pic>
-        <p:nvPicPr>
-          <p:cNvPr id="4" name="圖片 3">
-            <a:extLst>
-              <a:ext uri="{FF2B5EF4-FFF2-40B4-BE49-F238E27FC236}">
-                <a16:creationId xmlns:a16="http://schemas.microsoft.com/office/drawing/2014/main" id="{B0FAE2BC-E885-5B4A-0E4B-574296BD71A2}"/>
-              </a:ext>
-            </a:extLst>
-          </p:cNvPr>
-          <p:cNvPicPr>
-            <a:picLocks noChangeAspect="1"/>
-          </p:cNvPicPr>
-          <p:nvPr/>
-        </p:nvPicPr>
-        <p:blipFill>
-          <a:blip r:embed="rId4"/>
-          <a:stretch>
-            <a:fillRect/>
-          </a:stretch>
-        </p:blipFill>
-        <p:spPr>
-          <a:xfrm>
-            <a:off x="3491880" y="3717032"/>
-            <a:ext cx="5315692" cy="762106"/>
-          </a:xfrm>
-          <a:prstGeom prst="rect">
-            <a:avLst/>
-          </a:prstGeom>
-        </p:spPr>
-      </p:pic>
+              <a:t>lt</a:t>
+            </a:r>
+            <a:r>
+              <a:rPr lang="en-US" altLang="zh-TW" dirty="0"/>
+              <a:t>=2)</a:t>
+            </a:r>
+            <a:endParaRPr lang="zh-TW" altLang="en-US" dirty="0"/>
+          </a:p>
+        </p:txBody>
+      </p:sp>
     </p:spTree>
     <p:extLst>
       <p:ext uri="{BB962C8B-B14F-4D97-AF65-F5344CB8AC3E}">
-        <p14:creationId xmlns:p14="http://schemas.microsoft.com/office/powerpoint/2010/main" val="1836525547"/>
+        <p14:creationId xmlns:p14="http://schemas.microsoft.com/office/powerpoint/2010/main" val="426062958"/>
       </p:ext>
     </p:extLst>
   </p:cSld>
   <p:clrMapOvr>
     <a:masterClrMapping/>
   </p:clrMapOvr>
+  <p:timing>
+    <p:tnLst>
+      <p:par>
+        <p:cTn id="1" dur="indefinite" restart="never" nodeType="tmRoot"/>
+      </p:par>
+    </p:tnLst>
+  </p:timing>
 </p:sld>
 </file>
 
@@ -23099,14 +23147,14 @@
                 <a:gridCol w="2144840">
                   <a:extLst>
                     <a:ext uri="{9D8B030D-6E8A-4147-A177-3AD203B41FA5}">
-                      <a16:colId xmlns:a16="http://schemas.microsoft.com/office/drawing/2014/main" val="20000"/>
+                      <a16:colId xmlns:a16="http://schemas.microsoft.com/office/drawing/2014/main" xmlns="" val="20000"/>
                     </a:ext>
                   </a:extLst>
                 </a:gridCol>
                 <a:gridCol w="6606035">
                   <a:extLst>
                     <a:ext uri="{9D8B030D-6E8A-4147-A177-3AD203B41FA5}">
-                      <a16:colId xmlns:a16="http://schemas.microsoft.com/office/drawing/2014/main" val="20001"/>
+                      <a16:colId xmlns:a16="http://schemas.microsoft.com/office/drawing/2014/main" xmlns="" val="20001"/>
                     </a:ext>
                   </a:extLst>
                 </a:gridCol>
@@ -23172,7 +23220,7 @@
                 </a:tc>
                 <a:extLst>
                   <a:ext uri="{0D108BD9-81ED-4DB2-BD59-A6C34878D82A}">
-                    <a16:rowId xmlns:a16="http://schemas.microsoft.com/office/drawing/2014/main" val="10000"/>
+                    <a16:rowId xmlns:a16="http://schemas.microsoft.com/office/drawing/2014/main" xmlns="" val="10000"/>
                   </a:ext>
                 </a:extLst>
               </a:tr>
@@ -23270,7 +23318,7 @@
                 </a:tc>
                 <a:extLst>
                   <a:ext uri="{0D108BD9-81ED-4DB2-BD59-A6C34878D82A}">
-                    <a16:rowId xmlns:a16="http://schemas.microsoft.com/office/drawing/2014/main" val="10001"/>
+                    <a16:rowId xmlns:a16="http://schemas.microsoft.com/office/drawing/2014/main" xmlns="" val="10001"/>
                   </a:ext>
                 </a:extLst>
               </a:tr>
@@ -23377,7 +23425,7 @@
                 </a:tc>
                 <a:extLst>
                   <a:ext uri="{0D108BD9-81ED-4DB2-BD59-A6C34878D82A}">
-                    <a16:rowId xmlns:a16="http://schemas.microsoft.com/office/drawing/2014/main" val="10002"/>
+                    <a16:rowId xmlns:a16="http://schemas.microsoft.com/office/drawing/2014/main" xmlns="" val="10002"/>
                   </a:ext>
                 </a:extLst>
               </a:tr>
@@ -23460,7 +23508,7 @@
                 </a:tc>
                 <a:extLst>
                   <a:ext uri="{0D108BD9-81ED-4DB2-BD59-A6C34878D82A}">
-                    <a16:rowId xmlns:a16="http://schemas.microsoft.com/office/drawing/2014/main" val="10003"/>
+                    <a16:rowId xmlns:a16="http://schemas.microsoft.com/office/drawing/2014/main" xmlns="" val="10003"/>
                   </a:ext>
                 </a:extLst>
               </a:tr>
@@ -23503,7 +23551,7 @@
           <p:cNvPr id="2" name="標題 1">
             <a:extLst>
               <a:ext uri="{FF2B5EF4-FFF2-40B4-BE49-F238E27FC236}">
-                <a16:creationId xmlns:a16="http://schemas.microsoft.com/office/drawing/2014/main" id="{601569FF-2E91-7B98-39FD-E371010D3776}"/>
+                <a16:creationId xmlns:a16="http://schemas.microsoft.com/office/drawing/2014/main" xmlns="" id="{601569FF-2E91-7B98-39FD-E371010D3776}"/>
               </a:ext>
             </a:extLst>
           </p:cNvPr>
@@ -23514,15 +23562,58 @@
             <p:ph type="title"/>
           </p:nvPr>
         </p:nvSpPr>
-        <p:spPr/>
-        <p:txBody>
-          <a:bodyPr/>
+        <p:spPr>
+          <a:xfrm>
+            <a:off x="301752" y="437800"/>
+            <a:ext cx="8534400" cy="758952"/>
+          </a:xfrm>
+        </p:spPr>
+        <p:txBody>
+          <a:bodyPr>
+            <a:normAutofit fontScale="90000"/>
+          </a:bodyPr>
           <a:lstStyle/>
           <a:p>
             <a:r>
               <a:rPr lang="zh-TW" altLang="en-US" dirty="0"/>
-              <a:t>查詢範例</a:t>
-            </a:r>
+              <a:t>查詢</a:t>
+            </a:r>
+            <a:r>
+              <a:rPr lang="zh-TW" altLang="en-US" dirty="0" smtClean="0"/>
+              <a:t>範例 </a:t>
+            </a:r>
+            <a:r>
+              <a:rPr lang="zh-TW" altLang="en-US" sz="4400" dirty="0" smtClean="0">
+                <a:solidFill>
+                  <a:srgbClr val="FF0000"/>
+                </a:solidFill>
+              </a:rPr>
+              <a:t>記得先</a:t>
+            </a:r>
+            <a:r>
+              <a:rPr lang="en-US" altLang="zh-TW" dirty="0" smtClean="0"/>
+              <a:t/>
+            </a:r>
+            <a:br>
+              <a:rPr lang="en-US" altLang="zh-TW" dirty="0" smtClean="0"/>
+            </a:br>
+            <a:r>
+              <a:rPr lang="en-US" altLang="zh-TW" dirty="0" smtClean="0"/>
+              <a:t>from </a:t>
+            </a:r>
+            <a:r>
+              <a:rPr lang="en-US" altLang="zh-TW" dirty="0" err="1"/>
+              <a:t>mysite.models</a:t>
+            </a:r>
+            <a:r>
+              <a:rPr lang="en-US" altLang="zh-TW" dirty="0"/>
+              <a:t> import </a:t>
+            </a:r>
+            <a:r>
+              <a:rPr lang="en-US" altLang="zh-TW" dirty="0" smtClean="0"/>
+              <a:t>Product</a:t>
+            </a:r>
+            <a:endParaRPr lang="zh-TW" altLang="en-US" dirty="0"/>
           </a:p>
         </p:txBody>
       </p:sp>
@@ -23531,7 +23622,7 @@
           <p:cNvPr id="3" name="投影片編號版面配置區 2">
             <a:extLst>
               <a:ext uri="{FF2B5EF4-FFF2-40B4-BE49-F238E27FC236}">
-                <a16:creationId xmlns:a16="http://schemas.microsoft.com/office/drawing/2014/main" id="{2141321D-901C-C0F7-70DD-839BA15F6B2D}"/>
+                <a16:creationId xmlns:a16="http://schemas.microsoft.com/office/drawing/2014/main" xmlns="" id="{2141321D-901C-C0F7-70DD-839BA15F6B2D}"/>
               </a:ext>
             </a:extLst>
           </p:cNvPr>
@@ -23561,7 +23652,7 @@
           <p:cNvPr id="5" name="內容版面配置區 4">
             <a:extLst>
               <a:ext uri="{FF2B5EF4-FFF2-40B4-BE49-F238E27FC236}">
-                <a16:creationId xmlns:a16="http://schemas.microsoft.com/office/drawing/2014/main" id="{B0641FC8-4C11-285A-C062-289D4DC5D830}"/>
+                <a16:creationId xmlns:a16="http://schemas.microsoft.com/office/drawing/2014/main" xmlns="" id="{B0641FC8-4C11-285A-C062-289D4DC5D830}"/>
               </a:ext>
             </a:extLst>
           </p:cNvPr>
@@ -23591,14 +23682,14 @@
                 <a:gridCol w="2068795">
                   <a:extLst>
                     <a:ext uri="{9D8B030D-6E8A-4147-A177-3AD203B41FA5}">
-                      <a16:colId xmlns:a16="http://schemas.microsoft.com/office/drawing/2014/main" val="2846651318"/>
+                      <a16:colId xmlns:a16="http://schemas.microsoft.com/office/drawing/2014/main" xmlns="" val="2846651318"/>
                     </a:ext>
                   </a:extLst>
                 </a:gridCol>
                 <a:gridCol w="6371821">
                   <a:extLst>
                     <a:ext uri="{9D8B030D-6E8A-4147-A177-3AD203B41FA5}">
-                      <a16:colId xmlns:a16="http://schemas.microsoft.com/office/drawing/2014/main" val="3818094713"/>
+                      <a16:colId xmlns:a16="http://schemas.microsoft.com/office/drawing/2014/main" xmlns="" val="3818094713"/>
                     </a:ext>
                   </a:extLst>
                 </a:gridCol>
@@ -23664,7 +23755,7 @@
                 </a:tc>
                 <a:extLst>
                   <a:ext uri="{0D108BD9-81ED-4DB2-BD59-A6C34878D82A}">
-                    <a16:rowId xmlns:a16="http://schemas.microsoft.com/office/drawing/2014/main" val="458416311"/>
+                    <a16:rowId xmlns:a16="http://schemas.microsoft.com/office/drawing/2014/main" xmlns="" val="458416311"/>
                   </a:ext>
                 </a:extLst>
               </a:tr>
@@ -23784,7 +23875,7 @@
                 </a:tc>
                 <a:extLst>
                   <a:ext uri="{0D108BD9-81ED-4DB2-BD59-A6C34878D82A}">
-                    <a16:rowId xmlns:a16="http://schemas.microsoft.com/office/drawing/2014/main" val="3224030595"/>
+                    <a16:rowId xmlns:a16="http://schemas.microsoft.com/office/drawing/2014/main" xmlns="" val="3224030595"/>
                   </a:ext>
                 </a:extLst>
               </a:tr>
@@ -23892,7 +23983,7 @@
                 </a:tc>
                 <a:extLst>
                   <a:ext uri="{0D108BD9-81ED-4DB2-BD59-A6C34878D82A}">
-                    <a16:rowId xmlns:a16="http://schemas.microsoft.com/office/drawing/2014/main" val="466804221"/>
+                    <a16:rowId xmlns:a16="http://schemas.microsoft.com/office/drawing/2014/main" xmlns="" val="466804221"/>
                   </a:ext>
                 </a:extLst>
               </a:tr>
@@ -24021,7 +24112,7 @@
                 </a:tc>
                 <a:extLst>
                   <a:ext uri="{0D108BD9-81ED-4DB2-BD59-A6C34878D82A}">
-                    <a16:rowId xmlns:a16="http://schemas.microsoft.com/office/drawing/2014/main" val="3960341814"/>
+                    <a16:rowId xmlns:a16="http://schemas.microsoft.com/office/drawing/2014/main" xmlns="" val="3960341814"/>
                   </a:ext>
                 </a:extLst>
               </a:tr>
@@ -24153,7 +24244,7 @@
                 </a:tc>
                 <a:extLst>
                   <a:ext uri="{0D108BD9-81ED-4DB2-BD59-A6C34878D82A}">
-                    <a16:rowId xmlns:a16="http://schemas.microsoft.com/office/drawing/2014/main" val="676436013"/>
+                    <a16:rowId xmlns:a16="http://schemas.microsoft.com/office/drawing/2014/main" xmlns="" val="676436013"/>
                   </a:ext>
                 </a:extLst>
               </a:tr>
@@ -24171,6 +24262,13 @@
   <p:clrMapOvr>
     <a:masterClrMapping/>
   </p:clrMapOvr>
+  <p:timing>
+    <p:tnLst>
+      <p:par>
+        <p:cTn id="1" dur="indefinite" restart="never" nodeType="tmRoot"/>
+      </p:par>
+    </p:tnLst>
+  </p:timing>
 </p:sld>
 </file>
 
@@ -24182,7 +24280,7 @@
         <p:cNvPr id="1" name="">
           <a:extLst>
             <a:ext uri="{FF2B5EF4-FFF2-40B4-BE49-F238E27FC236}">
-              <a16:creationId xmlns:a16="http://schemas.microsoft.com/office/drawing/2014/main" id="{3FBC253E-26B6-5271-911B-68048296A8AC}"/>
+              <a16:creationId xmlns:a16="http://schemas.microsoft.com/office/drawing/2014/main" xmlns="" id="{3FBC253E-26B6-5271-911B-68048296A8AC}"/>
             </a:ext>
           </a:extLst>
         </p:cNvPr>
@@ -24202,7 +24300,7 @@
           <p:cNvPr id="2" name="標題 1">
             <a:extLst>
               <a:ext uri="{FF2B5EF4-FFF2-40B4-BE49-F238E27FC236}">
-                <a16:creationId xmlns:a16="http://schemas.microsoft.com/office/drawing/2014/main" id="{FF2CE5A6-0125-AD96-09BF-01374DD9C2C8}"/>
+                <a16:creationId xmlns:a16="http://schemas.microsoft.com/office/drawing/2014/main" xmlns="" id="{FF2CE5A6-0125-AD96-09BF-01374DD9C2C8}"/>
               </a:ext>
             </a:extLst>
           </p:cNvPr>
@@ -24230,7 +24328,7 @@
           <p:cNvPr id="3" name="投影片編號版面配置區 2">
             <a:extLst>
               <a:ext uri="{FF2B5EF4-FFF2-40B4-BE49-F238E27FC236}">
-                <a16:creationId xmlns:a16="http://schemas.microsoft.com/office/drawing/2014/main" id="{46C62173-EE84-106F-233D-B4228B044522}"/>
+                <a16:creationId xmlns:a16="http://schemas.microsoft.com/office/drawing/2014/main" xmlns="" id="{46C62173-EE84-106F-233D-B4228B044522}"/>
               </a:ext>
             </a:extLst>
           </p:cNvPr>
@@ -24260,7 +24358,7 @@
           <p:cNvPr id="5" name="內容版面配置區 4">
             <a:extLst>
               <a:ext uri="{FF2B5EF4-FFF2-40B4-BE49-F238E27FC236}">
-                <a16:creationId xmlns:a16="http://schemas.microsoft.com/office/drawing/2014/main" id="{268D758A-9B09-AD18-6AB0-C8A1C76742A9}"/>
+                <a16:creationId xmlns:a16="http://schemas.microsoft.com/office/drawing/2014/main" xmlns="" id="{268D758A-9B09-AD18-6AB0-C8A1C76742A9}"/>
               </a:ext>
             </a:extLst>
           </p:cNvPr>
@@ -24290,14 +24388,14 @@
                 <a:gridCol w="2068795">
                   <a:extLst>
                     <a:ext uri="{9D8B030D-6E8A-4147-A177-3AD203B41FA5}">
-                      <a16:colId xmlns:a16="http://schemas.microsoft.com/office/drawing/2014/main" val="2846651318"/>
+                      <a16:colId xmlns:a16="http://schemas.microsoft.com/office/drawing/2014/main" xmlns="" val="2846651318"/>
                     </a:ext>
                   </a:extLst>
                 </a:gridCol>
                 <a:gridCol w="6371821">
                   <a:extLst>
                     <a:ext uri="{9D8B030D-6E8A-4147-A177-3AD203B41FA5}">
-                      <a16:colId xmlns:a16="http://schemas.microsoft.com/office/drawing/2014/main" val="3818094713"/>
+                      <a16:colId xmlns:a16="http://schemas.microsoft.com/office/drawing/2014/main" xmlns="" val="3818094713"/>
                     </a:ext>
                   </a:extLst>
                 </a:gridCol>
@@ -24363,7 +24461,7 @@
                 </a:tc>
                 <a:extLst>
                   <a:ext uri="{0D108BD9-81ED-4DB2-BD59-A6C34878D82A}">
-                    <a16:rowId xmlns:a16="http://schemas.microsoft.com/office/drawing/2014/main" val="458416311"/>
+                    <a16:rowId xmlns:a16="http://schemas.microsoft.com/office/drawing/2014/main" xmlns="" val="458416311"/>
                   </a:ext>
                 </a:extLst>
               </a:tr>
@@ -24465,7 +24563,7 @@
                 </a:tc>
                 <a:extLst>
                   <a:ext uri="{0D108BD9-81ED-4DB2-BD59-A6C34878D82A}">
-                    <a16:rowId xmlns:a16="http://schemas.microsoft.com/office/drawing/2014/main" val="3224030595"/>
+                    <a16:rowId xmlns:a16="http://schemas.microsoft.com/office/drawing/2014/main" xmlns="" val="3224030595"/>
                   </a:ext>
                 </a:extLst>
               </a:tr>
@@ -24555,7 +24653,7 @@
                 </a:tc>
                 <a:extLst>
                   <a:ext uri="{0D108BD9-81ED-4DB2-BD59-A6C34878D82A}">
-                    <a16:rowId xmlns:a16="http://schemas.microsoft.com/office/drawing/2014/main" val="466804221"/>
+                    <a16:rowId xmlns:a16="http://schemas.microsoft.com/office/drawing/2014/main" xmlns="" val="466804221"/>
                   </a:ext>
                 </a:extLst>
               </a:tr>
@@ -24657,7 +24755,7 @@
                 </a:tc>
                 <a:extLst>
                   <a:ext uri="{0D108BD9-81ED-4DB2-BD59-A6C34878D82A}">
-                    <a16:rowId xmlns:a16="http://schemas.microsoft.com/office/drawing/2014/main" val="3960341814"/>
+                    <a16:rowId xmlns:a16="http://schemas.microsoft.com/office/drawing/2014/main" xmlns="" val="3960341814"/>
                   </a:ext>
                 </a:extLst>
               </a:tr>
@@ -24759,7 +24857,7 @@
                 </a:tc>
                 <a:extLst>
                   <a:ext uri="{0D108BD9-81ED-4DB2-BD59-A6C34878D82A}">
-                    <a16:rowId xmlns:a16="http://schemas.microsoft.com/office/drawing/2014/main" val="676436013"/>
+                    <a16:rowId xmlns:a16="http://schemas.microsoft.com/office/drawing/2014/main" xmlns="" val="676436013"/>
                   </a:ext>
                 </a:extLst>
               </a:tr>
@@ -24777,6 +24875,13 @@
   <p:clrMapOvr>
     <a:masterClrMapping/>
   </p:clrMapOvr>
+  <p:timing>
+    <p:tnLst>
+      <p:par>
+        <p:cTn id="1" dur="indefinite" restart="never" nodeType="tmRoot"/>
+      </p:par>
+    </p:tnLst>
+  </p:timing>
 </p:sld>
 </file>
 
@@ -24802,7 +24907,7 @@
           <p:cNvPr id="2" name="標題 1">
             <a:extLst>
               <a:ext uri="{FF2B5EF4-FFF2-40B4-BE49-F238E27FC236}">
-                <a16:creationId xmlns:a16="http://schemas.microsoft.com/office/drawing/2014/main" id="{601569FF-2E91-7B98-39FD-E371010D3776}"/>
+                <a16:creationId xmlns:a16="http://schemas.microsoft.com/office/drawing/2014/main" xmlns="" id="{601569FF-2E91-7B98-39FD-E371010D3776}"/>
               </a:ext>
             </a:extLst>
           </p:cNvPr>
@@ -24813,15 +24918,74 @@
             <p:ph type="title"/>
           </p:nvPr>
         </p:nvSpPr>
-        <p:spPr/>
-        <p:txBody>
-          <a:bodyPr/>
+        <p:spPr>
+          <a:xfrm>
+            <a:off x="107504" y="404664"/>
+            <a:ext cx="9036496" cy="758952"/>
+          </a:xfrm>
+        </p:spPr>
+        <p:txBody>
+          <a:bodyPr>
+            <a:normAutofit fontScale="90000"/>
+          </a:bodyPr>
           <a:lstStyle/>
           <a:p>
             <a:r>
               <a:rPr lang="zh-TW" altLang="en-US" dirty="0"/>
-              <a:t>查詢範例</a:t>
-            </a:r>
+              <a:t>查詢</a:t>
+            </a:r>
+            <a:r>
+              <a:rPr lang="zh-TW" altLang="en-US" dirty="0" smtClean="0"/>
+              <a:t>範例</a:t>
+            </a:r>
+            <a:r>
+              <a:rPr lang="zh-TW" altLang="en-US" sz="3600" dirty="0">
+                <a:solidFill>
+                  <a:srgbClr val="FF0000"/>
+                </a:solidFill>
+              </a:rPr>
+              <a:t>記得</a:t>
+            </a:r>
+            <a:r>
+              <a:rPr lang="zh-TW" altLang="en-US" sz="3600" dirty="0" smtClean="0">
+                <a:solidFill>
+                  <a:srgbClr val="FF0000"/>
+                </a:solidFill>
+              </a:rPr>
+              <a:t>先</a:t>
+            </a:r>
+            <a:r>
+              <a:rPr lang="en-US" altLang="zh-TW" sz="3600" dirty="0" smtClean="0">
+                <a:solidFill>
+                  <a:srgbClr val="FF0000"/>
+                </a:solidFill>
+              </a:rPr>
+              <a:t/>
+            </a:r>
+            <a:br>
+              <a:rPr lang="en-US" altLang="zh-TW" sz="3600" dirty="0" smtClean="0">
+                <a:solidFill>
+                  <a:srgbClr val="FF0000"/>
+                </a:solidFill>
+              </a:rPr>
+            </a:br>
+            <a:r>
+              <a:rPr lang="en-US" altLang="zh-TW" sz="3600" kern="100" dirty="0"/>
+              <a:t>from </a:t>
+            </a:r>
+            <a:r>
+              <a:rPr lang="en-US" altLang="zh-TW" sz="3600" kern="100" dirty="0" err="1"/>
+              <a:t>django.db.models</a:t>
+            </a:r>
+            <a:r>
+              <a:rPr lang="en-US" altLang="zh-TW" sz="3600" kern="100" dirty="0"/>
+              <a:t> import </a:t>
+            </a:r>
+            <a:r>
+              <a:rPr lang="en-US" altLang="zh-TW" sz="3600" kern="100" dirty="0" err="1" smtClean="0"/>
+              <a:t>Count,Sum</a:t>
+            </a:r>
+            <a:endParaRPr lang="zh-TW" altLang="en-US" dirty="0"/>
           </a:p>
         </p:txBody>
       </p:sp>
@@ -24830,7 +24994,7 @@
           <p:cNvPr id="3" name="投影片編號版面配置區 2">
             <a:extLst>
               <a:ext uri="{FF2B5EF4-FFF2-40B4-BE49-F238E27FC236}">
-                <a16:creationId xmlns:a16="http://schemas.microsoft.com/office/drawing/2014/main" id="{2141321D-901C-C0F7-70DD-839BA15F6B2D}"/>
+                <a16:creationId xmlns:a16="http://schemas.microsoft.com/office/drawing/2014/main" xmlns="" id="{2141321D-901C-C0F7-70DD-839BA15F6B2D}"/>
               </a:ext>
             </a:extLst>
           </p:cNvPr>
@@ -24860,7 +25024,7 @@
           <p:cNvPr id="8" name="內容版面配置區 7">
             <a:extLst>
               <a:ext uri="{FF2B5EF4-FFF2-40B4-BE49-F238E27FC236}">
-                <a16:creationId xmlns:a16="http://schemas.microsoft.com/office/drawing/2014/main" id="{A3AF5B7A-01A4-EB32-EC16-0F83DD9379A2}"/>
+                <a16:creationId xmlns:a16="http://schemas.microsoft.com/office/drawing/2014/main" xmlns="" id="{A3AF5B7A-01A4-EB32-EC16-0F83DD9379A2}"/>
               </a:ext>
             </a:extLst>
           </p:cNvPr>
@@ -24871,14 +25035,14 @@
             <p:ph sz="quarter" idx="1"/>
             <p:extLst>
               <p:ext uri="{D42A27DB-BD31-4B8C-83A1-F6EECF244321}">
-                <p14:modId xmlns:p14="http://schemas.microsoft.com/office/powerpoint/2010/main" val="3117830617"/>
+                <p14:modId xmlns:p14="http://schemas.microsoft.com/office/powerpoint/2010/main" val="888502255"/>
               </p:ext>
             </p:extLst>
           </p:nvPr>
         </p:nvGraphicFramePr>
         <p:xfrm>
           <a:off x="179512" y="1506516"/>
-          <a:ext cx="8784976" cy="5122177"/>
+          <a:ext cx="8784976" cy="5304750"/>
         </p:xfrm>
         <a:graphic>
           <a:graphicData uri="http://schemas.openxmlformats.org/drawingml/2006/table">
@@ -24890,14 +25054,14 @@
                 <a:gridCol w="1630689">
                   <a:extLst>
                     <a:ext uri="{9D8B030D-6E8A-4147-A177-3AD203B41FA5}">
-                      <a16:colId xmlns:a16="http://schemas.microsoft.com/office/drawing/2014/main" val="502122950"/>
+                      <a16:colId xmlns:a16="http://schemas.microsoft.com/office/drawing/2014/main" xmlns="" val="502122950"/>
                     </a:ext>
                   </a:extLst>
                 </a:gridCol>
                 <a:gridCol w="7154287">
                   <a:extLst>
                     <a:ext uri="{9D8B030D-6E8A-4147-A177-3AD203B41FA5}">
-                      <a16:colId xmlns:a16="http://schemas.microsoft.com/office/drawing/2014/main" val="3034078935"/>
+                      <a16:colId xmlns:a16="http://schemas.microsoft.com/office/drawing/2014/main" xmlns="" val="3034078935"/>
                     </a:ext>
                   </a:extLst>
                 </a:gridCol>
@@ -24963,7 +25127,7 @@
                 </a:tc>
                 <a:extLst>
                   <a:ext uri="{0D108BD9-81ED-4DB2-BD59-A6C34878D82A}">
-                    <a16:rowId xmlns:a16="http://schemas.microsoft.com/office/drawing/2014/main" val="345004272"/>
+                    <a16:rowId xmlns:a16="http://schemas.microsoft.com/office/drawing/2014/main" xmlns="" val="345004272"/>
                   </a:ext>
                 </a:extLst>
               </a:tr>
@@ -25126,7 +25290,7 @@
                 </a:tc>
                 <a:extLst>
                   <a:ext uri="{0D108BD9-81ED-4DB2-BD59-A6C34878D82A}">
-                    <a16:rowId xmlns:a16="http://schemas.microsoft.com/office/drawing/2014/main" val="3213201141"/>
+                    <a16:rowId xmlns:a16="http://schemas.microsoft.com/office/drawing/2014/main" xmlns="" val="3213201141"/>
                   </a:ext>
                 </a:extLst>
               </a:tr>
@@ -25244,40 +25408,240 @@
                         <a:rPr lang="en-US" sz="1600" kern="100" dirty="0">
                           <a:effectLst/>
                         </a:rPr>
-                        <a:t>=800).aggregate(Sum('qty'))</a:t>
+                        <a:t>=800).aggregate(Sum('</a:t>
                       </a:r>
-                      <a:endParaRPr lang="zh-TW" sz="1800" kern="100" dirty="0">
-                        <a:effectLst/>
-                      </a:endParaRPr>
+                      <a:r>
+                        <a:rPr lang="en-US" sz="1600" kern="100" dirty="0" err="1">
+                          <a:effectLst/>
+                        </a:rPr>
+                        <a:t>qty</a:t>
+                      </a:r>
+                      <a:r>
+                        <a:rPr lang="en-US" sz="1600" kern="100" dirty="0" smtClean="0">
+                          <a:effectLst/>
+                        </a:rPr>
+                        <a:t>'))</a:t>
+                      </a:r>
                     </a:p>
                     <a:p>
-                      <a:pPr algn="just">
+                      <a:pPr marL="0" marR="0" lvl="0" indent="0" algn="just" defTabSz="914400" rtl="0" eaLnBrk="1" fontAlgn="auto" latinLnBrk="0" hangingPunct="1">
+                        <a:lnSpc>
+                          <a:spcPct val="100000"/>
+                        </a:lnSpc>
                         <a:spcBef>
                           <a:spcPts val="600"/>
                         </a:spcBef>
                         <a:spcAft>
                           <a:spcPts val="600"/>
                         </a:spcAft>
+                        <a:buClrTx/>
+                        <a:buSzTx/>
+                        <a:buFontTx/>
+                        <a:buNone/>
+                        <a:tabLst/>
+                        <a:defRPr/>
                       </a:pPr>
+                      <a:r>
+                        <a:rPr kumimoji="0" lang="en-US" altLang="zh-TW" sz="1600" b="0" i="0" u="none" strike="noStrike" kern="100" cap="none" spc="0" normalizeH="0" baseline="0" noProof="0" dirty="0" smtClean="0">
+                          <a:ln>
+                            <a:noFill/>
+                          </a:ln>
+                          <a:solidFill>
+                            <a:prstClr val="black"/>
+                          </a:solidFill>
+                          <a:effectLst/>
+                          <a:uLnTx/>
+                          <a:uFillTx/>
+                          <a:latin typeface="+mn-lt"/>
+                          <a:ea typeface="+mn-ea"/>
+                          <a:cs typeface="+mn-cs"/>
+                        </a:rPr>
+                        <a:t>&gt;&gt;&gt; </a:t>
+                      </a:r>
+                      <a:r>
+                        <a:rPr kumimoji="0" lang="en-US" altLang="zh-TW" sz="1600" b="0" i="0" u="none" strike="noStrike" kern="100" cap="none" spc="0" normalizeH="0" baseline="0" noProof="0" dirty="0" err="1" smtClean="0">
+                          <a:ln>
+                            <a:noFill/>
+                          </a:ln>
+                          <a:solidFill>
+                            <a:prstClr val="black"/>
+                          </a:solidFill>
+                          <a:effectLst/>
+                          <a:uLnTx/>
+                          <a:uFillTx/>
+                          <a:latin typeface="+mn-lt"/>
+                          <a:ea typeface="+mn-ea"/>
+                          <a:cs typeface="+mn-cs"/>
+                        </a:rPr>
+                        <a:t>Product.objects.filter</a:t>
+                      </a:r>
+                      <a:r>
+                        <a:rPr kumimoji="0" lang="en-US" altLang="zh-TW" sz="1600" b="0" i="0" u="none" strike="noStrike" kern="100" cap="none" spc="0" normalizeH="0" baseline="0" noProof="0" dirty="0" smtClean="0">
+                          <a:ln>
+                            <a:noFill/>
+                          </a:ln>
+                          <a:solidFill>
+                            <a:prstClr val="black"/>
+                          </a:solidFill>
+                          <a:effectLst/>
+                          <a:uLnTx/>
+                          <a:uFillTx/>
+                          <a:latin typeface="+mn-lt"/>
+                          <a:ea typeface="+mn-ea"/>
+                          <a:cs typeface="+mn-cs"/>
+                        </a:rPr>
+                        <a:t>(price__</a:t>
+                      </a:r>
+                      <a:r>
+                        <a:rPr kumimoji="0" lang="en-US" altLang="zh-TW" sz="1600" b="0" i="0" u="none" strike="noStrike" kern="100" cap="none" spc="0" normalizeH="0" baseline="0" noProof="0" dirty="0" err="1" smtClean="0">
+                          <a:ln>
+                            <a:noFill/>
+                          </a:ln>
+                          <a:solidFill>
+                            <a:prstClr val="black"/>
+                          </a:solidFill>
+                          <a:effectLst/>
+                          <a:uLnTx/>
+                          <a:uFillTx/>
+                          <a:latin typeface="+mn-lt"/>
+                          <a:ea typeface="+mn-ea"/>
+                          <a:cs typeface="+mn-cs"/>
+                        </a:rPr>
+                        <a:t>lte</a:t>
+                      </a:r>
+                      <a:r>
+                        <a:rPr kumimoji="0" lang="en-US" altLang="zh-TW" sz="1600" b="0" i="0" u="none" strike="noStrike" kern="100" cap="none" spc="0" normalizeH="0" baseline="0" noProof="0" dirty="0" smtClean="0">
+                          <a:ln>
+                            <a:noFill/>
+                          </a:ln>
+                          <a:solidFill>
+                            <a:prstClr val="black"/>
+                          </a:solidFill>
+                          <a:effectLst/>
+                          <a:uLnTx/>
+                          <a:uFillTx/>
+                          <a:latin typeface="+mn-lt"/>
+                          <a:ea typeface="+mn-ea"/>
+                          <a:cs typeface="+mn-cs"/>
+                        </a:rPr>
+                        <a:t>=800).aggregate(Sum(‘</a:t>
+                      </a:r>
+                      <a:r>
+                        <a:rPr kumimoji="0" lang="en-US" altLang="zh-TW" sz="1600" b="0" i="0" u="none" strike="noStrike" kern="100" cap="none" spc="0" normalizeH="0" baseline="0" noProof="0" dirty="0" smtClean="0">
+                          <a:ln>
+                            <a:noFill/>
+                          </a:ln>
+                          <a:solidFill>
+                            <a:srgbClr val="FF0000"/>
+                          </a:solidFill>
+                          <a:effectLst/>
+                          <a:uLnTx/>
+                          <a:uFillTx/>
+                          <a:latin typeface="+mn-lt"/>
+                          <a:ea typeface="+mn-ea"/>
+                          <a:cs typeface="+mn-cs"/>
+                        </a:rPr>
+                        <a:t>price</a:t>
+                      </a:r>
+                      <a:r>
+                        <a:rPr kumimoji="0" lang="en-US" altLang="zh-TW" sz="1600" b="0" i="0" u="none" strike="noStrike" kern="100" cap="none" spc="0" normalizeH="0" baseline="0" noProof="0" dirty="0" smtClean="0">
+                          <a:ln>
+                            <a:noFill/>
+                          </a:ln>
+                          <a:solidFill>
+                            <a:prstClr val="black"/>
+                          </a:solidFill>
+                          <a:effectLst/>
+                          <a:uLnTx/>
+                          <a:uFillTx/>
+                          <a:latin typeface="+mn-lt"/>
+                          <a:ea typeface="+mn-ea"/>
+                          <a:cs typeface="+mn-cs"/>
+                        </a:rPr>
+                        <a:t>'))</a:t>
+                      </a:r>
+                      <a:endParaRPr kumimoji="0" lang="zh-TW" altLang="en-US" sz="1800" b="0" i="0" u="none" strike="noStrike" kern="100" cap="none" spc="0" normalizeH="0" baseline="0" noProof="0" dirty="0" smtClean="0">
+                        <a:ln>
+                          <a:noFill/>
+                        </a:ln>
+                        <a:solidFill>
+                          <a:prstClr val="black"/>
+                        </a:solidFill>
+                        <a:effectLst/>
+                        <a:uLnTx/>
+                        <a:uFillTx/>
+                        <a:latin typeface="+mn-lt"/>
+                        <a:ea typeface="+mn-ea"/>
+                        <a:cs typeface="+mn-cs"/>
+                      </a:endParaRPr>
+                    </a:p>
+                    <a:p>
+                      <a:pPr marL="0" marR="0" indent="0" algn="just" defTabSz="914400" rtl="0" eaLnBrk="1" fontAlgn="auto" latinLnBrk="0" hangingPunct="1">
+                        <a:lnSpc>
+                          <a:spcPct val="100000"/>
+                        </a:lnSpc>
+                        <a:spcBef>
+                          <a:spcPts val="600"/>
+                        </a:spcBef>
+                        <a:spcAft>
+                          <a:spcPts val="600"/>
+                        </a:spcAft>
+                        <a:buClrTx/>
+                        <a:buSzTx/>
+                        <a:buFontTx/>
+                        <a:buNone/>
+                        <a:tabLst/>
+                        <a:defRPr/>
+                      </a:pPr>
+                      <a:r>
+                        <a:rPr lang="en-US" sz="1600" kern="100" dirty="0" smtClean="0">
+                          <a:effectLst/>
+                        </a:rPr>
+                        <a:t>{</a:t>
+                      </a:r>
                       <a:r>
                         <a:rPr lang="en-US" sz="1600" kern="100" dirty="0">
                           <a:effectLst/>
                         </a:rPr>
-                        <a:t>{'</a:t>
+                        <a:t>'</a:t>
                       </a:r>
                       <a:r>
                         <a:rPr lang="en-US" sz="1600" kern="100" dirty="0" err="1">
                           <a:effectLst/>
                         </a:rPr>
-                        <a:t>qty__sum</a:t>
+                        <a:t>qty</a:t>
                       </a:r>
                       <a:r>
                         <a:rPr lang="en-US" sz="1600" kern="100" dirty="0">
                           <a:effectLst/>
                         </a:rPr>
-                        <a:t>': 3}</a:t>
+                        <a:t>__sum': 3</a:t>
                       </a:r>
-                      <a:endParaRPr lang="zh-TW" sz="1800" kern="100" dirty="0">
+                      <a:r>
+                        <a:rPr lang="en-US" sz="1600" kern="100" dirty="0" smtClean="0">
+                          <a:effectLst/>
+                        </a:rPr>
+                        <a:t>} </a:t>
+                      </a:r>
+                      <a:r>
+                        <a:rPr lang="en-US" altLang="zh-TW" sz="1600" kern="100" dirty="0" smtClean="0">
+                          <a:effectLst/>
+                        </a:rPr>
+                        <a:t>{‘</a:t>
+                      </a:r>
+                      <a:r>
+                        <a:rPr lang="en-US" altLang="zh-TW" sz="1600" kern="100" dirty="0" err="1" smtClean="0">
+                          <a:effectLst/>
+                        </a:rPr>
+                        <a:t>price__sum</a:t>
+                      </a:r>
+                      <a:r>
+                        <a:rPr lang="en-US" altLang="zh-TW" sz="1600" kern="100" dirty="0" smtClean="0">
+                          <a:effectLst/>
+                        </a:rPr>
+                        <a:t>': 1400}</a:t>
+                      </a:r>
+                      <a:endParaRPr lang="zh-TW" altLang="zh-TW" sz="1800" kern="100" dirty="0" smtClean="0">
                         <a:effectLst/>
                         <a:latin typeface="Calibri" panose="020F0502020204030204" pitchFamily="34" charset="0"/>
                         <a:ea typeface="新細明體" panose="02020500000000000000" pitchFamily="18" charset="-120"/>
@@ -25289,7 +25653,7 @@
                 </a:tc>
                 <a:extLst>
                   <a:ext uri="{0D108BD9-81ED-4DB2-BD59-A6C34878D82A}">
-                    <a16:rowId xmlns:a16="http://schemas.microsoft.com/office/drawing/2014/main" val="2468487237"/>
+                    <a16:rowId xmlns:a16="http://schemas.microsoft.com/office/drawing/2014/main" xmlns="" val="2468487237"/>
                   </a:ext>
                 </a:extLst>
               </a:tr>
@@ -25433,7 +25797,7 @@
                 </a:tc>
                 <a:extLst>
                   <a:ext uri="{0D108BD9-81ED-4DB2-BD59-A6C34878D82A}">
-                    <a16:rowId xmlns:a16="http://schemas.microsoft.com/office/drawing/2014/main" val="1202249030"/>
+                    <a16:rowId xmlns:a16="http://schemas.microsoft.com/office/drawing/2014/main" xmlns="" val="1202249030"/>
                   </a:ext>
                 </a:extLst>
               </a:tr>
@@ -25589,7 +25953,7 @@
                 </a:tc>
                 <a:extLst>
                   <a:ext uri="{0D108BD9-81ED-4DB2-BD59-A6C34878D82A}">
-                    <a16:rowId xmlns:a16="http://schemas.microsoft.com/office/drawing/2014/main" val="1852630895"/>
+                    <a16:rowId xmlns:a16="http://schemas.microsoft.com/office/drawing/2014/main" xmlns="" val="1852630895"/>
                   </a:ext>
                 </a:extLst>
               </a:tr>
@@ -25709,7 +26073,7 @@
                 </a:tc>
                 <a:extLst>
                   <a:ext uri="{0D108BD9-81ED-4DB2-BD59-A6C34878D82A}">
-                    <a16:rowId xmlns:a16="http://schemas.microsoft.com/office/drawing/2014/main" val="2322648987"/>
+                    <a16:rowId xmlns:a16="http://schemas.microsoft.com/office/drawing/2014/main" xmlns="" val="2322648987"/>
                   </a:ext>
                 </a:extLst>
               </a:tr>
@@ -25727,6 +26091,13 @@
   <p:clrMapOvr>
     <a:masterClrMapping/>
   </p:clrMapOvr>
+  <p:timing>
+    <p:tnLst>
+      <p:par>
+        <p:cTn id="1" dur="indefinite" restart="never" nodeType="tmRoot"/>
+      </p:par>
+    </p:tnLst>
+  </p:timing>
 </p:sld>
 </file>
 
@@ -25738,7 +26109,7 @@
         <p:cNvPr id="1" name="">
           <a:extLst>
             <a:ext uri="{FF2B5EF4-FFF2-40B4-BE49-F238E27FC236}">
-              <a16:creationId xmlns:a16="http://schemas.microsoft.com/office/drawing/2014/main" id="{E50B2F9F-21E4-ECDD-16E7-F83AC786EE92}"/>
+              <a16:creationId xmlns:a16="http://schemas.microsoft.com/office/drawing/2014/main" xmlns="" id="{E50B2F9F-21E4-ECDD-16E7-F83AC786EE92}"/>
             </a:ext>
           </a:extLst>
         </p:cNvPr>
@@ -25758,7 +26129,7 @@
           <p:cNvPr id="2" name="標題 1">
             <a:extLst>
               <a:ext uri="{FF2B5EF4-FFF2-40B4-BE49-F238E27FC236}">
-                <a16:creationId xmlns:a16="http://schemas.microsoft.com/office/drawing/2014/main" id="{A61093D1-6293-560C-5990-9456EDA7E4EE}"/>
+                <a16:creationId xmlns:a16="http://schemas.microsoft.com/office/drawing/2014/main" xmlns="" id="{A61093D1-6293-560C-5990-9456EDA7E4EE}"/>
               </a:ext>
             </a:extLst>
           </p:cNvPr>
@@ -25786,7 +26157,7 @@
           <p:cNvPr id="3" name="投影片編號版面配置區 2">
             <a:extLst>
               <a:ext uri="{FF2B5EF4-FFF2-40B4-BE49-F238E27FC236}">
-                <a16:creationId xmlns:a16="http://schemas.microsoft.com/office/drawing/2014/main" id="{D30FF552-F61C-C799-7E70-07A14433740C}"/>
+                <a16:creationId xmlns:a16="http://schemas.microsoft.com/office/drawing/2014/main" xmlns="" id="{D30FF552-F61C-C799-7E70-07A14433740C}"/>
               </a:ext>
             </a:extLst>
           </p:cNvPr>
@@ -25816,7 +26187,7 @@
           <p:cNvPr id="8" name="內容版面配置區 7">
             <a:extLst>
               <a:ext uri="{FF2B5EF4-FFF2-40B4-BE49-F238E27FC236}">
-                <a16:creationId xmlns:a16="http://schemas.microsoft.com/office/drawing/2014/main" id="{2D670FFF-ABB2-494E-54C6-8431D2F7BA48}"/>
+                <a16:creationId xmlns:a16="http://schemas.microsoft.com/office/drawing/2014/main" xmlns="" id="{2D670FFF-ABB2-494E-54C6-8431D2F7BA48}"/>
               </a:ext>
             </a:extLst>
           </p:cNvPr>
@@ -25846,14 +26217,14 @@
                 <a:gridCol w="1630689">
                   <a:extLst>
                     <a:ext uri="{9D8B030D-6E8A-4147-A177-3AD203B41FA5}">
-                      <a16:colId xmlns:a16="http://schemas.microsoft.com/office/drawing/2014/main" val="502122950"/>
+                      <a16:colId xmlns:a16="http://schemas.microsoft.com/office/drawing/2014/main" xmlns="" val="502122950"/>
                     </a:ext>
                   </a:extLst>
                 </a:gridCol>
                 <a:gridCol w="7154287">
                   <a:extLst>
                     <a:ext uri="{9D8B030D-6E8A-4147-A177-3AD203B41FA5}">
-                      <a16:colId xmlns:a16="http://schemas.microsoft.com/office/drawing/2014/main" val="3034078935"/>
+                      <a16:colId xmlns:a16="http://schemas.microsoft.com/office/drawing/2014/main" xmlns="" val="3034078935"/>
                     </a:ext>
                   </a:extLst>
                 </a:gridCol>
@@ -25919,7 +26290,7 @@
                 </a:tc>
                 <a:extLst>
                   <a:ext uri="{0D108BD9-81ED-4DB2-BD59-A6C34878D82A}">
-                    <a16:rowId xmlns:a16="http://schemas.microsoft.com/office/drawing/2014/main" val="345004272"/>
+                    <a16:rowId xmlns:a16="http://schemas.microsoft.com/office/drawing/2014/main" xmlns="" val="345004272"/>
                   </a:ext>
                 </a:extLst>
               </a:tr>
@@ -26034,7 +26405,7 @@
                 </a:tc>
                 <a:extLst>
                   <a:ext uri="{0D108BD9-81ED-4DB2-BD59-A6C34878D82A}">
-                    <a16:rowId xmlns:a16="http://schemas.microsoft.com/office/drawing/2014/main" val="3213201141"/>
+                    <a16:rowId xmlns:a16="http://schemas.microsoft.com/office/drawing/2014/main" xmlns="" val="3213201141"/>
                   </a:ext>
                 </a:extLst>
               </a:tr>
@@ -26149,7 +26520,7 @@
                 </a:tc>
                 <a:extLst>
                   <a:ext uri="{0D108BD9-81ED-4DB2-BD59-A6C34878D82A}">
-                    <a16:rowId xmlns:a16="http://schemas.microsoft.com/office/drawing/2014/main" val="2468487237"/>
+                    <a16:rowId xmlns:a16="http://schemas.microsoft.com/office/drawing/2014/main" xmlns="" val="2468487237"/>
                   </a:ext>
                 </a:extLst>
               </a:tr>
@@ -26251,7 +26622,7 @@
                 </a:tc>
                 <a:extLst>
                   <a:ext uri="{0D108BD9-81ED-4DB2-BD59-A6C34878D82A}">
-                    <a16:rowId xmlns:a16="http://schemas.microsoft.com/office/drawing/2014/main" val="1202249030"/>
+                    <a16:rowId xmlns:a16="http://schemas.microsoft.com/office/drawing/2014/main" xmlns="" val="1202249030"/>
                   </a:ext>
                 </a:extLst>
               </a:tr>
@@ -26377,7 +26748,7 @@
                 </a:tc>
                 <a:extLst>
                   <a:ext uri="{0D108BD9-81ED-4DB2-BD59-A6C34878D82A}">
-                    <a16:rowId xmlns:a16="http://schemas.microsoft.com/office/drawing/2014/main" val="1852630895"/>
+                    <a16:rowId xmlns:a16="http://schemas.microsoft.com/office/drawing/2014/main" xmlns="" val="1852630895"/>
                   </a:ext>
                 </a:extLst>
               </a:tr>
@@ -26467,7 +26838,7 @@
                 </a:tc>
                 <a:extLst>
                   <a:ext uri="{0D108BD9-81ED-4DB2-BD59-A6C34878D82A}">
-                    <a16:rowId xmlns:a16="http://schemas.microsoft.com/office/drawing/2014/main" val="2322648987"/>
+                    <a16:rowId xmlns:a16="http://schemas.microsoft.com/office/drawing/2014/main" xmlns="" val="2322648987"/>
                   </a:ext>
                 </a:extLst>
               </a:tr>
@@ -26485,6 +26856,13 @@
   <p:clrMapOvr>
     <a:masterClrMapping/>
   </p:clrMapOvr>
+  <p:timing>
+    <p:tnLst>
+      <p:par>
+        <p:cTn id="1" dur="indefinite" restart="never" nodeType="tmRoot"/>
+      </p:par>
+    </p:tnLst>
+  </p:timing>
 </p:sld>
 </file>
 
@@ -26510,7 +26888,7 @@
           <p:cNvPr id="2" name="標題 1">
             <a:extLst>
               <a:ext uri="{FF2B5EF4-FFF2-40B4-BE49-F238E27FC236}">
-                <a16:creationId xmlns:a16="http://schemas.microsoft.com/office/drawing/2014/main" id="{0019F228-F518-2A7C-3A36-17155E7AF0FF}"/>
+                <a16:creationId xmlns:a16="http://schemas.microsoft.com/office/drawing/2014/main" xmlns="" id="{0019F228-F518-2A7C-3A36-17155E7AF0FF}"/>
               </a:ext>
             </a:extLst>
           </p:cNvPr>
@@ -26541,6 +26919,10 @@
               <a:rPr lang="zh-TW" altLang="en-US" dirty="0"/>
               <a:t>回退功能</a:t>
             </a:r>
+            <a:r>
+              <a:rPr lang="en-US" altLang="zh-TW" dirty="0"/>
+              <a:t/>
+            </a:r>
             <a:br>
               <a:rPr lang="en-US" altLang="zh-TW" dirty="0"/>
             </a:br>
@@ -26637,7 +27019,7 @@
           <p:cNvPr id="3" name="投影片編號版面配置區 2">
             <a:extLst>
               <a:ext uri="{FF2B5EF4-FFF2-40B4-BE49-F238E27FC236}">
-                <a16:creationId xmlns:a16="http://schemas.microsoft.com/office/drawing/2014/main" id="{7D1B4C5C-6537-E0C3-9E88-B36710B1A60E}"/>
+                <a16:creationId xmlns:a16="http://schemas.microsoft.com/office/drawing/2014/main" xmlns="" id="{7D1B4C5C-6537-E0C3-9E88-B36710B1A60E}"/>
               </a:ext>
             </a:extLst>
           </p:cNvPr>
@@ -26667,7 +27049,7 @@
           <p:cNvPr id="5" name="文字方塊 4">
             <a:extLst>
               <a:ext uri="{FF2B5EF4-FFF2-40B4-BE49-F238E27FC236}">
-                <a16:creationId xmlns:a16="http://schemas.microsoft.com/office/drawing/2014/main" id="{57C7A10B-86D9-B866-79D2-AC62CAC94DD6}"/>
+                <a16:creationId xmlns:a16="http://schemas.microsoft.com/office/drawing/2014/main" xmlns="" id="{57C7A10B-86D9-B866-79D2-AC62CAC94DD6}"/>
               </a:ext>
             </a:extLst>
           </p:cNvPr>
@@ -26856,6 +27238,13 @@
   <p:clrMapOvr>
     <a:masterClrMapping/>
   </p:clrMapOvr>
+  <p:timing>
+    <p:tnLst>
+      <p:par>
+        <p:cTn id="1" dur="indefinite" restart="never" nodeType="tmRoot"/>
+      </p:par>
+    </p:tnLst>
+  </p:timing>
 </p:sld>
 </file>
 
@@ -26867,7 +27256,7 @@
         <p:cNvPr id="1" name="">
           <a:extLst>
             <a:ext uri="{FF2B5EF4-FFF2-40B4-BE49-F238E27FC236}">
-              <a16:creationId xmlns:a16="http://schemas.microsoft.com/office/drawing/2014/main" id="{7F967E2A-17C1-BCDE-AEEA-78FE1C520EF1}"/>
+              <a16:creationId xmlns:a16="http://schemas.microsoft.com/office/drawing/2014/main" xmlns="" id="{7F967E2A-17C1-BCDE-AEEA-78FE1C520EF1}"/>
             </a:ext>
           </a:extLst>
         </p:cNvPr>
@@ -26887,7 +27276,7 @@
           <p:cNvPr id="2" name="標題 1">
             <a:extLst>
               <a:ext uri="{FF2B5EF4-FFF2-40B4-BE49-F238E27FC236}">
-                <a16:creationId xmlns:a16="http://schemas.microsoft.com/office/drawing/2014/main" id="{D4C56303-AF89-4A3E-0E8A-A0CCCA91676F}"/>
+                <a16:creationId xmlns:a16="http://schemas.microsoft.com/office/drawing/2014/main" xmlns="" id="{D4C56303-AF89-4A3E-0E8A-A0CCCA91676F}"/>
               </a:ext>
             </a:extLst>
           </p:cNvPr>
@@ -26912,6 +27301,10 @@
             <a:r>
               <a:rPr lang="zh-TW" altLang="en-US" dirty="0"/>
               <a:t>回退功能</a:t>
+            </a:r>
+            <a:r>
+              <a:rPr lang="en-US" altLang="zh-TW" dirty="0"/>
+              <a:t/>
             </a:r>
             <a:br>
               <a:rPr lang="en-US" altLang="zh-TW" dirty="0"/>
@@ -26985,7 +27378,7 @@
           <p:cNvPr id="3" name="投影片編號版面配置區 2">
             <a:extLst>
               <a:ext uri="{FF2B5EF4-FFF2-40B4-BE49-F238E27FC236}">
-                <a16:creationId xmlns:a16="http://schemas.microsoft.com/office/drawing/2014/main" id="{B9818121-AB04-2D1C-1EC7-C3010EA71BD3}"/>
+                <a16:creationId xmlns:a16="http://schemas.microsoft.com/office/drawing/2014/main" xmlns="" id="{B9818121-AB04-2D1C-1EC7-C3010EA71BD3}"/>
               </a:ext>
             </a:extLst>
           </p:cNvPr>
@@ -27020,7 +27413,7 @@
           <p:cNvPr id="6" name="圖片 5">
             <a:extLst>
               <a:ext uri="{FF2B5EF4-FFF2-40B4-BE49-F238E27FC236}">
-                <a16:creationId xmlns:a16="http://schemas.microsoft.com/office/drawing/2014/main" id="{29E8A1CC-5793-9E73-A689-F1A35BDF53B8}"/>
+                <a16:creationId xmlns:a16="http://schemas.microsoft.com/office/drawing/2014/main" xmlns="" id="{29E8A1CC-5793-9E73-A689-F1A35BDF53B8}"/>
               </a:ext>
             </a:extLst>
           </p:cNvPr>
@@ -27056,7 +27449,7 @@
           <p:cNvPr id="8" name="圖片 7">
             <a:extLst>
               <a:ext uri="{FF2B5EF4-FFF2-40B4-BE49-F238E27FC236}">
-                <a16:creationId xmlns:a16="http://schemas.microsoft.com/office/drawing/2014/main" id="{E1E7C61B-59AF-7624-50BD-228BCA7F5EB8}"/>
+                <a16:creationId xmlns:a16="http://schemas.microsoft.com/office/drawing/2014/main" xmlns="" id="{E1E7C61B-59AF-7624-50BD-228BCA7F5EB8}"/>
               </a:ext>
             </a:extLst>
           </p:cNvPr>
@@ -27092,7 +27485,7 @@
           <p:cNvPr id="10" name="圖片 9">
             <a:extLst>
               <a:ext uri="{FF2B5EF4-FFF2-40B4-BE49-F238E27FC236}">
-                <a16:creationId xmlns:a16="http://schemas.microsoft.com/office/drawing/2014/main" id="{72832ABD-0E31-08F6-4BF0-E90A63C8EFAC}"/>
+                <a16:creationId xmlns:a16="http://schemas.microsoft.com/office/drawing/2014/main" xmlns="" id="{72832ABD-0E31-08F6-4BF0-E90A63C8EFAC}"/>
               </a:ext>
             </a:extLst>
           </p:cNvPr>
@@ -27128,7 +27521,7 @@
           <p:cNvPr id="12" name="圖片 11">
             <a:extLst>
               <a:ext uri="{FF2B5EF4-FFF2-40B4-BE49-F238E27FC236}">
-                <a16:creationId xmlns:a16="http://schemas.microsoft.com/office/drawing/2014/main" id="{A656D17F-3B7E-3C57-85A3-CC8562B1086E}"/>
+                <a16:creationId xmlns:a16="http://schemas.microsoft.com/office/drawing/2014/main" xmlns="" id="{A656D17F-3B7E-3C57-85A3-CC8562B1086E}"/>
               </a:ext>
             </a:extLst>
           </p:cNvPr>
@@ -27169,6 +27562,13 @@
   <p:clrMapOvr>
     <a:masterClrMapping/>
   </p:clrMapOvr>
+  <p:timing>
+    <p:tnLst>
+      <p:par>
+        <p:cTn id="1" dur="indefinite" restart="never" nodeType="tmRoot"/>
+      </p:par>
+    </p:tnLst>
+  </p:timing>
 </p:sld>
 </file>
 
@@ -27356,6 +27756,13 @@
   <p:clrMapOvr>
     <a:masterClrMapping/>
   </p:clrMapOvr>
+  <p:timing>
+    <p:tnLst>
+      <p:par>
+        <p:cTn id="1" dur="indefinite" restart="never" nodeType="tmRoot"/>
+      </p:par>
+    </p:tnLst>
+  </p:timing>
 </p:sld>
 </file>
 
@@ -27367,7 +27774,7 @@
         <p:cNvPr id="1" name="">
           <a:extLst>
             <a:ext uri="{FF2B5EF4-FFF2-40B4-BE49-F238E27FC236}">
-              <a16:creationId xmlns:a16="http://schemas.microsoft.com/office/drawing/2014/main" id="{21F9B376-27D6-2668-4314-8B7460963242}"/>
+              <a16:creationId xmlns:a16="http://schemas.microsoft.com/office/drawing/2014/main" xmlns="" id="{21F9B376-27D6-2668-4314-8B7460963242}"/>
             </a:ext>
           </a:extLst>
         </p:cNvPr>
@@ -27387,7 +27794,7 @@
           <p:cNvPr id="2" name="標題 1">
             <a:extLst>
               <a:ext uri="{FF2B5EF4-FFF2-40B4-BE49-F238E27FC236}">
-                <a16:creationId xmlns:a16="http://schemas.microsoft.com/office/drawing/2014/main" id="{D525D69A-665A-DBA4-0295-4981394CC49D}"/>
+                <a16:creationId xmlns:a16="http://schemas.microsoft.com/office/drawing/2014/main" xmlns="" id="{D525D69A-665A-DBA4-0295-4981394CC49D}"/>
               </a:ext>
             </a:extLst>
           </p:cNvPr>
@@ -27428,7 +27835,7 @@
           <p:cNvPr id="3" name="投影片編號版面配置區 2">
             <a:extLst>
               <a:ext uri="{FF2B5EF4-FFF2-40B4-BE49-F238E27FC236}">
-                <a16:creationId xmlns:a16="http://schemas.microsoft.com/office/drawing/2014/main" id="{28CAB002-134A-4D86-585F-E36B7C082813}"/>
+                <a16:creationId xmlns:a16="http://schemas.microsoft.com/office/drawing/2014/main" xmlns="" id="{28CAB002-134A-4D86-585F-E36B7C082813}"/>
               </a:ext>
             </a:extLst>
           </p:cNvPr>
@@ -27458,7 +27865,7 @@
           <p:cNvPr id="4" name="內容版面配置區 3">
             <a:extLst>
               <a:ext uri="{FF2B5EF4-FFF2-40B4-BE49-F238E27FC236}">
-                <a16:creationId xmlns:a16="http://schemas.microsoft.com/office/drawing/2014/main" id="{996F2891-3E17-1DA7-E9CA-07695050FB14}"/>
+                <a16:creationId xmlns:a16="http://schemas.microsoft.com/office/drawing/2014/main" xmlns="" id="{996F2891-3E17-1DA7-E9CA-07695050FB14}"/>
               </a:ext>
             </a:extLst>
           </p:cNvPr>
@@ -27483,7 +27890,7 @@
           <p:cNvPr id="5" name="圖片 4">
             <a:extLst>
               <a:ext uri="{FF2B5EF4-FFF2-40B4-BE49-F238E27FC236}">
-                <a16:creationId xmlns:a16="http://schemas.microsoft.com/office/drawing/2014/main" id="{A14D3130-A81C-E641-C11C-13CCE3CA3674}"/>
+                <a16:creationId xmlns:a16="http://schemas.microsoft.com/office/drawing/2014/main" xmlns="" id="{A14D3130-A81C-E641-C11C-13CCE3CA3674}"/>
               </a:ext>
             </a:extLst>
           </p:cNvPr>
@@ -27517,7 +27924,7 @@
           <p:cNvPr id="8" name="箭號: 向右 7">
             <a:extLst>
               <a:ext uri="{FF2B5EF4-FFF2-40B4-BE49-F238E27FC236}">
-                <a16:creationId xmlns:a16="http://schemas.microsoft.com/office/drawing/2014/main" id="{9643DDDF-CD0A-2C4C-8338-D5C475891DDB}"/>
+                <a16:creationId xmlns:a16="http://schemas.microsoft.com/office/drawing/2014/main" xmlns="" id="{9643DDDF-CD0A-2C4C-8338-D5C475891DDB}"/>
               </a:ext>
             </a:extLst>
           </p:cNvPr>
@@ -27561,7 +27968,7 @@
           <p:cNvPr id="6" name="文字方塊 5">
             <a:extLst>
               <a:ext uri="{FF2B5EF4-FFF2-40B4-BE49-F238E27FC236}">
-                <a16:creationId xmlns:a16="http://schemas.microsoft.com/office/drawing/2014/main" id="{AA08BBD0-FA9F-90A3-CC22-8CDCD953376C}"/>
+                <a16:creationId xmlns:a16="http://schemas.microsoft.com/office/drawing/2014/main" xmlns="" id="{AA08BBD0-FA9F-90A3-CC22-8CDCD953376C}"/>
               </a:ext>
             </a:extLst>
           </p:cNvPr>
@@ -27597,7 +28004,7 @@
           <p:cNvPr id="7" name="文字方塊 6">
             <a:extLst>
               <a:ext uri="{FF2B5EF4-FFF2-40B4-BE49-F238E27FC236}">
-                <a16:creationId xmlns:a16="http://schemas.microsoft.com/office/drawing/2014/main" id="{A196EA9E-F686-A956-5CA7-EFC6C5894E52}"/>
+                <a16:creationId xmlns:a16="http://schemas.microsoft.com/office/drawing/2014/main" xmlns="" id="{A196EA9E-F686-A956-5CA7-EFC6C5894E52}"/>
               </a:ext>
             </a:extLst>
           </p:cNvPr>
@@ -27633,7 +28040,7 @@
           <p:cNvPr id="9" name="文字方塊 8">
             <a:extLst>
               <a:ext uri="{FF2B5EF4-FFF2-40B4-BE49-F238E27FC236}">
-                <a16:creationId xmlns:a16="http://schemas.microsoft.com/office/drawing/2014/main" id="{E29FC052-538A-CB08-6E21-68A1B5B3B293}"/>
+                <a16:creationId xmlns:a16="http://schemas.microsoft.com/office/drawing/2014/main" xmlns="" id="{E29FC052-538A-CB08-6E21-68A1B5B3B293}"/>
               </a:ext>
             </a:extLst>
           </p:cNvPr>
@@ -27682,6 +28089,13 @@
   <p:clrMapOvr>
     <a:masterClrMapping/>
   </p:clrMapOvr>
+  <p:timing>
+    <p:tnLst>
+      <p:par>
+        <p:cTn id="1" dur="indefinite" restart="never" nodeType="tmRoot"/>
+      </p:par>
+    </p:tnLst>
+  </p:timing>
 </p:sld>
 </file>
 
@@ -27731,6 +28145,10 @@
               <a:rPr lang="zh-TW" altLang="zh-TW" dirty="0"/>
               <a:t>網頁</a:t>
             </a:r>
+            <a:r>
+              <a:rPr lang="en-US" altLang="zh-TW" dirty="0"/>
+              <a:t/>
+            </a:r>
             <a:br>
               <a:rPr lang="en-US" altLang="zh-TW" dirty="0"/>
             </a:br>
@@ -28110,6 +28528,13 @@
   <p:clrMapOvr>
     <a:masterClrMapping/>
   </p:clrMapOvr>
+  <p:timing>
+    <p:tnLst>
+      <p:par>
+        <p:cTn id="1" dur="indefinite" restart="never" nodeType="tmRoot"/>
+      </p:par>
+    </p:tnLst>
+  </p:timing>
 </p:sld>
 </file>
 
@@ -28135,7 +28560,7 @@
           <p:cNvPr id="2" name="標題 1">
             <a:extLst>
               <a:ext uri="{FF2B5EF4-FFF2-40B4-BE49-F238E27FC236}">
-                <a16:creationId xmlns:a16="http://schemas.microsoft.com/office/drawing/2014/main" id="{4E702FAC-9F9C-1489-DDCE-F5C88705E756}"/>
+                <a16:creationId xmlns:a16="http://schemas.microsoft.com/office/drawing/2014/main" xmlns="" id="{4E702FAC-9F9C-1489-DDCE-F5C88705E756}"/>
               </a:ext>
             </a:extLst>
           </p:cNvPr>
@@ -28171,7 +28596,7 @@
           <p:cNvPr id="3" name="投影片編號版面配置區 2">
             <a:extLst>
               <a:ext uri="{FF2B5EF4-FFF2-40B4-BE49-F238E27FC236}">
-                <a16:creationId xmlns:a16="http://schemas.microsoft.com/office/drawing/2014/main" id="{211F0FD0-6C9B-8F80-95A5-DFAC25F152F5}"/>
+                <a16:creationId xmlns:a16="http://schemas.microsoft.com/office/drawing/2014/main" xmlns="" id="{211F0FD0-6C9B-8F80-95A5-DFAC25F152F5}"/>
               </a:ext>
             </a:extLst>
           </p:cNvPr>
@@ -28201,7 +28626,7 @@
           <p:cNvPr id="5" name="內容版面配置區 4" descr="一張含有 文字 的圖片&#10;&#10;自動產生的描述">
             <a:extLst>
               <a:ext uri="{FF2B5EF4-FFF2-40B4-BE49-F238E27FC236}">
-                <a16:creationId xmlns:a16="http://schemas.microsoft.com/office/drawing/2014/main" id="{D771478D-A979-272C-F341-A08EDA19928F}"/>
+                <a16:creationId xmlns:a16="http://schemas.microsoft.com/office/drawing/2014/main" xmlns="" id="{D771478D-A979-272C-F341-A08EDA19928F}"/>
               </a:ext>
             </a:extLst>
           </p:cNvPr>
@@ -28238,6 +28663,21 @@
   <p:clrMapOvr>
     <a:masterClrMapping/>
   </p:clrMapOvr>
+  <mc:AlternateContent xmlns:mc="http://schemas.openxmlformats.org/markup-compatibility/2006">
+    <mc:Choice xmlns:p14="http://schemas.microsoft.com/office/powerpoint/2010/main" Requires="p14">
+      <p:transition spd="slow" p14:dur="2000"/>
+    </mc:Choice>
+    <mc:Fallback>
+      <p:transition spd="slow"/>
+    </mc:Fallback>
+  </mc:AlternateContent>
+  <p:timing>
+    <p:tnLst>
+      <p:par>
+        <p:cTn id="1" dur="indefinite" restart="never" nodeType="tmRoot"/>
+      </p:par>
+    </p:tnLst>
+  </p:timing>
 </p:sld>
 </file>
 
@@ -28420,7 +28860,7 @@
         <p:cNvPr id="1" name="">
           <a:extLst>
             <a:ext uri="{FF2B5EF4-FFF2-40B4-BE49-F238E27FC236}">
-              <a16:creationId xmlns:a16="http://schemas.microsoft.com/office/drawing/2014/main" id="{7D21EB72-4468-DC00-3CDE-80BA01723321}"/>
+              <a16:creationId xmlns:a16="http://schemas.microsoft.com/office/drawing/2014/main" xmlns="" id="{7D21EB72-4468-DC00-3CDE-80BA01723321}"/>
             </a:ext>
           </a:extLst>
         </p:cNvPr>
@@ -28440,7 +28880,7 @@
           <p:cNvPr id="2" name="標題 1">
             <a:extLst>
               <a:ext uri="{FF2B5EF4-FFF2-40B4-BE49-F238E27FC236}">
-                <a16:creationId xmlns:a16="http://schemas.microsoft.com/office/drawing/2014/main" id="{1637EFD8-38EE-875F-56D5-CFB4F16E1AAE}"/>
+                <a16:creationId xmlns:a16="http://schemas.microsoft.com/office/drawing/2014/main" xmlns="" id="{1637EFD8-38EE-875F-56D5-CFB4F16E1AAE}"/>
               </a:ext>
             </a:extLst>
           </p:cNvPr>
@@ -28476,7 +28916,7 @@
           <p:cNvPr id="3" name="投影片編號版面配置區 2">
             <a:extLst>
               <a:ext uri="{FF2B5EF4-FFF2-40B4-BE49-F238E27FC236}">
-                <a16:creationId xmlns:a16="http://schemas.microsoft.com/office/drawing/2014/main" id="{987A1611-255D-C917-9B5A-0E70CADB0605}"/>
+                <a16:creationId xmlns:a16="http://schemas.microsoft.com/office/drawing/2014/main" xmlns="" id="{987A1611-255D-C917-9B5A-0E70CADB0605}"/>
               </a:ext>
             </a:extLst>
           </p:cNvPr>
@@ -28506,7 +28946,7 @@
           <p:cNvPr id="8" name="內容版面配置區 7">
             <a:extLst>
               <a:ext uri="{FF2B5EF4-FFF2-40B4-BE49-F238E27FC236}">
-                <a16:creationId xmlns:a16="http://schemas.microsoft.com/office/drawing/2014/main" id="{D357FBD9-78B5-5BAA-4D23-51765FDB8462}"/>
+                <a16:creationId xmlns:a16="http://schemas.microsoft.com/office/drawing/2014/main" xmlns="" id="{D357FBD9-78B5-5BAA-4D23-51765FDB8462}"/>
               </a:ext>
             </a:extLst>
           </p:cNvPr>
@@ -28711,6 +29151,10 @@
               <a:rPr lang="zh-TW" altLang="zh-TW" dirty="0"/>
               <a:t>資料夾與檔案</a:t>
             </a:r>
+            <a:r>
+              <a:rPr lang="en-US" altLang="zh-TW" dirty="0"/>
+              <a:t/>
+            </a:r>
             <a:br>
               <a:rPr lang="en-US" altLang="zh-TW" dirty="0"/>
             </a:br>
@@ -29051,7 +29495,7 @@
         <p:cNvPr id="1" name="">
           <a:extLst>
             <a:ext uri="{FF2B5EF4-FFF2-40B4-BE49-F238E27FC236}">
-              <a16:creationId xmlns:a16="http://schemas.microsoft.com/office/drawing/2014/main" id="{22777277-FBFC-EC03-77B1-DCCDB738F7CE}"/>
+              <a16:creationId xmlns:a16="http://schemas.microsoft.com/office/drawing/2014/main" xmlns="" id="{22777277-FBFC-EC03-77B1-DCCDB738F7CE}"/>
             </a:ext>
           </a:extLst>
         </p:cNvPr>
@@ -29071,7 +29515,7 @@
           <p:cNvPr id="2" name="標題 1">
             <a:extLst>
               <a:ext uri="{FF2B5EF4-FFF2-40B4-BE49-F238E27FC236}">
-                <a16:creationId xmlns:a16="http://schemas.microsoft.com/office/drawing/2014/main" id="{DDF18ABD-A14A-A9C1-7C2C-E7C9D81626F9}"/>
+                <a16:creationId xmlns:a16="http://schemas.microsoft.com/office/drawing/2014/main" xmlns="" id="{DDF18ABD-A14A-A9C1-7C2C-E7C9D81626F9}"/>
               </a:ext>
             </a:extLst>
           </p:cNvPr>
@@ -29108,7 +29552,7 @@
           <p:cNvPr id="3" name="投影片編號版面配置區 2">
             <a:extLst>
               <a:ext uri="{FF2B5EF4-FFF2-40B4-BE49-F238E27FC236}">
-                <a16:creationId xmlns:a16="http://schemas.microsoft.com/office/drawing/2014/main" id="{C05F5815-9005-91A8-CFE4-A1EAD0C6B19A}"/>
+                <a16:creationId xmlns:a16="http://schemas.microsoft.com/office/drawing/2014/main" xmlns="" id="{C05F5815-9005-91A8-CFE4-A1EAD0C6B19A}"/>
               </a:ext>
             </a:extLst>
           </p:cNvPr>
@@ -29138,7 +29582,7 @@
           <p:cNvPr id="8" name="圖片 7">
             <a:extLst>
               <a:ext uri="{FF2B5EF4-FFF2-40B4-BE49-F238E27FC236}">
-                <a16:creationId xmlns:a16="http://schemas.microsoft.com/office/drawing/2014/main" id="{6D5A9066-0DBB-166E-D11E-FAB6585056BD}"/>
+                <a16:creationId xmlns:a16="http://schemas.microsoft.com/office/drawing/2014/main" xmlns="" id="{6D5A9066-0DBB-166E-D11E-FAB6585056BD}"/>
               </a:ext>
             </a:extLst>
           </p:cNvPr>
@@ -29175,7 +29619,7 @@
           <p:cNvPr id="10" name="圖片 9">
             <a:extLst>
               <a:ext uri="{FF2B5EF4-FFF2-40B4-BE49-F238E27FC236}">
-                <a16:creationId xmlns:a16="http://schemas.microsoft.com/office/drawing/2014/main" id="{E76EFF81-41F5-77B8-C5AC-AA094FC22264}"/>
+                <a16:creationId xmlns:a16="http://schemas.microsoft.com/office/drawing/2014/main" xmlns="" id="{E76EFF81-41F5-77B8-C5AC-AA094FC22264}"/>
               </a:ext>
             </a:extLst>
           </p:cNvPr>
@@ -29832,7 +30276,7 @@
           <p:cNvPr id="7" name="圖片 6">
             <a:extLst>
               <a:ext uri="{FF2B5EF4-FFF2-40B4-BE49-F238E27FC236}">
-                <a16:creationId xmlns:a16="http://schemas.microsoft.com/office/drawing/2014/main" id="{AF0FD90D-449A-9915-3BAF-F5C6B9A27246}"/>
+                <a16:creationId xmlns:a16="http://schemas.microsoft.com/office/drawing/2014/main" xmlns="" id="{AF0FD90D-449A-9915-3BAF-F5C6B9A27246}"/>
               </a:ext>
             </a:extLst>
           </p:cNvPr>
@@ -30006,7 +30450,7 @@
           <p:cNvPr id="6" name="圖片 5" descr="一張含有 桌 的圖片&#10;&#10;自動產生的描述">
             <a:extLst>
               <a:ext uri="{FF2B5EF4-FFF2-40B4-BE49-F238E27FC236}">
-                <a16:creationId xmlns:a16="http://schemas.microsoft.com/office/drawing/2014/main" id="{4203D9AD-9EE5-9FCB-EC29-0455F9AF7952}"/>
+                <a16:creationId xmlns:a16="http://schemas.microsoft.com/office/drawing/2014/main" xmlns="" id="{4203D9AD-9EE5-9FCB-EC29-0455F9AF7952}"/>
               </a:ext>
             </a:extLst>
           </p:cNvPr>
@@ -30194,15 +30638,23 @@
             </a:pPr>
             <a:r>
               <a:rPr lang="en-US" altLang="zh-TW" dirty="0"/>
-              <a:t>    products = </a:t>
+              <a:t>    </a:t>
+            </a:r>
+            <a:r>
+              <a:rPr lang="en-US" altLang="zh-TW" dirty="0" smtClean="0"/>
+              <a:t>	products </a:t>
+            </a:r>
+            <a:r>
+              <a:rPr lang="en-US" altLang="zh-TW" dirty="0"/>
+              <a:t>= </a:t>
             </a:r>
             <a:r>
               <a:rPr lang="en-US" altLang="zh-TW" dirty="0" err="1"/>
               <a:t>Product.objects.all</a:t>
             </a:r>
             <a:r>
-              <a:rPr lang="en-US" altLang="zh-TW" dirty="0"/>
-              <a:t>()	</a:t>
+              <a:rPr lang="en-US" altLang="zh-TW" dirty="0" smtClean="0"/>
+              <a:t>()</a:t>
             </a:r>
           </a:p>
           <a:p>
@@ -30211,6 +30663,77 @@
             </a:pPr>
             <a:r>
               <a:rPr lang="en-US" altLang="zh-TW" dirty="0"/>
+              <a:t>	</a:t>
+            </a:r>
+            <a:r>
+              <a:rPr lang="en-US" altLang="zh-TW" dirty="0" err="1"/>
+              <a:t>products_ok</a:t>
+            </a:r>
+            <a:r>
+              <a:rPr lang="en-US" altLang="zh-TW" dirty="0"/>
+              <a:t> = </a:t>
+            </a:r>
+            <a:r>
+              <a:rPr lang="en-US" altLang="zh-TW" dirty="0" err="1"/>
+              <a:t>Product.objects.filter</a:t>
+            </a:r>
+            <a:r>
+              <a:rPr lang="en-US" altLang="zh-TW" dirty="0"/>
+              <a:t>(</a:t>
+            </a:r>
+            <a:r>
+              <a:rPr lang="en-US" altLang="zh-TW" dirty="0" err="1"/>
+              <a:t>qty</a:t>
+            </a:r>
+            <a:r>
+              <a:rPr lang="en-US" altLang="zh-TW" dirty="0"/>
+              <a:t>__</a:t>
+            </a:r>
+            <a:r>
+              <a:rPr lang="en-US" altLang="zh-TW" dirty="0" err="1"/>
+              <a:t>gt</a:t>
+            </a:r>
+            <a:r>
+              <a:rPr lang="en-US" altLang="zh-TW" dirty="0"/>
+              <a:t>=0) </a:t>
+            </a:r>
+            <a:endParaRPr lang="en-US" altLang="zh-TW" dirty="0" smtClean="0"/>
+          </a:p>
+          <a:p>
+            <a:pPr marL="274320" lvl="1" indent="0">
+              <a:buNone/>
+            </a:pPr>
+            <a:r>
+              <a:rPr lang="en-US" altLang="zh-TW" dirty="0"/>
+              <a:t>	</a:t>
+            </a:r>
+            <a:r>
+              <a:rPr lang="en-US" altLang="zh-TW" dirty="0" smtClean="0"/>
+              <a:t>#</a:t>
+            </a:r>
+            <a:r>
+              <a:rPr lang="zh-TW" altLang="en-US" dirty="0"/>
+              <a:t>庫存大於</a:t>
+            </a:r>
+            <a:r>
+              <a:rPr lang="en-US" altLang="zh-TW" dirty="0"/>
+              <a:t>0</a:t>
+            </a:r>
+            <a:r>
+              <a:rPr lang="zh-TW" altLang="en-US" dirty="0"/>
+              <a:t>的商品</a:t>
+            </a:r>
+            <a:r>
+              <a:rPr lang="en-US" altLang="zh-TW" dirty="0"/>
+              <a:t>	</a:t>
+            </a:r>
+          </a:p>
+          <a:p>
+            <a:pPr marL="274320" lvl="1" indent="0">
+              <a:buNone/>
+            </a:pPr>
+            <a:r>
+              <a:rPr lang="en-US" altLang="zh-TW" dirty="0"/>
               <a:t>    return </a:t>
             </a:r>
             <a:r>
@@ -30228,18 +30751,19 @@
           </a:p>
           <a:p>
             <a:pPr lvl="1"/>
-            <a:endParaRPr lang="en-US" altLang="zh-TW" dirty="0"/>
-          </a:p>
-          <a:p>
-            <a:pPr lvl="1"/>
-            <a:r>
-              <a:rPr lang="en-US" altLang="zh-TW" dirty="0">
+            <a:r>
+              <a:rPr lang="en-US" altLang="zh-TW" dirty="0" smtClean="0">
                 <a:solidFill>
                   <a:srgbClr val="FF0000"/>
                 </a:solidFill>
               </a:rPr>
               <a:t>Urls.py</a:t>
             </a:r>
+            <a:endParaRPr lang="en-US" altLang="zh-TW" dirty="0">
+              <a:solidFill>
+                <a:srgbClr val="FF0000"/>
+              </a:solidFill>
+            </a:endParaRPr>
           </a:p>
         </p:txBody>
       </p:sp>
@@ -30248,7 +30772,7 @@
           <p:cNvPr id="4" name="文字方塊 3">
             <a:extLst>
               <a:ext uri="{FF2B5EF4-FFF2-40B4-BE49-F238E27FC236}">
-                <a16:creationId xmlns:a16="http://schemas.microsoft.com/office/drawing/2014/main" id="{7DA3EC69-7520-27ED-0BF5-6F3260B6D940}"/>
+                <a16:creationId xmlns:a16="http://schemas.microsoft.com/office/drawing/2014/main" xmlns="" id="{7DA3EC69-7520-27ED-0BF5-6F3260B6D940}"/>
               </a:ext>
             </a:extLst>
           </p:cNvPr>
@@ -30257,7 +30781,7 @@
         </p:nvSpPr>
         <p:spPr>
           <a:xfrm>
-            <a:off x="358080" y="4545121"/>
+            <a:off x="358080" y="4761145"/>
             <a:ext cx="8534400" cy="1908215"/>
           </a:xfrm>
           <a:prstGeom prst="rect">
@@ -31069,7 +31593,12 @@
             <p:ph type="title"/>
           </p:nvPr>
         </p:nvSpPr>
-        <p:spPr/>
+        <p:spPr>
+          <a:xfrm>
+            <a:off x="323528" y="548680"/>
+            <a:ext cx="8534400" cy="758952"/>
+          </a:xfrm>
+        </p:spPr>
         <p:txBody>
           <a:bodyPr>
             <a:normAutofit fontScale="90000"/>
@@ -31113,24 +31642,77 @@
                   <a:srgbClr val="FF0000"/>
                 </a:solidFill>
               </a:rPr>
-              <a:t>注意要記得填</a:t>
-            </a:r>
-            <a:r>
-              <a:rPr lang="en-US" altLang="zh-TW" dirty="0" err="1">
+              <a:t>注意要記得</a:t>
+            </a:r>
+            <a:r>
+              <a:rPr lang="zh-TW" altLang="en-US" dirty="0" smtClean="0">
                 <a:solidFill>
                   <a:srgbClr val="FF0000"/>
                 </a:solidFill>
               </a:rPr>
-              <a:t>sku</a:t>
-            </a:r>
-            <a:r>
-              <a:rPr lang="zh-TW" altLang="en-US" dirty="0">
+              <a:t>填</a:t>
+            </a:r>
+            <a:r>
+              <a:rPr lang="en-US" altLang="zh-TW" dirty="0" smtClean="0">
                 <a:solidFill>
                   <a:srgbClr val="FF0000"/>
                 </a:solidFill>
               </a:rPr>
+              <a:t>id</a:t>
+            </a:r>
+            <a:r>
+              <a:rPr lang="zh-TW" altLang="en-US" dirty="0" smtClean="0">
+                <a:solidFill>
+                  <a:srgbClr val="FF0000"/>
+                </a:solidFill>
+              </a:rPr>
               <a:t>參數</a:t>
             </a:r>
+            <a:r>
+              <a:rPr lang="en-US" altLang="zh-TW" sz="4000" dirty="0" smtClean="0">
+                <a:solidFill>
+                  <a:srgbClr val="FF0000"/>
+                </a:solidFill>
+              </a:rPr>
+              <a:t>(</a:t>
+            </a:r>
+            <a:r>
+              <a:rPr lang="zh-TW" altLang="en-US" sz="4000" dirty="0" smtClean="0">
+                <a:solidFill>
+                  <a:srgbClr val="FF0000"/>
+                </a:solidFill>
+              </a:rPr>
+              <a:t>改用</a:t>
+            </a:r>
+            <a:r>
+              <a:rPr lang="en-US" altLang="zh-TW" sz="4000" dirty="0" smtClean="0">
+                <a:solidFill>
+                  <a:srgbClr val="FF0000"/>
+                </a:solidFill>
+              </a:rPr>
+              <a:t>id</a:t>
+            </a:r>
+            <a:r>
+              <a:rPr lang="zh-TW" altLang="en-US" sz="4000" dirty="0" smtClean="0">
+                <a:solidFill>
+                  <a:srgbClr val="FF0000"/>
+                </a:solidFill>
+              </a:rPr>
+              <a:t>就好</a:t>
+            </a:r>
+            <a:r>
+              <a:rPr lang="en-US" altLang="zh-TW" sz="4000" dirty="0" smtClean="0">
+                <a:solidFill>
+                  <a:srgbClr val="FF0000"/>
+                </a:solidFill>
+              </a:rPr>
+              <a:t>)</a:t>
+            </a:r>
+            <a:endParaRPr lang="zh-TW" altLang="en-US" sz="4000" dirty="0">
+              <a:solidFill>
+                <a:srgbClr val="FF0000"/>
+              </a:solidFill>
+            </a:endParaRPr>
           </a:p>
         </p:txBody>
       </p:sp>
@@ -31183,15 +31765,15 @@
               <a:t>def detail(request, </a:t>
             </a:r>
             <a:r>
-              <a:rPr lang="en-US" altLang="zh-TW" sz="6600" dirty="0" err="1">
+              <a:rPr lang="en-US" altLang="zh-TW" sz="6600" dirty="0" smtClean="0">
                 <a:solidFill>
                   <a:srgbClr val="FF0000"/>
                 </a:solidFill>
               </a:rPr>
-              <a:t>sku</a:t>
-            </a:r>
-            <a:r>
-              <a:rPr lang="en-US" altLang="zh-TW" sz="2400" dirty="0"/>
+              <a:t>id</a:t>
+            </a:r>
+            <a:r>
+              <a:rPr lang="en-US" altLang="zh-TW" sz="2400" dirty="0" smtClean="0"/>
               <a:t>):</a:t>
             </a:r>
             <a:endParaRPr lang="zh-TW" altLang="zh-TW" sz="2400" dirty="0"/>
@@ -31207,46 +31789,50 @@
             <a:endParaRPr lang="zh-TW" altLang="zh-TW" sz="2400" dirty="0"/>
           </a:p>
           <a:p>
+            <a:r>
+              <a:rPr lang="en-US" altLang="zh-TW" sz="2400" dirty="0"/>
+              <a:t> </a:t>
+            </a:r>
+            <a:r>
+              <a:rPr lang="en-US" altLang="zh-TW" sz="2400" dirty="0" smtClean="0"/>
+              <a:t>	</a:t>
+            </a:r>
+            <a:r>
+              <a:rPr lang="en-US" altLang="zh-TW" sz="2400" dirty="0" smtClean="0"/>
+              <a:t>p </a:t>
+            </a:r>
+            <a:r>
+              <a:rPr lang="en-US" altLang="zh-TW" sz="2400" dirty="0"/>
+              <a:t>= </a:t>
+            </a:r>
+            <a:r>
+              <a:rPr lang="en-US" altLang="zh-TW" sz="2400" dirty="0" err="1"/>
+              <a:t>Product.objects.get</a:t>
+            </a:r>
+            <a:r>
+              <a:rPr lang="en-US" altLang="zh-TW" sz="4000" dirty="0">
+                <a:solidFill>
+                  <a:srgbClr val="FF0000"/>
+                </a:solidFill>
+              </a:rPr>
+              <a:t>(id=id</a:t>
+            </a:r>
+            <a:r>
+              <a:rPr lang="en-US" altLang="zh-TW" sz="2400" dirty="0"/>
+              <a:t>)</a:t>
+            </a:r>
+          </a:p>
+          <a:p>
             <a:pPr marL="0" indent="0">
               <a:buNone/>
             </a:pPr>
             <a:r>
+              <a:rPr lang="en-US" altLang="zh-TW" sz="2400" dirty="0" smtClean="0"/>
+              <a:t>    </a:t>
+            </a:r>
+            <a:r>
               <a:rPr lang="en-US" altLang="zh-TW" sz="2400" dirty="0"/>
-              <a:t>        p = </a:t>
-            </a:r>
-            <a:r>
-              <a:rPr lang="en-US" altLang="zh-TW" sz="2400" dirty="0" err="1"/>
-              <a:t>Product.objects.get</a:t>
-            </a:r>
-            <a:r>
-              <a:rPr lang="en-US" altLang="zh-TW" sz="2400" dirty="0"/>
-              <a:t>(</a:t>
-            </a:r>
-            <a:r>
-              <a:rPr lang="en-US" altLang="zh-TW" sz="2400" dirty="0" err="1"/>
-              <a:t>sku</a:t>
-            </a:r>
-            <a:r>
-              <a:rPr lang="en-US" altLang="zh-TW" sz="2400" dirty="0"/>
-              <a:t>=</a:t>
-            </a:r>
-            <a:r>
-              <a:rPr lang="en-US" altLang="zh-TW" sz="2400" dirty="0" err="1"/>
-              <a:t>sku</a:t>
-            </a:r>
-            <a:r>
-              <a:rPr lang="en-US" altLang="zh-TW" sz="2400" dirty="0"/>
-              <a:t>)</a:t>
-            </a:r>
-            <a:endParaRPr lang="zh-TW" altLang="zh-TW" sz="2400" dirty="0"/>
-          </a:p>
-          <a:p>
-            <a:pPr marL="0" indent="0">
-              <a:buNone/>
-            </a:pPr>
-            <a:r>
-              <a:rPr lang="en-US" altLang="zh-TW" sz="2400" dirty="0"/>
-              <a:t>    except </a:t>
+              <a:t>except </a:t>
             </a:r>
             <a:r>
               <a:rPr lang="en-US" altLang="zh-TW" sz="2400" dirty="0" err="1"/>
@@ -32032,7 +32618,7 @@
           <p:cNvPr id="2" name="標題 1">
             <a:extLst>
               <a:ext uri="{FF2B5EF4-FFF2-40B4-BE49-F238E27FC236}">
-                <a16:creationId xmlns:a16="http://schemas.microsoft.com/office/drawing/2014/main" id="{7AA05619-B32F-0EB8-D50F-388AB6EE8CE5}"/>
+                <a16:creationId xmlns:a16="http://schemas.microsoft.com/office/drawing/2014/main" xmlns="" id="{7AA05619-B32F-0EB8-D50F-388AB6EE8CE5}"/>
               </a:ext>
             </a:extLst>
           </p:cNvPr>
@@ -32073,6 +32659,10 @@
             <a:r>
               <a:rPr lang="zh-TW" altLang="en-US" dirty="0"/>
               <a:t>的方式</a:t>
+            </a:r>
+            <a:r>
+              <a:rPr lang="en-US" altLang="zh-TW" dirty="0"/>
+              <a:t/>
             </a:r>
             <a:br>
               <a:rPr lang="en-US" altLang="zh-TW" dirty="0"/>
@@ -32126,7 +32716,7 @@
           <p:cNvPr id="3" name="投影片編號版面配置區 2">
             <a:extLst>
               <a:ext uri="{FF2B5EF4-FFF2-40B4-BE49-F238E27FC236}">
-                <a16:creationId xmlns:a16="http://schemas.microsoft.com/office/drawing/2014/main" id="{FBC5D67B-0133-724F-CA58-83583D0081FB}"/>
+                <a16:creationId xmlns:a16="http://schemas.microsoft.com/office/drawing/2014/main" xmlns="" id="{FBC5D67B-0133-724F-CA58-83583D0081FB}"/>
               </a:ext>
             </a:extLst>
           </p:cNvPr>
@@ -32156,7 +32746,7 @@
           <p:cNvPr id="5" name="文字方塊 4">
             <a:extLst>
               <a:ext uri="{FF2B5EF4-FFF2-40B4-BE49-F238E27FC236}">
-                <a16:creationId xmlns:a16="http://schemas.microsoft.com/office/drawing/2014/main" id="{CD253B96-333E-5ECD-630D-B7FF9410EE90}"/>
+                <a16:creationId xmlns:a16="http://schemas.microsoft.com/office/drawing/2014/main" xmlns="" id="{CD253B96-333E-5ECD-630D-B7FF9410EE90}"/>
               </a:ext>
             </a:extLst>
           </p:cNvPr>
@@ -32781,7 +33371,7 @@
           <p:cNvPr id="7" name="文字方塊 6">
             <a:extLst>
               <a:ext uri="{FF2B5EF4-FFF2-40B4-BE49-F238E27FC236}">
-                <a16:creationId xmlns:a16="http://schemas.microsoft.com/office/drawing/2014/main" id="{5988E6D1-37F2-7595-5564-CD67B802216D}"/>
+                <a16:creationId xmlns:a16="http://schemas.microsoft.com/office/drawing/2014/main" xmlns="" id="{5988E6D1-37F2-7595-5564-CD67B802216D}"/>
               </a:ext>
             </a:extLst>
           </p:cNvPr>
@@ -32989,6 +33579,14 @@
   <p:clrMapOvr>
     <a:masterClrMapping/>
   </p:clrMapOvr>
+  <mc:AlternateContent xmlns:mc="http://schemas.openxmlformats.org/markup-compatibility/2006">
+    <mc:Choice xmlns:p14="http://schemas.microsoft.com/office/powerpoint/2010/main" Requires="p14">
+      <p:transition spd="slow" p14:dur="2000"/>
+    </mc:Choice>
+    <mc:Fallback>
+      <p:transition spd="slow"/>
+    </mc:Fallback>
+  </mc:AlternateContent>
 </p:sld>
 </file>
 
@@ -33014,7 +33612,7 @@
           <p:cNvPr id="2" name="標題 1">
             <a:extLst>
               <a:ext uri="{FF2B5EF4-FFF2-40B4-BE49-F238E27FC236}">
-                <a16:creationId xmlns:a16="http://schemas.microsoft.com/office/drawing/2014/main" id="{A6D1FB3D-748C-9156-680B-EAC4ED84CC96}"/>
+                <a16:creationId xmlns:a16="http://schemas.microsoft.com/office/drawing/2014/main" xmlns="" id="{A6D1FB3D-748C-9156-680B-EAC4ED84CC96}"/>
               </a:ext>
             </a:extLst>
           </p:cNvPr>
@@ -33043,7 +33641,7 @@
           <p:cNvPr id="3" name="投影片編號版面配置區 2">
             <a:extLst>
               <a:ext uri="{FF2B5EF4-FFF2-40B4-BE49-F238E27FC236}">
-                <a16:creationId xmlns:a16="http://schemas.microsoft.com/office/drawing/2014/main" id="{F1A03F9F-CA92-23F5-4B16-46B397D6B4A9}"/>
+                <a16:creationId xmlns:a16="http://schemas.microsoft.com/office/drawing/2014/main" xmlns="" id="{F1A03F9F-CA92-23F5-4B16-46B397D6B4A9}"/>
               </a:ext>
             </a:extLst>
           </p:cNvPr>
@@ -33073,7 +33671,7 @@
           <p:cNvPr id="5" name="文字方塊 4">
             <a:extLst>
               <a:ext uri="{FF2B5EF4-FFF2-40B4-BE49-F238E27FC236}">
-                <a16:creationId xmlns:a16="http://schemas.microsoft.com/office/drawing/2014/main" id="{1E0398E5-03F7-8E91-3789-8F74DB28ECE6}"/>
+                <a16:creationId xmlns:a16="http://schemas.microsoft.com/office/drawing/2014/main" xmlns="" id="{1E0398E5-03F7-8E91-3789-8F74DB28ECE6}"/>
               </a:ext>
             </a:extLst>
           </p:cNvPr>
@@ -34842,6 +35440,14 @@
   <p:clrMapOvr>
     <a:masterClrMapping/>
   </p:clrMapOvr>
+  <mc:AlternateContent xmlns:mc="http://schemas.openxmlformats.org/markup-compatibility/2006">
+    <mc:Choice xmlns:p14="http://schemas.microsoft.com/office/powerpoint/2010/main" Requires="p14">
+      <p:transition spd="slow" p14:dur="2000"/>
+    </mc:Choice>
+    <mc:Fallback>
+      <p:transition spd="slow"/>
+    </mc:Fallback>
+  </mc:AlternateContent>
 </p:sld>
 </file>
 
@@ -35119,6 +35725,14 @@
   <p:clrMapOvr>
     <a:masterClrMapping/>
   </p:clrMapOvr>
+  <mc:AlternateContent xmlns:mc="http://schemas.openxmlformats.org/markup-compatibility/2006">
+    <mc:Choice xmlns:p14="http://schemas.microsoft.com/office/powerpoint/2010/main" Requires="p14">
+      <p:transition spd="slow" p14:dur="2000"/>
+    </mc:Choice>
+    <mc:Fallback>
+      <p:transition spd="slow"/>
+    </mc:Fallback>
+  </mc:AlternateContent>
 </p:sld>
 </file>
 
@@ -35504,7 +36118,7 @@
           <p:cNvPr id="6" name="接點: 肘形 5">
             <a:extLst>
               <a:ext uri="{FF2B5EF4-FFF2-40B4-BE49-F238E27FC236}">
-                <a16:creationId xmlns:a16="http://schemas.microsoft.com/office/drawing/2014/main" id="{F3B0BAC4-08A6-5397-F11B-82E425677EDB}"/>
+                <a16:creationId xmlns:a16="http://schemas.microsoft.com/office/drawing/2014/main" xmlns="" id="{F3B0BAC4-08A6-5397-F11B-82E425677EDB}"/>
               </a:ext>
             </a:extLst>
           </p:cNvPr>
@@ -35552,6 +36166,14 @@
   <p:clrMapOvr>
     <a:masterClrMapping/>
   </p:clrMapOvr>
+  <mc:AlternateContent xmlns:mc="http://schemas.openxmlformats.org/markup-compatibility/2006">
+    <mc:Choice xmlns:p14="http://schemas.microsoft.com/office/powerpoint/2010/main" Requires="p14">
+      <p:transition spd="slow" p14:dur="2000"/>
+    </mc:Choice>
+    <mc:Fallback>
+      <p:transition spd="slow"/>
+    </mc:Fallback>
+  </mc:AlternateContent>
 </p:sld>
 </file>
 
@@ -35859,7 +36481,7 @@
           <p:cNvPr id="2" name="標題 1">
             <a:extLst>
               <a:ext uri="{FF2B5EF4-FFF2-40B4-BE49-F238E27FC236}">
-                <a16:creationId xmlns:a16="http://schemas.microsoft.com/office/drawing/2014/main" id="{299763FE-4644-AAAD-378B-608E7008589E}"/>
+                <a16:creationId xmlns:a16="http://schemas.microsoft.com/office/drawing/2014/main" xmlns="" id="{299763FE-4644-AAAD-378B-608E7008589E}"/>
               </a:ext>
             </a:extLst>
           </p:cNvPr>
@@ -35886,6 +36508,10 @@
               <a:rPr lang="zh-TW" altLang="en-US" dirty="0"/>
               <a:t>透過參數列指定顯示特定資料項目</a:t>
             </a:r>
+            <a:r>
+              <a:rPr lang="en-US" altLang="zh-TW" dirty="0"/>
+              <a:t/>
+            </a:r>
             <a:br>
               <a:rPr lang="en-US" altLang="zh-TW" dirty="0"/>
             </a:br>
@@ -35909,7 +36535,7 @@
           <p:cNvPr id="3" name="投影片編號版面配置區 2">
             <a:extLst>
               <a:ext uri="{FF2B5EF4-FFF2-40B4-BE49-F238E27FC236}">
-                <a16:creationId xmlns:a16="http://schemas.microsoft.com/office/drawing/2014/main" id="{8B0F48C0-11C7-DD05-681D-ECF284290A20}"/>
+                <a16:creationId xmlns:a16="http://schemas.microsoft.com/office/drawing/2014/main" xmlns="" id="{8B0F48C0-11C7-DD05-681D-ECF284290A20}"/>
               </a:ext>
             </a:extLst>
           </p:cNvPr>
@@ -35939,7 +36565,7 @@
           <p:cNvPr id="4" name="內容版面配置區 3">
             <a:extLst>
               <a:ext uri="{FF2B5EF4-FFF2-40B4-BE49-F238E27FC236}">
-                <a16:creationId xmlns:a16="http://schemas.microsoft.com/office/drawing/2014/main" id="{80F80112-12DA-C03E-A583-AFB40B9B16B4}"/>
+                <a16:creationId xmlns:a16="http://schemas.microsoft.com/office/drawing/2014/main" xmlns="" id="{80F80112-12DA-C03E-A583-AFB40B9B16B4}"/>
               </a:ext>
             </a:extLst>
           </p:cNvPr>
@@ -36251,6 +36877,14 @@
   <p:clrMapOvr>
     <a:masterClrMapping/>
   </p:clrMapOvr>
+  <mc:AlternateContent xmlns:mc="http://schemas.openxmlformats.org/markup-compatibility/2006">
+    <mc:Choice xmlns:p14="http://schemas.microsoft.com/office/powerpoint/2010/main" Requires="p14">
+      <p:transition spd="slow" p14:dur="2000"/>
+    </mc:Choice>
+    <mc:Fallback>
+      <p:transition spd="slow"/>
+    </mc:Fallback>
+  </mc:AlternateContent>
 </p:sld>
 </file>
 
@@ -36276,7 +36910,7 @@
           <p:cNvPr id="2" name="標題 1">
             <a:extLst>
               <a:ext uri="{FF2B5EF4-FFF2-40B4-BE49-F238E27FC236}">
-                <a16:creationId xmlns:a16="http://schemas.microsoft.com/office/drawing/2014/main" id="{299763FE-4644-AAAD-378B-608E7008589E}"/>
+                <a16:creationId xmlns:a16="http://schemas.microsoft.com/office/drawing/2014/main" xmlns="" id="{299763FE-4644-AAAD-378B-608E7008589E}"/>
               </a:ext>
             </a:extLst>
           </p:cNvPr>
@@ -36303,6 +36937,10 @@
               <a:rPr lang="zh-TW" altLang="en-US" dirty="0"/>
               <a:t>透過參數列指定顯示特定資料項目</a:t>
             </a:r>
+            <a:r>
+              <a:rPr lang="en-US" altLang="zh-TW" dirty="0"/>
+              <a:t/>
+            </a:r>
             <a:br>
               <a:rPr lang="en-US" altLang="zh-TW" dirty="0"/>
             </a:br>
@@ -36326,7 +36964,7 @@
           <p:cNvPr id="3" name="投影片編號版面配置區 2">
             <a:extLst>
               <a:ext uri="{FF2B5EF4-FFF2-40B4-BE49-F238E27FC236}">
-                <a16:creationId xmlns:a16="http://schemas.microsoft.com/office/drawing/2014/main" id="{8B0F48C0-11C7-DD05-681D-ECF284290A20}"/>
+                <a16:creationId xmlns:a16="http://schemas.microsoft.com/office/drawing/2014/main" xmlns="" id="{8B0F48C0-11C7-DD05-681D-ECF284290A20}"/>
               </a:ext>
             </a:extLst>
           </p:cNvPr>
@@ -36356,7 +36994,7 @@
           <p:cNvPr id="4" name="內容版面配置區 3">
             <a:extLst>
               <a:ext uri="{FF2B5EF4-FFF2-40B4-BE49-F238E27FC236}">
-                <a16:creationId xmlns:a16="http://schemas.microsoft.com/office/drawing/2014/main" id="{80F80112-12DA-C03E-A583-AFB40B9B16B4}"/>
+                <a16:creationId xmlns:a16="http://schemas.microsoft.com/office/drawing/2014/main" xmlns="" id="{80F80112-12DA-C03E-A583-AFB40B9B16B4}"/>
               </a:ext>
             </a:extLst>
           </p:cNvPr>
@@ -36587,6 +37225,14 @@
   <p:clrMapOvr>
     <a:masterClrMapping/>
   </p:clrMapOvr>
+  <mc:AlternateContent xmlns:mc="http://schemas.openxmlformats.org/markup-compatibility/2006">
+    <mc:Choice xmlns:p14="http://schemas.microsoft.com/office/powerpoint/2010/main" Requires="p14">
+      <p:transition spd="slow" p14:dur="2000"/>
+    </mc:Choice>
+    <mc:Fallback>
+      <p:transition spd="slow"/>
+    </mc:Fallback>
+  </mc:AlternateContent>
 </p:sld>
 </file>
 
@@ -36612,7 +37258,7 @@
           <p:cNvPr id="2" name="標題 1">
             <a:extLst>
               <a:ext uri="{FF2B5EF4-FFF2-40B4-BE49-F238E27FC236}">
-                <a16:creationId xmlns:a16="http://schemas.microsoft.com/office/drawing/2014/main" id="{299763FE-4644-AAAD-378B-608E7008589E}"/>
+                <a16:creationId xmlns:a16="http://schemas.microsoft.com/office/drawing/2014/main" xmlns="" id="{299763FE-4644-AAAD-378B-608E7008589E}"/>
               </a:ext>
             </a:extLst>
           </p:cNvPr>
@@ -36639,6 +37285,10 @@
               <a:rPr lang="zh-TW" altLang="en-US" dirty="0"/>
               <a:t>透過參數列指定顯示特定資料項目</a:t>
             </a:r>
+            <a:r>
+              <a:rPr lang="en-US" altLang="zh-TW" dirty="0"/>
+              <a:t/>
+            </a:r>
             <a:br>
               <a:rPr lang="en-US" altLang="zh-TW" dirty="0"/>
             </a:br>
@@ -36655,7 +37305,7 @@
           <p:cNvPr id="3" name="投影片編號版面配置區 2">
             <a:extLst>
               <a:ext uri="{FF2B5EF4-FFF2-40B4-BE49-F238E27FC236}">
-                <a16:creationId xmlns:a16="http://schemas.microsoft.com/office/drawing/2014/main" id="{8B0F48C0-11C7-DD05-681D-ECF284290A20}"/>
+                <a16:creationId xmlns:a16="http://schemas.microsoft.com/office/drawing/2014/main" xmlns="" id="{8B0F48C0-11C7-DD05-681D-ECF284290A20}"/>
               </a:ext>
             </a:extLst>
           </p:cNvPr>
@@ -36685,7 +37335,7 @@
           <p:cNvPr id="4" name="內容版面配置區 3">
             <a:extLst>
               <a:ext uri="{FF2B5EF4-FFF2-40B4-BE49-F238E27FC236}">
-                <a16:creationId xmlns:a16="http://schemas.microsoft.com/office/drawing/2014/main" id="{80F80112-12DA-C03E-A583-AFB40B9B16B4}"/>
+                <a16:creationId xmlns:a16="http://schemas.microsoft.com/office/drawing/2014/main" xmlns="" id="{80F80112-12DA-C03E-A583-AFB40B9B16B4}"/>
               </a:ext>
             </a:extLst>
           </p:cNvPr>
@@ -36893,6 +37543,14 @@
   <p:clrMapOvr>
     <a:masterClrMapping/>
   </p:clrMapOvr>
+  <mc:AlternateContent xmlns:mc="http://schemas.openxmlformats.org/markup-compatibility/2006">
+    <mc:Choice xmlns:p14="http://schemas.microsoft.com/office/powerpoint/2010/main" Requires="p14">
+      <p:transition spd="slow" p14:dur="2000"/>
+    </mc:Choice>
+    <mc:Fallback>
+      <p:transition spd="slow"/>
+    </mc:Fallback>
+  </mc:AlternateContent>
 </p:sld>
 </file>
 
@@ -36918,7 +37576,7 @@
           <p:cNvPr id="2" name="標題 1">
             <a:extLst>
               <a:ext uri="{FF2B5EF4-FFF2-40B4-BE49-F238E27FC236}">
-                <a16:creationId xmlns:a16="http://schemas.microsoft.com/office/drawing/2014/main" id="{F08E1803-FE40-AA30-F7F5-8400D4E0A576}"/>
+                <a16:creationId xmlns:a16="http://schemas.microsoft.com/office/drawing/2014/main" xmlns="" id="{F08E1803-FE40-AA30-F7F5-8400D4E0A576}"/>
               </a:ext>
             </a:extLst>
           </p:cNvPr>
@@ -36946,7 +37604,7 @@
           <p:cNvPr id="3" name="投影片編號版面配置區 2">
             <a:extLst>
               <a:ext uri="{FF2B5EF4-FFF2-40B4-BE49-F238E27FC236}">
-                <a16:creationId xmlns:a16="http://schemas.microsoft.com/office/drawing/2014/main" id="{1B21C000-8054-1C80-E31A-08E83A35F94E}"/>
+                <a16:creationId xmlns:a16="http://schemas.microsoft.com/office/drawing/2014/main" xmlns="" id="{1B21C000-8054-1C80-E31A-08E83A35F94E}"/>
               </a:ext>
             </a:extLst>
           </p:cNvPr>
@@ -36976,7 +37634,7 @@
           <p:cNvPr id="5" name="內容版面配置區 4" descr="一張含有 桌 的圖片&#10;&#10;自動產生的描述">
             <a:extLst>
               <a:ext uri="{FF2B5EF4-FFF2-40B4-BE49-F238E27FC236}">
-                <a16:creationId xmlns:a16="http://schemas.microsoft.com/office/drawing/2014/main" id="{532366A6-5493-B130-9F03-C6B69D7613DF}"/>
+                <a16:creationId xmlns:a16="http://schemas.microsoft.com/office/drawing/2014/main" xmlns="" id="{532366A6-5493-B130-9F03-C6B69D7613DF}"/>
               </a:ext>
             </a:extLst>
           </p:cNvPr>
@@ -37038,7 +37696,7 @@
           <p:cNvPr id="2" name="標題 1">
             <a:extLst>
               <a:ext uri="{FF2B5EF4-FFF2-40B4-BE49-F238E27FC236}">
-                <a16:creationId xmlns:a16="http://schemas.microsoft.com/office/drawing/2014/main" id="{19407C30-A697-2BE8-4FD1-3A31CFEE4971}"/>
+                <a16:creationId xmlns:a16="http://schemas.microsoft.com/office/drawing/2014/main" xmlns="" id="{19407C30-A697-2BE8-4FD1-3A31CFEE4971}"/>
               </a:ext>
             </a:extLst>
           </p:cNvPr>
@@ -37081,7 +37739,7 @@
           <p:cNvPr id="3" name="投影片編號版面配置區 2">
             <a:extLst>
               <a:ext uri="{FF2B5EF4-FFF2-40B4-BE49-F238E27FC236}">
-                <a16:creationId xmlns:a16="http://schemas.microsoft.com/office/drawing/2014/main" id="{98954334-CB09-3C78-547F-24432F8D7F84}"/>
+                <a16:creationId xmlns:a16="http://schemas.microsoft.com/office/drawing/2014/main" xmlns="" id="{98954334-CB09-3C78-547F-24432F8D7F84}"/>
               </a:ext>
             </a:extLst>
           </p:cNvPr>
@@ -37111,7 +37769,7 @@
           <p:cNvPr id="7" name="圖片 6">
             <a:extLst>
               <a:ext uri="{FF2B5EF4-FFF2-40B4-BE49-F238E27FC236}">
-                <a16:creationId xmlns:a16="http://schemas.microsoft.com/office/drawing/2014/main" id="{9D20B554-F121-337F-A5FC-A51E394E316B}"/>
+                <a16:creationId xmlns:a16="http://schemas.microsoft.com/office/drawing/2014/main" xmlns="" id="{9D20B554-F121-337F-A5FC-A51E394E316B}"/>
               </a:ext>
             </a:extLst>
           </p:cNvPr>
@@ -37171,7 +37829,7 @@
           <p:cNvPr id="2" name="標題 1">
             <a:extLst>
               <a:ext uri="{FF2B5EF4-FFF2-40B4-BE49-F238E27FC236}">
-                <a16:creationId xmlns:a16="http://schemas.microsoft.com/office/drawing/2014/main" id="{06075992-6867-AF97-B33D-DA03FBCAB28D}"/>
+                <a16:creationId xmlns:a16="http://schemas.microsoft.com/office/drawing/2014/main" xmlns="" id="{06075992-6867-AF97-B33D-DA03FBCAB28D}"/>
               </a:ext>
             </a:extLst>
           </p:cNvPr>
@@ -37251,7 +37909,7 @@
           <p:cNvPr id="3" name="投影片編號版面配置區 2">
             <a:extLst>
               <a:ext uri="{FF2B5EF4-FFF2-40B4-BE49-F238E27FC236}">
-                <a16:creationId xmlns:a16="http://schemas.microsoft.com/office/drawing/2014/main" id="{0C111103-11F9-F7F9-4349-4303A2EA969B}"/>
+                <a16:creationId xmlns:a16="http://schemas.microsoft.com/office/drawing/2014/main" xmlns="" id="{0C111103-11F9-F7F9-4349-4303A2EA969B}"/>
               </a:ext>
             </a:extLst>
           </p:cNvPr>
@@ -37286,7 +37944,7 @@
           <p:cNvPr id="8" name="內容版面配置區 7">
             <a:extLst>
               <a:ext uri="{FF2B5EF4-FFF2-40B4-BE49-F238E27FC236}">
-                <a16:creationId xmlns:a16="http://schemas.microsoft.com/office/drawing/2014/main" id="{290A66A5-0A75-D608-400E-4ADF7B9D0E91}"/>
+                <a16:creationId xmlns:a16="http://schemas.microsoft.com/office/drawing/2014/main" xmlns="" id="{290A66A5-0A75-D608-400E-4ADF7B9D0E91}"/>
               </a:ext>
             </a:extLst>
           </p:cNvPr>
@@ -37322,7 +37980,7 @@
           <p:cNvPr id="10" name="圖片 9">
             <a:extLst>
               <a:ext uri="{FF2B5EF4-FFF2-40B4-BE49-F238E27FC236}">
-                <a16:creationId xmlns:a16="http://schemas.microsoft.com/office/drawing/2014/main" id="{DC91ACAF-4284-3D04-3810-CE62020465C5}"/>
+                <a16:creationId xmlns:a16="http://schemas.microsoft.com/office/drawing/2014/main" xmlns="" id="{DC91ACAF-4284-3D04-3810-CE62020465C5}"/>
               </a:ext>
             </a:extLst>
           </p:cNvPr>
@@ -37389,7 +38047,7 @@
           <p:cNvPr id="2" name="標題 1">
             <a:extLst>
               <a:ext uri="{FF2B5EF4-FFF2-40B4-BE49-F238E27FC236}">
-                <a16:creationId xmlns:a16="http://schemas.microsoft.com/office/drawing/2014/main" id="{0B84BDE7-94E0-C1B4-AAA3-7145DB2C5839}"/>
+                <a16:creationId xmlns:a16="http://schemas.microsoft.com/office/drawing/2014/main" xmlns="" id="{0B84BDE7-94E0-C1B4-AAA3-7145DB2C5839}"/>
               </a:ext>
             </a:extLst>
           </p:cNvPr>
@@ -37410,6 +38068,10 @@
             <a:r>
               <a:rPr lang="zh-TW" altLang="en-US" dirty="0"/>
               <a:t>練習用模板語法顯示資料</a:t>
+            </a:r>
+            <a:r>
+              <a:rPr lang="en-US" altLang="zh-TW" dirty="0"/>
+              <a:t/>
             </a:r>
             <a:br>
               <a:rPr lang="en-US" altLang="zh-TW" dirty="0"/>
@@ -37443,7 +38105,7 @@
           <p:cNvPr id="3" name="直排文字版面配置區 2">
             <a:extLst>
               <a:ext uri="{FF2B5EF4-FFF2-40B4-BE49-F238E27FC236}">
-                <a16:creationId xmlns:a16="http://schemas.microsoft.com/office/drawing/2014/main" id="{7475DFBA-081B-83B9-CB3B-AB84EB823149}"/>
+                <a16:creationId xmlns:a16="http://schemas.microsoft.com/office/drawing/2014/main" xmlns="" id="{7475DFBA-081B-83B9-CB3B-AB84EB823149}"/>
               </a:ext>
             </a:extLst>
           </p:cNvPr>
@@ -37468,7 +38130,7 @@
           <p:cNvPr id="4" name="投影片編號版面配置區 3">
             <a:extLst>
               <a:ext uri="{FF2B5EF4-FFF2-40B4-BE49-F238E27FC236}">
-                <a16:creationId xmlns:a16="http://schemas.microsoft.com/office/drawing/2014/main" id="{0669CB14-7E25-DB09-7AE3-72E8E2C741B7}"/>
+                <a16:creationId xmlns:a16="http://schemas.microsoft.com/office/drawing/2014/main" xmlns="" id="{0669CB14-7E25-DB09-7AE3-72E8E2C741B7}"/>
               </a:ext>
             </a:extLst>
           </p:cNvPr>
@@ -37498,7 +38160,7 @@
           <p:cNvPr id="5" name="物件 4">
             <a:extLst>
               <a:ext uri="{FF2B5EF4-FFF2-40B4-BE49-F238E27FC236}">
-                <a16:creationId xmlns:a16="http://schemas.microsoft.com/office/drawing/2014/main" id="{421B4981-F397-65E1-FE7E-9FBFDCAA9385}"/>
+                <a16:creationId xmlns:a16="http://schemas.microsoft.com/office/drawing/2014/main" xmlns="" id="{421B4981-F397-65E1-FE7E-9FBFDCAA9385}"/>
               </a:ext>
             </a:extLst>
           </p:cNvPr>
@@ -37521,12 +38183,12 @@
           <a:graphicData uri="http://schemas.openxmlformats.org/presentationml/2006/ole">
             <mc:AlternateContent xmlns:mc="http://schemas.openxmlformats.org/markup-compatibility/2006">
               <mc:Choice xmlns:v="urn:schemas-microsoft-com:vml" Requires="v">
-                <p:oleObj name="封裝程式殼層物件" showAsIcon="1" r:id="rId2" imgW="4444934" imgH="597003" progId="Package">
+                <p:oleObj spid="_x0000_s1041" name="封裝程式殼層物件" showAsIcon="1" r:id="rId3" imgW="4444934" imgH="597003" progId="Package">
                   <p:embed/>
                 </p:oleObj>
               </mc:Choice>
               <mc:Fallback>
-                <p:oleObj name="封裝程式殼層物件" showAsIcon="1" r:id="rId2" imgW="4444934" imgH="597003" progId="Package">
+                <p:oleObj name="封裝程式殼層物件" showAsIcon="1" r:id="rId3" imgW="4444934" imgH="597003" progId="Package">
                   <p:embed/>
                   <p:pic>
                     <p:nvPicPr>
@@ -37535,7 +38197,7 @@
                       <p:nvPr/>
                     </p:nvPicPr>
                     <p:blipFill>
-                      <a:blip r:embed="rId3"/>
+                      <a:blip r:embed="rId4"/>
                       <a:stretch>
                         <a:fillRect/>
                       </a:stretch>
@@ -37561,7 +38223,7 @@
           <p:cNvPr id="6" name="物件 5">
             <a:extLst>
               <a:ext uri="{FF2B5EF4-FFF2-40B4-BE49-F238E27FC236}">
-                <a16:creationId xmlns:a16="http://schemas.microsoft.com/office/drawing/2014/main" id="{8E49B115-DE59-AE53-FBA9-203AA5FAD97F}"/>
+                <a16:creationId xmlns:a16="http://schemas.microsoft.com/office/drawing/2014/main" xmlns="" id="{8E49B115-DE59-AE53-FBA9-203AA5FAD97F}"/>
               </a:ext>
             </a:extLst>
           </p:cNvPr>
@@ -37584,12 +38246,12 @@
           <a:graphicData uri="http://schemas.openxmlformats.org/presentationml/2006/ole">
             <mc:AlternateContent xmlns:mc="http://schemas.openxmlformats.org/markup-compatibility/2006">
               <mc:Choice xmlns:v="urn:schemas-microsoft-com:vml" Requires="v">
-                <p:oleObj name="封裝程式殼層物件" showAsIcon="1" r:id="rId4" imgW="2584466" imgH="597003" progId="Package">
+                <p:oleObj spid="_x0000_s1042" name="封裝程式殼層物件" showAsIcon="1" r:id="rId5" imgW="2584466" imgH="597003" progId="Package">
                   <p:embed/>
                 </p:oleObj>
               </mc:Choice>
               <mc:Fallback>
-                <p:oleObj name="封裝程式殼層物件" showAsIcon="1" r:id="rId4" imgW="2584466" imgH="597003" progId="Package">
+                <p:oleObj name="封裝程式殼層物件" showAsIcon="1" r:id="rId5" imgW="2584466" imgH="597003" progId="Package">
                   <p:embed/>
                   <p:pic>
                     <p:nvPicPr>
@@ -37598,7 +38260,7 @@
                       <p:nvPr/>
                     </p:nvPicPr>
                     <p:blipFill>
-                      <a:blip r:embed="rId5"/>
+                      <a:blip r:embed="rId6"/>
                       <a:stretch>
                         <a:fillRect/>
                       </a:stretch>
@@ -37624,7 +38286,7 @@
           <p:cNvPr id="7" name="物件 6">
             <a:extLst>
               <a:ext uri="{FF2B5EF4-FFF2-40B4-BE49-F238E27FC236}">
-                <a16:creationId xmlns:a16="http://schemas.microsoft.com/office/drawing/2014/main" id="{A966E8F2-360B-E062-2DA0-B9CED649E496}"/>
+                <a16:creationId xmlns:a16="http://schemas.microsoft.com/office/drawing/2014/main" xmlns="" id="{A966E8F2-360B-E062-2DA0-B9CED649E496}"/>
               </a:ext>
             </a:extLst>
           </p:cNvPr>
@@ -37647,12 +38309,12 @@
           <a:graphicData uri="http://schemas.openxmlformats.org/presentationml/2006/ole">
             <mc:AlternateContent xmlns:mc="http://schemas.openxmlformats.org/markup-compatibility/2006">
               <mc:Choice xmlns:v="urn:schemas-microsoft-com:vml" Requires="v">
-                <p:oleObj name="封裝程式殼層物件" showAsIcon="1" r:id="rId6" imgW="2698865" imgH="597003" progId="Package">
+                <p:oleObj spid="_x0000_s1043" name="封裝程式殼層物件" showAsIcon="1" r:id="rId7" imgW="2698865" imgH="597003" progId="Package">
                   <p:embed/>
                 </p:oleObj>
               </mc:Choice>
               <mc:Fallback>
-                <p:oleObj name="封裝程式殼層物件" showAsIcon="1" r:id="rId6" imgW="2698865" imgH="597003" progId="Package">
+                <p:oleObj name="封裝程式殼層物件" showAsIcon="1" r:id="rId7" imgW="2698865" imgH="597003" progId="Package">
                   <p:embed/>
                   <p:pic>
                     <p:nvPicPr>
@@ -37661,7 +38323,7 @@
                       <p:nvPr/>
                     </p:nvPicPr>
                     <p:blipFill>
-                      <a:blip r:embed="rId7"/>
+                      <a:blip r:embed="rId8"/>
                       <a:stretch>
                         <a:fillRect/>
                       </a:stretch>
@@ -37717,7 +38379,7 @@
           <p:cNvPr id="2" name="標題 1">
             <a:extLst>
               <a:ext uri="{FF2B5EF4-FFF2-40B4-BE49-F238E27FC236}">
-                <a16:creationId xmlns:a16="http://schemas.microsoft.com/office/drawing/2014/main" id="{F0D4A236-26FB-637E-FD00-DDF1BEB14E3B}"/>
+                <a16:creationId xmlns:a16="http://schemas.microsoft.com/office/drawing/2014/main" xmlns="" id="{F0D4A236-26FB-637E-FD00-DDF1BEB14E3B}"/>
               </a:ext>
             </a:extLst>
           </p:cNvPr>
@@ -37745,7 +38407,7 @@
           <p:cNvPr id="3" name="投影片編號版面配置區 2">
             <a:extLst>
               <a:ext uri="{FF2B5EF4-FFF2-40B4-BE49-F238E27FC236}">
-                <a16:creationId xmlns:a16="http://schemas.microsoft.com/office/drawing/2014/main" id="{0243ADE5-CA4B-317F-E265-CCDBB373A14D}"/>
+                <a16:creationId xmlns:a16="http://schemas.microsoft.com/office/drawing/2014/main" xmlns="" id="{0243ADE5-CA4B-317F-E265-CCDBB373A14D}"/>
               </a:ext>
             </a:extLst>
           </p:cNvPr>
@@ -37775,7 +38437,7 @@
           <p:cNvPr id="5" name="圖片 4">
             <a:extLst>
               <a:ext uri="{FF2B5EF4-FFF2-40B4-BE49-F238E27FC236}">
-                <a16:creationId xmlns:a16="http://schemas.microsoft.com/office/drawing/2014/main" id="{E086FD14-C729-C45B-A4F4-7146D9AFDD7E}"/>
+                <a16:creationId xmlns:a16="http://schemas.microsoft.com/office/drawing/2014/main" xmlns="" id="{E086FD14-C729-C45B-A4F4-7146D9AFDD7E}"/>
               </a:ext>
             </a:extLst>
           </p:cNvPr>
@@ -37805,7 +38467,7 @@
           <p:cNvPr id="7" name="圖片 6">
             <a:extLst>
               <a:ext uri="{FF2B5EF4-FFF2-40B4-BE49-F238E27FC236}">
-                <a16:creationId xmlns:a16="http://schemas.microsoft.com/office/drawing/2014/main" id="{F0614F61-E1A9-13EB-F9D6-762DDE540238}"/>
+                <a16:creationId xmlns:a16="http://schemas.microsoft.com/office/drawing/2014/main" xmlns="" id="{F0614F61-E1A9-13EB-F9D6-762DDE540238}"/>
               </a:ext>
             </a:extLst>
           </p:cNvPr>
@@ -37865,7 +38527,7 @@
           <p:cNvPr id="2" name="投影片編號版面配置區 1">
             <a:extLst>
               <a:ext uri="{FF2B5EF4-FFF2-40B4-BE49-F238E27FC236}">
-                <a16:creationId xmlns:a16="http://schemas.microsoft.com/office/drawing/2014/main" id="{4C9E5541-B14B-6F1E-9E86-2D229ADB855A}"/>
+                <a16:creationId xmlns:a16="http://schemas.microsoft.com/office/drawing/2014/main" xmlns="" id="{4C9E5541-B14B-6F1E-9E86-2D229ADB855A}"/>
               </a:ext>
             </a:extLst>
           </p:cNvPr>
@@ -37895,7 +38557,7 @@
           <p:cNvPr id="8" name="圖片 7">
             <a:extLst>
               <a:ext uri="{FF2B5EF4-FFF2-40B4-BE49-F238E27FC236}">
-                <a16:creationId xmlns:a16="http://schemas.microsoft.com/office/drawing/2014/main" id="{BA914806-652F-59A7-2A46-CAD47C3824FD}"/>
+                <a16:creationId xmlns:a16="http://schemas.microsoft.com/office/drawing/2014/main" xmlns="" id="{BA914806-652F-59A7-2A46-CAD47C3824FD}"/>
               </a:ext>
             </a:extLst>
           </p:cNvPr>
@@ -37961,7 +38623,7 @@
           <p:cNvPr id="2" name="投影片編號版面配置區 1">
             <a:extLst>
               <a:ext uri="{FF2B5EF4-FFF2-40B4-BE49-F238E27FC236}">
-                <a16:creationId xmlns:a16="http://schemas.microsoft.com/office/drawing/2014/main" id="{77B50EDD-87E8-EDDA-1734-B5D701E311B6}"/>
+                <a16:creationId xmlns:a16="http://schemas.microsoft.com/office/drawing/2014/main" xmlns="" id="{77B50EDD-87E8-EDDA-1734-B5D701E311B6}"/>
               </a:ext>
             </a:extLst>
           </p:cNvPr>
@@ -37991,7 +38653,7 @@
           <p:cNvPr id="6" name="圖片 5">
             <a:extLst>
               <a:ext uri="{FF2B5EF4-FFF2-40B4-BE49-F238E27FC236}">
-                <a16:creationId xmlns:a16="http://schemas.microsoft.com/office/drawing/2014/main" id="{EE68953A-837A-0041-F5DB-B3A1F89AB275}"/>
+                <a16:creationId xmlns:a16="http://schemas.microsoft.com/office/drawing/2014/main" xmlns="" id="{EE68953A-837A-0041-F5DB-B3A1F89AB275}"/>
               </a:ext>
             </a:extLst>
           </p:cNvPr>
@@ -38057,7 +38719,7 @@
           <p:cNvPr id="2" name="投影片編號版面配置區 1">
             <a:extLst>
               <a:ext uri="{FF2B5EF4-FFF2-40B4-BE49-F238E27FC236}">
-                <a16:creationId xmlns:a16="http://schemas.microsoft.com/office/drawing/2014/main" id="{55023216-D221-3D01-4A7C-AF05DDB9F06E}"/>
+                <a16:creationId xmlns:a16="http://schemas.microsoft.com/office/drawing/2014/main" xmlns="" id="{55023216-D221-3D01-4A7C-AF05DDB9F06E}"/>
               </a:ext>
             </a:extLst>
           </p:cNvPr>
@@ -38087,7 +38749,7 @@
           <p:cNvPr id="4" name="圖片 3">
             <a:extLst>
               <a:ext uri="{FF2B5EF4-FFF2-40B4-BE49-F238E27FC236}">
-                <a16:creationId xmlns:a16="http://schemas.microsoft.com/office/drawing/2014/main" id="{3031C05F-2295-3EEF-A854-051A90043940}"/>
+                <a16:creationId xmlns:a16="http://schemas.microsoft.com/office/drawing/2014/main" xmlns="" id="{3031C05F-2295-3EEF-A854-051A90043940}"/>
               </a:ext>
             </a:extLst>
           </p:cNvPr>
@@ -38117,7 +38779,7 @@
           <p:cNvPr id="5" name="矩形 4">
             <a:extLst>
               <a:ext uri="{FF2B5EF4-FFF2-40B4-BE49-F238E27FC236}">
-                <a16:creationId xmlns:a16="http://schemas.microsoft.com/office/drawing/2014/main" id="{CA6F857C-D54F-E4AB-593C-F2400B03C8A3}"/>
+                <a16:creationId xmlns:a16="http://schemas.microsoft.com/office/drawing/2014/main" xmlns="" id="{CA6F857C-D54F-E4AB-593C-F2400B03C8A3}"/>
               </a:ext>
             </a:extLst>
           </p:cNvPr>
@@ -38169,7 +38831,7 @@
           <p:cNvPr id="7" name="文字方塊 6">
             <a:extLst>
               <a:ext uri="{FF2B5EF4-FFF2-40B4-BE49-F238E27FC236}">
-                <a16:creationId xmlns:a16="http://schemas.microsoft.com/office/drawing/2014/main" id="{0E721710-3320-EDBC-3CD5-28961BE28D4E}"/>
+                <a16:creationId xmlns:a16="http://schemas.microsoft.com/office/drawing/2014/main" xmlns="" id="{0E721710-3320-EDBC-3CD5-28961BE28D4E}"/>
               </a:ext>
             </a:extLst>
           </p:cNvPr>
@@ -38221,7 +38883,7 @@
           <p:cNvPr id="9" name="文字方塊 8">
             <a:extLst>
               <a:ext uri="{FF2B5EF4-FFF2-40B4-BE49-F238E27FC236}">
-                <a16:creationId xmlns:a16="http://schemas.microsoft.com/office/drawing/2014/main" id="{5E3B4C17-8CDB-9F26-A054-6D929835F4E6}"/>
+                <a16:creationId xmlns:a16="http://schemas.microsoft.com/office/drawing/2014/main" xmlns="" id="{5E3B4C17-8CDB-9F26-A054-6D929835F4E6}"/>
               </a:ext>
             </a:extLst>
           </p:cNvPr>
@@ -38287,7 +38949,7 @@
           <p:cNvPr id="4" name="投影片編號版面配置區 3">
             <a:extLst>
               <a:ext uri="{FF2B5EF4-FFF2-40B4-BE49-F238E27FC236}">
-                <a16:creationId xmlns:a16="http://schemas.microsoft.com/office/drawing/2014/main" id="{7561EBB5-4CB0-2270-E9C9-5CA0BF048242}"/>
+                <a16:creationId xmlns:a16="http://schemas.microsoft.com/office/drawing/2014/main" xmlns="" id="{7561EBB5-4CB0-2270-E9C9-5CA0BF048242}"/>
               </a:ext>
             </a:extLst>
           </p:cNvPr>
@@ -38317,7 +38979,7 @@
           <p:cNvPr id="7" name="文字方塊 6">
             <a:extLst>
               <a:ext uri="{FF2B5EF4-FFF2-40B4-BE49-F238E27FC236}">
-                <a16:creationId xmlns:a16="http://schemas.microsoft.com/office/drawing/2014/main" id="{9E6861C8-F1C4-8E05-6CE6-19DCABC6F5A8}"/>
+                <a16:creationId xmlns:a16="http://schemas.microsoft.com/office/drawing/2014/main" xmlns="" id="{9E6861C8-F1C4-8E05-6CE6-19DCABC6F5A8}"/>
               </a:ext>
             </a:extLst>
           </p:cNvPr>
@@ -39243,7 +39905,7 @@
   <a:extraClrSchemeLst/>
   <a:extLst>
     <a:ext uri="{05A4C25C-085E-4340-85A3-A5531E510DB2}">
-      <thm15:themeFamily xmlns:thm15="http://schemas.microsoft.com/office/thememl/2012/main" name="Office Theme" id="{62F939B6-93AF-4DB8-9C6B-D6C7DFDC589F}" vid="{4A3C46E8-61CC-4603-A589-7422A47A8E4A}"/>
+      <thm15:themeFamily xmlns:thm15="http://schemas.microsoft.com/office/thememl/2012/main" xmlns="" name="Office Theme" id="{62F939B6-93AF-4DB8-9C6B-D6C7DFDC589F}" vid="{4A3C46E8-61CC-4603-A589-7422A47A8E4A}"/>
     </a:ext>
   </a:extLst>
 </a:theme>
